--- a/preview_v7/cn/l-cn-bs-u2-4.pptx
+++ b/preview_v7/cn/l-cn-bs-u2-4.pptx
@@ -3140,31 +3140,47 @@
           </a:p>
         </p:txBody>
       </p:sp>
-      <p:pic>
-        <p:nvPicPr>
-          <p:cNvPr id="3" name="Picture 2" descr="plantago.jpg"/>
-          <p:cNvPicPr>
-            <a:picLocks noChangeAspect="1"/>
-          </p:cNvPicPr>
-          <p:nvPr/>
-        </p:nvPicPr>
-        <p:blipFill>
-          <a:blip r:embed="rId2"/>
-          <a:srcRect t="12480" b="12480"/>
-          <a:stretch>
-            <a:fillRect/>
-          </a:stretch>
-        </p:blipFill>
-        <p:spPr>
-          <a:xfrm>
-            <a:off x="0" y="0"/>
-            <a:ext cx="12191695" cy="6858000"/>
-          </a:xfrm>
-          <a:prstGeom prst="rect">
-            <a:avLst/>
-          </a:prstGeom>
-        </p:spPr>
-      </p:pic>
+      <p:sp>
+        <p:nvSpPr>
+          <p:cNvPr id="3" name="TextBox 2"/>
+          <p:cNvSpPr txBox="1"/>
+          <p:nvPr/>
+        </p:nvSpPr>
+        <p:spPr>
+          <a:xfrm>
+            <a:off x="640080" y="640080"/>
+            <a:ext cx="10911535" cy="502920"/>
+          </a:xfrm>
+          <a:prstGeom prst="rect">
+            <a:avLst/>
+          </a:prstGeom>
+          <a:noFill/>
+        </p:spPr>
+        <p:txBody>
+          <a:bodyPr wrap="square" anchor="t" lIns="0" rIns="0" tIns="0" bIns="0">
+            <a:spAutoFit/>
+          </a:bodyPr>
+          <a:lstStyle/>
+          <a:p>
+            <a:pPr algn="l">
+              <a:spcAft>
+                <a:spcPts val="0"/>
+              </a:spcAft>
+            </a:pPr>
+            <a:r>
+              <a:rPr sz="1200" b="1">
+                <a:solidFill>
+                  <a:srgbClr val="B23A2A"/>
+                </a:solidFill>
+                <a:latin typeface="微软雅黑"/>
+                <a:ea typeface="微软雅黑"/>
+                <a:cs typeface="微软雅黑"/>
+              </a:rPr>
+              <a:t>语文 · 必修上册 · 第2单元 劳动光荣</a:t>
+            </a:r>
+          </a:p>
+        </p:txBody>
+      </p:sp>
       <p:sp>
         <p:nvSpPr>
           <p:cNvPr id="4" name="Rectangle 3"/>
@@ -3173,16 +3189,14 @@
         </p:nvSpPr>
         <p:spPr>
           <a:xfrm>
-            <a:off x="0" y="0"/>
-            <a:ext cx="12191695" cy="6858000"/>
+            <a:off x="640080" y="1207008"/>
+            <a:ext cx="822960" cy="30480"/>
           </a:xfrm>
           <a:prstGeom prst="rect">
             <a:avLst/>
           </a:prstGeom>
           <a:solidFill>
-            <a:srgbClr val="1C2A33">
-              <a:alpha val="48000"/>
-            </a:srgbClr>
+            <a:srgbClr val="B23A2A"/>
           </a:solidFill>
           <a:ln>
             <a:noFill/>
@@ -3213,14 +3227,92 @@
       </p:sp>
       <p:sp>
         <p:nvSpPr>
-          <p:cNvPr id="5" name="Rectangle 4"/>
+          <p:cNvPr id="5" name="TextBox 4"/>
+          <p:cNvSpPr txBox="1"/>
+          <p:nvPr/>
+        </p:nvSpPr>
+        <p:spPr>
+          <a:xfrm>
+            <a:off x="640080" y="1737360"/>
+            <a:ext cx="10911535" cy="2011680"/>
+          </a:xfrm>
+          <a:prstGeom prst="rect">
+            <a:avLst/>
+          </a:prstGeom>
+          <a:noFill/>
+        </p:spPr>
+        <p:txBody>
+          <a:bodyPr wrap="square" anchor="t" lIns="0" rIns="0" tIns="0" bIns="0">
+            <a:spAutoFit/>
+          </a:bodyPr>
+          <a:lstStyle/>
+          <a:p>
+            <a:pPr algn="l">
+              <a:lnSpc>
+                <a:spcPct val="115000"/>
+              </a:lnSpc>
+            </a:pPr>
+            <a:r>
+              <a:rPr sz="4000" b="1">
+                <a:solidFill>
+                  <a:srgbClr val="1C2A33"/>
+                </a:solidFill>
+                <a:latin typeface="楷体"/>
+                <a:ea typeface="楷体"/>
+                <a:cs typeface="楷体"/>
+              </a:rPr>
+              <a:t>古诗中的劳动——芣苢·文氏外孙入村收麦：劳动的节拍与诗意</a:t>
+            </a:r>
+          </a:p>
+        </p:txBody>
+      </p:sp>
+      <p:sp>
+        <p:nvSpPr>
+          <p:cNvPr id="6" name="TextBox 5"/>
+          <p:cNvSpPr txBox="1"/>
+          <p:nvPr/>
+        </p:nvSpPr>
+        <p:spPr>
+          <a:xfrm>
+            <a:off x="640080" y="3840480"/>
+            <a:ext cx="10911535" cy="457200"/>
+          </a:xfrm>
+          <a:prstGeom prst="rect">
+            <a:avLst/>
+          </a:prstGeom>
+          <a:noFill/>
+        </p:spPr>
+        <p:txBody>
+          <a:bodyPr wrap="square" anchor="t" lIns="0" rIns="0" tIns="0" bIns="0">
+            <a:spAutoFit/>
+          </a:bodyPr>
+          <a:lstStyle/>
+          <a:p>
+            <a:pPr algn="l"/>
+            <a:r>
+              <a:rPr sz="1700" b="1">
+                <a:solidFill>
+                  <a:srgbClr val="B23A2A"/>
+                </a:solidFill>
+                <a:latin typeface="微软雅黑"/>
+                <a:ea typeface="微软雅黑"/>
+                <a:cs typeface="微软雅黑"/>
+              </a:rPr>
+              <a:t>课文精读  ·  第4课时  ·  45分钟</a:t>
+            </a:r>
+          </a:p>
+        </p:txBody>
+      </p:sp>
+      <p:sp>
+        <p:nvSpPr>
+          <p:cNvPr id="7" name="Rectangle 6"/>
           <p:cNvSpPr/>
           <p:nvPr/>
         </p:nvSpPr>
         <p:spPr>
           <a:xfrm>
-            <a:off x="640080" y="1005840"/>
-            <a:ext cx="822960" cy="38100"/>
+            <a:off x="640080" y="5394960"/>
+            <a:ext cx="2011680" cy="33020"/>
           </a:xfrm>
           <a:prstGeom prst="rect">
             <a:avLst/>
@@ -3257,14 +3349,14 @@
       </p:sp>
       <p:sp>
         <p:nvSpPr>
-          <p:cNvPr id="6" name="TextBox 5"/>
+          <p:cNvPr id="8" name="TextBox 7"/>
           <p:cNvSpPr txBox="1"/>
           <p:nvPr/>
         </p:nvSpPr>
         <p:spPr>
           <a:xfrm>
-            <a:off x="640080" y="1188720"/>
-            <a:ext cx="10058400" cy="457200"/>
+            <a:off x="640080" y="5623560"/>
+            <a:ext cx="10911535" cy="548640"/>
           </a:xfrm>
           <a:prstGeom prst="rect">
             <a:avLst/>
@@ -3279,89 +3371,15 @@
           <a:p>
             <a:pPr algn="l"/>
             <a:r>
-              <a:rPr sz="1500" b="1">
-                <a:solidFill>
-                  <a:srgbClr val="C8A86B"/>
+              <a:rPr sz="1400" b="0">
+                <a:solidFill>
+                  <a:srgbClr val="6B6258"/>
                 </a:solidFill>
                 <a:latin typeface="微软雅黑"/>
                 <a:ea typeface="微软雅黑"/>
                 <a:cs typeface="微软雅黑"/>
               </a:rPr>
-              <a:t>必修上 第二单元 · 劳动光荣</a:t>
-            </a:r>
-          </a:p>
-        </p:txBody>
-      </p:sp>
-      <p:sp>
-        <p:nvSpPr>
-          <p:cNvPr id="7" name="TextBox 6"/>
-          <p:cNvSpPr txBox="1"/>
-          <p:nvPr/>
-        </p:nvSpPr>
-        <p:spPr>
-          <a:xfrm>
-            <a:off x="640080" y="1965960"/>
-            <a:ext cx="11247120" cy="2194560"/>
-          </a:xfrm>
-          <a:prstGeom prst="rect">
-            <a:avLst/>
-          </a:prstGeom>
-          <a:noFill/>
-        </p:spPr>
-        <p:txBody>
-          <a:bodyPr wrap="square" anchor="t" lIns="0" rIns="0" tIns="0" bIns="0">
-            <a:spAutoFit/>
-          </a:bodyPr>
-          <a:lstStyle/>
-          <a:p>
-            <a:pPr algn="l"/>
-            <a:r>
-              <a:rPr sz="4800" b="1">
-                <a:solidFill>
-                  <a:srgbClr val="FFFFFF"/>
-                </a:solidFill>
-                <a:latin typeface="楷体"/>
-                <a:ea typeface="楷体"/>
-                <a:cs typeface="楷体"/>
-              </a:rPr>
-              <a:t>芣苢 · 文氏外孙入村收麦</a:t>
-            </a:r>
-          </a:p>
-        </p:txBody>
-      </p:sp>
-      <p:sp>
-        <p:nvSpPr>
-          <p:cNvPr id="8" name="TextBox 7"/>
-          <p:cNvSpPr txBox="1"/>
-          <p:nvPr/>
-        </p:nvSpPr>
-        <p:spPr>
-          <a:xfrm>
-            <a:off x="640080" y="4160520"/>
-            <a:ext cx="10972800" cy="594360"/>
-          </a:xfrm>
-          <a:prstGeom prst="rect">
-            <a:avLst/>
-          </a:prstGeom>
-          <a:noFill/>
-        </p:spPr>
-        <p:txBody>
-          <a:bodyPr wrap="square" anchor="t" lIns="0" rIns="0" tIns="0" bIns="0">
-            <a:spAutoFit/>
-          </a:bodyPr>
-          <a:lstStyle/>
-          <a:p>
-            <a:pPr algn="l"/>
-            <a:r>
-              <a:rPr sz="1700" b="0">
-                <a:solidFill>
-                  <a:srgbClr val="E7DFD2"/>
-                </a:solidFill>
-                <a:latin typeface="楷体"/>
-                <a:ea typeface="楷体"/>
-                <a:cs typeface="楷体"/>
-              </a:rPr>
-              <a:t>《诗经·周南》× 北宋·苏辙 —— 古诗中的劳动节拍与诗意</a:t>
+              <a:t>学习任务群：实用性阅读与交流    |    年级：高一</a:t>
             </a:r>
           </a:p>
         </p:txBody>
@@ -3369,47 +3387,6 @@
       <p:sp>
         <p:nvSpPr>
           <p:cNvPr id="9" name="TextBox 8"/>
-          <p:cNvSpPr txBox="1"/>
-          <p:nvPr/>
-        </p:nvSpPr>
-        <p:spPr>
-          <a:xfrm>
-            <a:off x="640080" y="4983480"/>
-            <a:ext cx="10972800" cy="1005840"/>
-          </a:xfrm>
-          <a:prstGeom prst="rect">
-            <a:avLst/>
-          </a:prstGeom>
-          <a:noFill/>
-        </p:spPr>
-        <p:txBody>
-          <a:bodyPr wrap="square" anchor="t" lIns="0" rIns="0" tIns="0" bIns="0">
-            <a:spAutoFit/>
-          </a:bodyPr>
-          <a:lstStyle/>
-          <a:p>
-            <a:pPr algn="l">
-              <a:lnSpc>
-                <a:spcPct val="145000"/>
-              </a:lnSpc>
-            </a:pPr>
-            <a:r>
-              <a:rPr sz="1600" b="0">
-                <a:solidFill>
-                  <a:srgbClr val="FFFFFF"/>
-                </a:solidFill>
-                <a:latin typeface="楷体"/>
-                <a:ea typeface="楷体"/>
-                <a:cs typeface="楷体"/>
-              </a:rPr>
-              <a:t>从通讯到评论再到古诗——劳动的主题穿越两千年。</a:t>
-            </a:r>
-          </a:p>
-        </p:txBody>
-      </p:sp>
-      <p:sp>
-        <p:nvSpPr>
-          <p:cNvPr id="10" name="TextBox 9"/>
           <p:cNvSpPr txBox="1"/>
           <p:nvPr/>
         </p:nvSpPr>
@@ -3542,7 +3519,7 @@
                 <a:ea typeface="微软雅黑"/>
                 <a:cs typeface="微软雅黑"/>
               </a:rPr>
-              <a:t>本课目标</a:t>
+              <a:t>学习目标</a:t>
             </a:r>
           </a:p>
         </p:txBody>
@@ -3593,51 +3570,14 @@
       </p:sp>
       <p:sp>
         <p:nvSpPr>
-          <p:cNvPr id="5" name="TextBox 4"/>
-          <p:cNvSpPr txBox="1"/>
-          <p:nvPr/>
-        </p:nvSpPr>
-        <p:spPr>
-          <a:xfrm>
-            <a:off x="640080" y="1325880"/>
-            <a:ext cx="10058400" cy="640080"/>
-          </a:xfrm>
-          <a:prstGeom prst="rect">
-            <a:avLst/>
-          </a:prstGeom>
-          <a:noFill/>
-        </p:spPr>
-        <p:txBody>
-          <a:bodyPr wrap="square" anchor="t" lIns="0" rIns="0" tIns="0" bIns="0">
-            <a:spAutoFit/>
-          </a:bodyPr>
-          <a:lstStyle/>
-          <a:p>
-            <a:pPr algn="l"/>
-            <a:r>
-              <a:rPr sz="3200" b="1">
-                <a:solidFill>
-                  <a:srgbClr val="1C2A33"/>
-                </a:solidFill>
-                <a:latin typeface="楷体"/>
-                <a:ea typeface="楷体"/>
-                <a:cs typeface="楷体"/>
-              </a:rPr>
-              <a:t>四向学习目标</a:t>
-            </a:r>
-          </a:p>
-        </p:txBody>
-      </p:sp>
-      <p:sp>
-        <p:nvSpPr>
-          <p:cNvPr id="6" name="Rounded Rectangle 5"/>
+          <p:cNvPr id="5" name="Rounded Rectangle 4"/>
           <p:cNvSpPr/>
           <p:nvPr/>
         </p:nvSpPr>
         <p:spPr>
           <a:xfrm>
-            <a:off x="640080" y="2377440"/>
-            <a:ext cx="2453563" cy="3291840"/>
+            <a:off x="640080" y="1417320"/>
+            <a:ext cx="5349240" cy="2057400"/>
           </a:xfrm>
           <a:prstGeom prst="roundRect">
             <a:avLst/>
@@ -3645,7 +3585,7 @@
           <a:solidFill>
             <a:srgbClr val="FFFFFF"/>
           </a:solidFill>
-          <a:ln w="20320">
+          <a:ln w="22860">
             <a:solidFill>
               <a:srgbClr val="B23A2A"/>
             </a:solidFill>
@@ -3676,14 +3616,14 @@
       </p:sp>
       <p:sp>
         <p:nvSpPr>
-          <p:cNvPr id="7" name="Oval 6"/>
+          <p:cNvPr id="6" name="Oval 5"/>
           <p:cNvSpPr/>
           <p:nvPr/>
         </p:nvSpPr>
         <p:spPr>
           <a:xfrm>
-            <a:off x="1455381" y="2697480"/>
-            <a:ext cx="822960" cy="822960"/>
+            <a:off x="804672" y="1581912"/>
+            <a:ext cx="457200" cy="457200"/>
           </a:xfrm>
           <a:prstGeom prst="ellipse">
             <a:avLst/>
@@ -3720,14 +3660,14 @@
       </p:sp>
       <p:sp>
         <p:nvSpPr>
-          <p:cNvPr id="8" name="TextBox 7"/>
+          <p:cNvPr id="7" name="TextBox 6"/>
           <p:cNvSpPr txBox="1"/>
           <p:nvPr/>
         </p:nvSpPr>
         <p:spPr>
           <a:xfrm>
-            <a:off x="1455381" y="2880360"/>
-            <a:ext cx="822960" cy="457200"/>
+            <a:off x="804672" y="1636776"/>
+            <a:ext cx="457200" cy="384048"/>
           </a:xfrm>
           <a:prstGeom prst="rect">
             <a:avLst/>
@@ -3742,107 +3682,111 @@
           <a:p>
             <a:pPr algn="ctr"/>
             <a:r>
-              <a:rPr sz="2400" b="1">
+              <a:rPr sz="1600" b="1">
                 <a:solidFill>
                   <a:srgbClr val="FFFFFF"/>
+                </a:solidFill>
+                <a:latin typeface="微软雅黑"/>
+                <a:ea typeface="微软雅黑"/>
+                <a:cs typeface="微软雅黑"/>
+              </a:rPr>
+              <a:t>1</a:t>
+            </a:r>
+          </a:p>
+        </p:txBody>
+      </p:sp>
+      <p:sp>
+        <p:nvSpPr>
+          <p:cNvPr id="8" name="TextBox 7"/>
+          <p:cNvSpPr txBox="1"/>
+          <p:nvPr/>
+        </p:nvSpPr>
+        <p:spPr>
+          <a:xfrm>
+            <a:off x="1371600" y="1527048"/>
+            <a:ext cx="4434840" cy="457200"/>
+          </a:xfrm>
+          <a:prstGeom prst="rect">
+            <a:avLst/>
+          </a:prstGeom>
+          <a:noFill/>
+        </p:spPr>
+        <p:txBody>
+          <a:bodyPr wrap="square" anchor="t" lIns="0" rIns="0" tIns="0" bIns="0">
+            <a:spAutoFit/>
+          </a:bodyPr>
+          <a:lstStyle/>
+          <a:p>
+            <a:pPr algn="l">
+              <a:lnSpc>
+                <a:spcPct val="110000"/>
+              </a:lnSpc>
+            </a:pPr>
+            <a:r>
+              <a:rPr sz="1600" b="1">
+                <a:solidFill>
+                  <a:srgbClr val="1C2A33"/>
+                </a:solidFill>
+                <a:latin typeface="微软雅黑"/>
+                <a:ea typeface="微软雅黑"/>
+                <a:cs typeface="微软雅黑"/>
+              </a:rPr>
+              <a:t>目标</a:t>
+            </a:r>
+          </a:p>
+        </p:txBody>
+      </p:sp>
+      <p:sp>
+        <p:nvSpPr>
+          <p:cNvPr id="9" name="TextBox 8"/>
+          <p:cNvSpPr txBox="1"/>
+          <p:nvPr/>
+        </p:nvSpPr>
+        <p:spPr>
+          <a:xfrm>
+            <a:off x="1371600" y="1965960"/>
+            <a:ext cx="4434840" cy="1417320"/>
+          </a:xfrm>
+          <a:prstGeom prst="rect">
+            <a:avLst/>
+          </a:prstGeom>
+          <a:noFill/>
+        </p:spPr>
+        <p:txBody>
+          <a:bodyPr wrap="square" anchor="t" lIns="0" rIns="0" tIns="0" bIns="0">
+            <a:spAutoFit/>
+          </a:bodyPr>
+          <a:lstStyle/>
+          <a:p>
+            <a:pPr algn="l">
+              <a:lnSpc>
+                <a:spcPct val="128000"/>
+              </a:lnSpc>
+            </a:pPr>
+            <a:r>
+              <a:rPr sz="1200" b="0">
+                <a:solidFill>
+                  <a:srgbClr val="1C2A33"/>
                 </a:solidFill>
                 <a:latin typeface="楷体"/>
                 <a:ea typeface="楷体"/>
                 <a:cs typeface="楷体"/>
               </a:rPr>
-              <a:t>1</a:t>
-            </a:r>
-          </a:p>
-        </p:txBody>
-      </p:sp>
-      <p:sp>
-        <p:nvSpPr>
-          <p:cNvPr id="9" name="TextBox 8"/>
-          <p:cNvSpPr txBox="1"/>
-          <p:nvPr/>
-        </p:nvSpPr>
-        <p:spPr>
-          <a:xfrm>
-            <a:off x="822960" y="3749040"/>
-            <a:ext cx="2087803" cy="548640"/>
-          </a:xfrm>
-          <a:prstGeom prst="rect">
-            <a:avLst/>
-          </a:prstGeom>
-          <a:noFill/>
-        </p:spPr>
-        <p:txBody>
-          <a:bodyPr wrap="square" anchor="t" lIns="0" rIns="0" tIns="0" bIns="0">
-            <a:spAutoFit/>
-          </a:bodyPr>
-          <a:lstStyle/>
-          <a:p>
-            <a:pPr algn="ctr"/>
-            <a:r>
-              <a:rPr sz="1800" b="1">
-                <a:solidFill>
-                  <a:srgbClr val="B23A2A"/>
-                </a:solidFill>
-                <a:latin typeface="微软雅黑"/>
-                <a:ea typeface="微软雅黑"/>
-                <a:cs typeface="微软雅黑"/>
-              </a:rPr>
-              <a:t>语言能力</a:t>
-            </a:r>
-          </a:p>
-        </p:txBody>
-      </p:sp>
-      <p:sp>
-        <p:nvSpPr>
-          <p:cNvPr id="10" name="TextBox 9"/>
-          <p:cNvSpPr txBox="1"/>
-          <p:nvPr/>
-        </p:nvSpPr>
-        <p:spPr>
-          <a:xfrm>
-            <a:off x="841248" y="4343400"/>
-            <a:ext cx="2051227" cy="1188720"/>
-          </a:xfrm>
-          <a:prstGeom prst="rect">
-            <a:avLst/>
-          </a:prstGeom>
-          <a:noFill/>
-        </p:spPr>
-        <p:txBody>
-          <a:bodyPr wrap="square" anchor="t" lIns="0" rIns="0" tIns="0" bIns="0">
-            <a:spAutoFit/>
-          </a:bodyPr>
-          <a:lstStyle/>
-          <a:p>
-            <a:pPr algn="ctr">
-              <a:lnSpc>
-                <a:spcPct val="145000"/>
-              </a:lnSpc>
-            </a:pPr>
-            <a:r>
-              <a:rPr sz="1350" b="0">
-                <a:solidFill>
-                  <a:srgbClr val="1C2A33"/>
-                </a:solidFill>
-                <a:latin typeface="楷体"/>
-                <a:ea typeface="楷体"/>
-                <a:cs typeface="楷体"/>
-              </a:rPr>
-              <a:t>准确朗读两首诗，解释六动词含义，说出重章叠句的表达效果。</a:t>
-            </a:r>
-          </a:p>
-        </p:txBody>
-      </p:sp>
-      <p:sp>
-        <p:nvSpPr>
-          <p:cNvPr id="11" name="Rounded Rectangle 10"/>
+              <a:t>语言能力：准确朗读两首诗，解释「采·有·掇·捋·袺·襭」六字含义，说出重章叠句的表达效果。</a:t>
+            </a:r>
+          </a:p>
+        </p:txBody>
+      </p:sp>
+      <p:sp>
+        <p:nvSpPr>
+          <p:cNvPr id="10" name="Rounded Rectangle 9"/>
           <p:cNvSpPr/>
           <p:nvPr/>
         </p:nvSpPr>
         <p:spPr>
           <a:xfrm>
-            <a:off x="3459403" y="2377440"/>
-            <a:ext cx="2453563" cy="3291840"/>
+            <a:off x="6263640" y="1417320"/>
+            <a:ext cx="5349240" cy="2057400"/>
           </a:xfrm>
           <a:prstGeom prst="roundRect">
             <a:avLst/>
@@ -3850,9 +3794,9 @@
           <a:solidFill>
             <a:srgbClr val="FFFFFF"/>
           </a:solidFill>
-          <a:ln w="20320">
+          <a:ln w="22860">
             <a:solidFill>
-              <a:srgbClr val="2E7D6B"/>
+              <a:srgbClr val="B23A2A"/>
             </a:solidFill>
           </a:ln>
           <a:effectLst/>
@@ -3881,20 +3825,20 @@
       </p:sp>
       <p:sp>
         <p:nvSpPr>
-          <p:cNvPr id="12" name="Oval 11"/>
+          <p:cNvPr id="11" name="Oval 10"/>
           <p:cNvSpPr/>
           <p:nvPr/>
         </p:nvSpPr>
         <p:spPr>
           <a:xfrm>
-            <a:off x="4274705" y="2697480"/>
-            <a:ext cx="822960" cy="822960"/>
+            <a:off x="6428232" y="1581912"/>
+            <a:ext cx="457200" cy="457200"/>
           </a:xfrm>
           <a:prstGeom prst="ellipse">
             <a:avLst/>
           </a:prstGeom>
           <a:solidFill>
-            <a:srgbClr val="2E7D6B"/>
+            <a:srgbClr val="B23A2A"/>
           </a:solidFill>
           <a:ln>
             <a:noFill/>
@@ -3925,14 +3869,14 @@
       </p:sp>
       <p:sp>
         <p:nvSpPr>
-          <p:cNvPr id="13" name="TextBox 12"/>
+          <p:cNvPr id="12" name="TextBox 11"/>
           <p:cNvSpPr txBox="1"/>
           <p:nvPr/>
         </p:nvSpPr>
         <p:spPr>
           <a:xfrm>
-            <a:off x="4274705" y="2880360"/>
-            <a:ext cx="822960" cy="457200"/>
+            <a:off x="6428232" y="1636776"/>
+            <a:ext cx="457200" cy="384048"/>
           </a:xfrm>
           <a:prstGeom prst="rect">
             <a:avLst/>
@@ -3947,107 +3891,111 @@
           <a:p>
             <a:pPr algn="ctr"/>
             <a:r>
-              <a:rPr sz="2400" b="1">
+              <a:rPr sz="1600" b="1">
                 <a:solidFill>
                   <a:srgbClr val="FFFFFF"/>
+                </a:solidFill>
+                <a:latin typeface="微软雅黑"/>
+                <a:ea typeface="微软雅黑"/>
+                <a:cs typeface="微软雅黑"/>
+              </a:rPr>
+              <a:t>2</a:t>
+            </a:r>
+          </a:p>
+        </p:txBody>
+      </p:sp>
+      <p:sp>
+        <p:nvSpPr>
+          <p:cNvPr id="13" name="TextBox 12"/>
+          <p:cNvSpPr txBox="1"/>
+          <p:nvPr/>
+        </p:nvSpPr>
+        <p:spPr>
+          <a:xfrm>
+            <a:off x="6995160" y="1527048"/>
+            <a:ext cx="4434840" cy="457200"/>
+          </a:xfrm>
+          <a:prstGeom prst="rect">
+            <a:avLst/>
+          </a:prstGeom>
+          <a:noFill/>
+        </p:spPr>
+        <p:txBody>
+          <a:bodyPr wrap="square" anchor="t" lIns="0" rIns="0" tIns="0" bIns="0">
+            <a:spAutoFit/>
+          </a:bodyPr>
+          <a:lstStyle/>
+          <a:p>
+            <a:pPr algn="l">
+              <a:lnSpc>
+                <a:spcPct val="110000"/>
+              </a:lnSpc>
+            </a:pPr>
+            <a:r>
+              <a:rPr sz="1600" b="1">
+                <a:solidFill>
+                  <a:srgbClr val="1C2A33"/>
+                </a:solidFill>
+                <a:latin typeface="微软雅黑"/>
+                <a:ea typeface="微软雅黑"/>
+                <a:cs typeface="微软雅黑"/>
+              </a:rPr>
+              <a:t>目标</a:t>
+            </a:r>
+          </a:p>
+        </p:txBody>
+      </p:sp>
+      <p:sp>
+        <p:nvSpPr>
+          <p:cNvPr id="14" name="TextBox 13"/>
+          <p:cNvSpPr txBox="1"/>
+          <p:nvPr/>
+        </p:nvSpPr>
+        <p:spPr>
+          <a:xfrm>
+            <a:off x="6995160" y="1965960"/>
+            <a:ext cx="4434840" cy="1417320"/>
+          </a:xfrm>
+          <a:prstGeom prst="rect">
+            <a:avLst/>
+          </a:prstGeom>
+          <a:noFill/>
+        </p:spPr>
+        <p:txBody>
+          <a:bodyPr wrap="square" anchor="t" lIns="0" rIns="0" tIns="0" bIns="0">
+            <a:spAutoFit/>
+          </a:bodyPr>
+          <a:lstStyle/>
+          <a:p>
+            <a:pPr algn="l">
+              <a:lnSpc>
+                <a:spcPct val="128000"/>
+              </a:lnSpc>
+            </a:pPr>
+            <a:r>
+              <a:rPr sz="1400" b="0">
+                <a:solidFill>
+                  <a:srgbClr val="1C2A33"/>
                 </a:solidFill>
                 <a:latin typeface="楷体"/>
                 <a:ea typeface="楷体"/>
                 <a:cs typeface="楷体"/>
               </a:rPr>
-              <a:t>2</a:t>
-            </a:r>
-          </a:p>
-        </p:txBody>
-      </p:sp>
-      <p:sp>
-        <p:nvSpPr>
-          <p:cNvPr id="14" name="TextBox 13"/>
-          <p:cNvSpPr txBox="1"/>
-          <p:nvPr/>
-        </p:nvSpPr>
-        <p:spPr>
-          <a:xfrm>
-            <a:off x="3642283" y="3749040"/>
-            <a:ext cx="2087803" cy="548640"/>
-          </a:xfrm>
-          <a:prstGeom prst="rect">
-            <a:avLst/>
-          </a:prstGeom>
-          <a:noFill/>
-        </p:spPr>
-        <p:txBody>
-          <a:bodyPr wrap="square" anchor="t" lIns="0" rIns="0" tIns="0" bIns="0">
-            <a:spAutoFit/>
-          </a:bodyPr>
-          <a:lstStyle/>
-          <a:p>
-            <a:pPr algn="ctr"/>
-            <a:r>
-              <a:rPr sz="1800" b="1">
-                <a:solidFill>
-                  <a:srgbClr val="2E7D6B"/>
-                </a:solidFill>
-                <a:latin typeface="微软雅黑"/>
-                <a:ea typeface="微软雅黑"/>
-                <a:cs typeface="微软雅黑"/>
-              </a:rPr>
-              <a:t>文化意识</a:t>
-            </a:r>
-          </a:p>
-        </p:txBody>
-      </p:sp>
-      <p:sp>
-        <p:nvSpPr>
-          <p:cNvPr id="15" name="TextBox 14"/>
-          <p:cNvSpPr txBox="1"/>
-          <p:nvPr/>
-        </p:nvSpPr>
-        <p:spPr>
-          <a:xfrm>
-            <a:off x="3660571" y="4343400"/>
-            <a:ext cx="2051227" cy="1188720"/>
-          </a:xfrm>
-          <a:prstGeom prst="rect">
-            <a:avLst/>
-          </a:prstGeom>
-          <a:noFill/>
-        </p:spPr>
-        <p:txBody>
-          <a:bodyPr wrap="square" anchor="t" lIns="0" rIns="0" tIns="0" bIns="0">
-            <a:spAutoFit/>
-          </a:bodyPr>
-          <a:lstStyle/>
-          <a:p>
-            <a:pPr algn="ctr">
-              <a:lnSpc>
-                <a:spcPct val="145000"/>
-              </a:lnSpc>
-            </a:pPr>
-            <a:r>
-              <a:rPr sz="1350" b="0">
-                <a:solidFill>
-                  <a:srgbClr val="1C2A33"/>
-                </a:solidFill>
-                <a:latin typeface="楷体"/>
-                <a:ea typeface="楷体"/>
-                <a:cs typeface="楷体"/>
-              </a:rPr>
-              <a:t>感受古人对劳动的朴素赞美，理解"劳动光荣"是中华文化的悠久传统。</a:t>
-            </a:r>
-          </a:p>
-        </p:txBody>
-      </p:sp>
-      <p:sp>
-        <p:nvSpPr>
-          <p:cNvPr id="16" name="Rounded Rectangle 15"/>
+              <a:t>文化意识：感受古人对劳动的朴素赞美，理解「劳动光荣」是中华文化的悠久传统。</a:t>
+            </a:r>
+          </a:p>
+        </p:txBody>
+      </p:sp>
+      <p:sp>
+        <p:nvSpPr>
+          <p:cNvPr id="15" name="Rounded Rectangle 14"/>
           <p:cNvSpPr/>
           <p:nvPr/>
         </p:nvSpPr>
         <p:spPr>
           <a:xfrm>
-            <a:off x="6278727" y="2377440"/>
-            <a:ext cx="2453563" cy="3291840"/>
+            <a:off x="640080" y="3703320"/>
+            <a:ext cx="5349240" cy="2057400"/>
           </a:xfrm>
           <a:prstGeom prst="roundRect">
             <a:avLst/>
@@ -4055,9 +4003,9 @@
           <a:solidFill>
             <a:srgbClr val="FFFFFF"/>
           </a:solidFill>
-          <a:ln w="20320">
+          <a:ln w="22860">
             <a:solidFill>
-              <a:srgbClr val="C8A86B"/>
+              <a:srgbClr val="B23A2A"/>
             </a:solidFill>
           </a:ln>
           <a:effectLst/>
@@ -4086,20 +4034,20 @@
       </p:sp>
       <p:sp>
         <p:nvSpPr>
-          <p:cNvPr id="17" name="Oval 16"/>
+          <p:cNvPr id="16" name="Oval 15"/>
           <p:cNvSpPr/>
           <p:nvPr/>
         </p:nvSpPr>
         <p:spPr>
           <a:xfrm>
-            <a:off x="7094029" y="2697480"/>
-            <a:ext cx="822960" cy="822960"/>
+            <a:off x="804672" y="3867912"/>
+            <a:ext cx="457200" cy="457200"/>
           </a:xfrm>
           <a:prstGeom prst="ellipse">
             <a:avLst/>
           </a:prstGeom>
           <a:solidFill>
-            <a:srgbClr val="C8A86B"/>
+            <a:srgbClr val="B23A2A"/>
           </a:solidFill>
           <a:ln>
             <a:noFill/>
@@ -4130,14 +4078,14 @@
       </p:sp>
       <p:sp>
         <p:nvSpPr>
-          <p:cNvPr id="18" name="TextBox 17"/>
+          <p:cNvPr id="17" name="TextBox 16"/>
           <p:cNvSpPr txBox="1"/>
           <p:nvPr/>
         </p:nvSpPr>
         <p:spPr>
           <a:xfrm>
-            <a:off x="7094029" y="2880360"/>
-            <a:ext cx="822960" cy="457200"/>
+            <a:off x="804672" y="3922776"/>
+            <a:ext cx="457200" cy="384048"/>
           </a:xfrm>
           <a:prstGeom prst="rect">
             <a:avLst/>
@@ -4152,107 +4100,111 @@
           <a:p>
             <a:pPr algn="ctr"/>
             <a:r>
-              <a:rPr sz="2400" b="1">
+              <a:rPr sz="1600" b="1">
                 <a:solidFill>
                   <a:srgbClr val="FFFFFF"/>
+                </a:solidFill>
+                <a:latin typeface="微软雅黑"/>
+                <a:ea typeface="微软雅黑"/>
+                <a:cs typeface="微软雅黑"/>
+              </a:rPr>
+              <a:t>3</a:t>
+            </a:r>
+          </a:p>
+        </p:txBody>
+      </p:sp>
+      <p:sp>
+        <p:nvSpPr>
+          <p:cNvPr id="18" name="TextBox 17"/>
+          <p:cNvSpPr txBox="1"/>
+          <p:nvPr/>
+        </p:nvSpPr>
+        <p:spPr>
+          <a:xfrm>
+            <a:off x="1371600" y="3813048"/>
+            <a:ext cx="4434840" cy="457200"/>
+          </a:xfrm>
+          <a:prstGeom prst="rect">
+            <a:avLst/>
+          </a:prstGeom>
+          <a:noFill/>
+        </p:spPr>
+        <p:txBody>
+          <a:bodyPr wrap="square" anchor="t" lIns="0" rIns="0" tIns="0" bIns="0">
+            <a:spAutoFit/>
+          </a:bodyPr>
+          <a:lstStyle/>
+          <a:p>
+            <a:pPr algn="l">
+              <a:lnSpc>
+                <a:spcPct val="110000"/>
+              </a:lnSpc>
+            </a:pPr>
+            <a:r>
+              <a:rPr sz="1600" b="1">
+                <a:solidFill>
+                  <a:srgbClr val="1C2A33"/>
+                </a:solidFill>
+                <a:latin typeface="微软雅黑"/>
+                <a:ea typeface="微软雅黑"/>
+                <a:cs typeface="微软雅黑"/>
+              </a:rPr>
+              <a:t>目标</a:t>
+            </a:r>
+          </a:p>
+        </p:txBody>
+      </p:sp>
+      <p:sp>
+        <p:nvSpPr>
+          <p:cNvPr id="19" name="TextBox 18"/>
+          <p:cNvSpPr txBox="1"/>
+          <p:nvPr/>
+        </p:nvSpPr>
+        <p:spPr>
+          <a:xfrm>
+            <a:off x="1371600" y="4251960"/>
+            <a:ext cx="4434840" cy="1417320"/>
+          </a:xfrm>
+          <a:prstGeom prst="rect">
+            <a:avLst/>
+          </a:prstGeom>
+          <a:noFill/>
+        </p:spPr>
+        <p:txBody>
+          <a:bodyPr wrap="square" anchor="t" lIns="0" rIns="0" tIns="0" bIns="0">
+            <a:spAutoFit/>
+          </a:bodyPr>
+          <a:lstStyle/>
+          <a:p>
+            <a:pPr algn="l">
+              <a:lnSpc>
+                <a:spcPct val="128000"/>
+              </a:lnSpc>
+            </a:pPr>
+            <a:r>
+              <a:rPr sz="1200" b="0">
+                <a:solidFill>
+                  <a:srgbClr val="1C2A33"/>
                 </a:solidFill>
                 <a:latin typeface="楷体"/>
                 <a:ea typeface="楷体"/>
                 <a:cs typeface="楷体"/>
               </a:rPr>
-              <a:t>3</a:t>
-            </a:r>
-          </a:p>
-        </p:txBody>
-      </p:sp>
-      <p:sp>
-        <p:nvSpPr>
-          <p:cNvPr id="19" name="TextBox 18"/>
-          <p:cNvSpPr txBox="1"/>
-          <p:nvPr/>
-        </p:nvSpPr>
-        <p:spPr>
-          <a:xfrm>
-            <a:off x="6461607" y="3749040"/>
-            <a:ext cx="2087803" cy="548640"/>
-          </a:xfrm>
-          <a:prstGeom prst="rect">
-            <a:avLst/>
-          </a:prstGeom>
-          <a:noFill/>
-        </p:spPr>
-        <p:txBody>
-          <a:bodyPr wrap="square" anchor="t" lIns="0" rIns="0" tIns="0" bIns="0">
-            <a:spAutoFit/>
-          </a:bodyPr>
-          <a:lstStyle/>
-          <a:p>
-            <a:pPr algn="ctr"/>
-            <a:r>
-              <a:rPr sz="1800" b="1">
-                <a:solidFill>
-                  <a:srgbClr val="C8A86B"/>
-                </a:solidFill>
-                <a:latin typeface="微软雅黑"/>
-                <a:ea typeface="微软雅黑"/>
-                <a:cs typeface="微软雅黑"/>
-              </a:rPr>
-              <a:t>思维品质</a:t>
-            </a:r>
-          </a:p>
-        </p:txBody>
-      </p:sp>
-      <p:sp>
-        <p:nvSpPr>
-          <p:cNvPr id="20" name="TextBox 19"/>
-          <p:cNvSpPr txBox="1"/>
-          <p:nvPr/>
-        </p:nvSpPr>
-        <p:spPr>
-          <a:xfrm>
-            <a:off x="6479895" y="4343400"/>
-            <a:ext cx="2051227" cy="1188720"/>
-          </a:xfrm>
-          <a:prstGeom prst="rect">
-            <a:avLst/>
-          </a:prstGeom>
-          <a:noFill/>
-        </p:spPr>
-        <p:txBody>
-          <a:bodyPr wrap="square" anchor="t" lIns="0" rIns="0" tIns="0" bIns="0">
-            <a:spAutoFit/>
-          </a:bodyPr>
-          <a:lstStyle/>
-          <a:p>
-            <a:pPr algn="ctr">
-              <a:lnSpc>
-                <a:spcPct val="145000"/>
-              </a:lnSpc>
-            </a:pPr>
-            <a:r>
-              <a:rPr sz="1350" b="0">
-                <a:solidFill>
-                  <a:srgbClr val="1C2A33"/>
-                </a:solidFill>
-                <a:latin typeface="楷体"/>
-                <a:ea typeface="楷体"/>
-                <a:cs typeface="楷体"/>
-              </a:rPr>
-              <a:t>追踪六动词变化，发现"劳动进程→情感递进"的内在逻辑。</a:t>
-            </a:r>
-          </a:p>
-        </p:txBody>
-      </p:sp>
-      <p:sp>
-        <p:nvSpPr>
-          <p:cNvPr id="21" name="Rounded Rectangle 20"/>
+              <a:t>思维品质：通过追踪六字动词的变化，发现「劳动进程→情感递进」的内在逻辑，培养文本细读能力。</a:t>
+            </a:r>
+          </a:p>
+        </p:txBody>
+      </p:sp>
+      <p:sp>
+        <p:nvSpPr>
+          <p:cNvPr id="20" name="Rounded Rectangle 19"/>
           <p:cNvSpPr/>
           <p:nvPr/>
         </p:nvSpPr>
         <p:spPr>
           <a:xfrm>
-            <a:off x="9098051" y="2377440"/>
-            <a:ext cx="2453563" cy="3291840"/>
+            <a:off x="6263640" y="3703320"/>
+            <a:ext cx="5349240" cy="2057400"/>
           </a:xfrm>
           <a:prstGeom prst="roundRect">
             <a:avLst/>
@@ -4260,9 +4212,9 @@
           <a:solidFill>
             <a:srgbClr val="FFFFFF"/>
           </a:solidFill>
-          <a:ln w="20320">
+          <a:ln w="22860">
             <a:solidFill>
-              <a:srgbClr val="6B6258"/>
+              <a:srgbClr val="B23A2A"/>
             </a:solidFill>
           </a:ln>
           <a:effectLst/>
@@ -4291,20 +4243,20 @@
       </p:sp>
       <p:sp>
         <p:nvSpPr>
-          <p:cNvPr id="22" name="Oval 21"/>
+          <p:cNvPr id="21" name="Oval 20"/>
           <p:cNvSpPr/>
           <p:nvPr/>
         </p:nvSpPr>
         <p:spPr>
           <a:xfrm>
-            <a:off x="9913353" y="2697480"/>
-            <a:ext cx="822960" cy="822960"/>
+            <a:off x="6428232" y="3867912"/>
+            <a:ext cx="457200" cy="457200"/>
           </a:xfrm>
           <a:prstGeom prst="ellipse">
             <a:avLst/>
           </a:prstGeom>
           <a:solidFill>
-            <a:srgbClr val="6B6258"/>
+            <a:srgbClr val="B23A2A"/>
           </a:solidFill>
           <a:ln>
             <a:noFill/>
@@ -4335,14 +4287,14 @@
       </p:sp>
       <p:sp>
         <p:nvSpPr>
-          <p:cNvPr id="23" name="TextBox 22"/>
+          <p:cNvPr id="22" name="TextBox 21"/>
           <p:cNvSpPr txBox="1"/>
           <p:nvPr/>
         </p:nvSpPr>
         <p:spPr>
           <a:xfrm>
-            <a:off x="9913353" y="2880360"/>
-            <a:ext cx="822960" cy="457200"/>
+            <a:off x="6428232" y="3922776"/>
+            <a:ext cx="457200" cy="384048"/>
           </a:xfrm>
           <a:prstGeom prst="rect">
             <a:avLst/>
@@ -4357,52 +4309,97 @@
           <a:p>
             <a:pPr algn="ctr"/>
             <a:r>
-              <a:rPr sz="2400" b="1">
+              <a:rPr sz="1600" b="1">
                 <a:solidFill>
                   <a:srgbClr val="FFFFFF"/>
+                </a:solidFill>
+                <a:latin typeface="微软雅黑"/>
+                <a:ea typeface="微软雅黑"/>
+                <a:cs typeface="微软雅黑"/>
+              </a:rPr>
+              <a:t>4</a:t>
+            </a:r>
+          </a:p>
+        </p:txBody>
+      </p:sp>
+      <p:sp>
+        <p:nvSpPr>
+          <p:cNvPr id="23" name="TextBox 22"/>
+          <p:cNvSpPr txBox="1"/>
+          <p:nvPr/>
+        </p:nvSpPr>
+        <p:spPr>
+          <a:xfrm>
+            <a:off x="6995160" y="3813048"/>
+            <a:ext cx="4434840" cy="457200"/>
+          </a:xfrm>
+          <a:prstGeom prst="rect">
+            <a:avLst/>
+          </a:prstGeom>
+          <a:noFill/>
+        </p:spPr>
+        <p:txBody>
+          <a:bodyPr wrap="square" anchor="t" lIns="0" rIns="0" tIns="0" bIns="0">
+            <a:spAutoFit/>
+          </a:bodyPr>
+          <a:lstStyle/>
+          <a:p>
+            <a:pPr algn="l">
+              <a:lnSpc>
+                <a:spcPct val="110000"/>
+              </a:lnSpc>
+            </a:pPr>
+            <a:r>
+              <a:rPr sz="1600" b="1">
+                <a:solidFill>
+                  <a:srgbClr val="1C2A33"/>
+                </a:solidFill>
+                <a:latin typeface="微软雅黑"/>
+                <a:ea typeface="微软雅黑"/>
+                <a:cs typeface="微软雅黑"/>
+              </a:rPr>
+              <a:t>目标</a:t>
+            </a:r>
+          </a:p>
+        </p:txBody>
+      </p:sp>
+      <p:sp>
+        <p:nvSpPr>
+          <p:cNvPr id="24" name="TextBox 23"/>
+          <p:cNvSpPr txBox="1"/>
+          <p:nvPr/>
+        </p:nvSpPr>
+        <p:spPr>
+          <a:xfrm>
+            <a:off x="6995160" y="4251960"/>
+            <a:ext cx="4434840" cy="1417320"/>
+          </a:xfrm>
+          <a:prstGeom prst="rect">
+            <a:avLst/>
+          </a:prstGeom>
+          <a:noFill/>
+        </p:spPr>
+        <p:txBody>
+          <a:bodyPr wrap="square" anchor="t" lIns="0" rIns="0" tIns="0" bIns="0">
+            <a:spAutoFit/>
+          </a:bodyPr>
+          <a:lstStyle/>
+          <a:p>
+            <a:pPr algn="l">
+              <a:lnSpc>
+                <a:spcPct val="128000"/>
+              </a:lnSpc>
+            </a:pPr>
+            <a:r>
+              <a:rPr sz="1200" b="0">
+                <a:solidFill>
+                  <a:srgbClr val="1C2A33"/>
                 </a:solidFill>
                 <a:latin typeface="楷体"/>
                 <a:ea typeface="楷体"/>
                 <a:cs typeface="楷体"/>
               </a:rPr>
-              <a:t>4</a:t>
-            </a:r>
-          </a:p>
-        </p:txBody>
-      </p:sp>
-      <p:sp>
-        <p:nvSpPr>
-          <p:cNvPr id="24" name="TextBox 23"/>
-          <p:cNvSpPr txBox="1"/>
-          <p:nvPr/>
-        </p:nvSpPr>
-        <p:spPr>
-          <a:xfrm>
-            <a:off x="9280931" y="3749040"/>
-            <a:ext cx="2087803" cy="548640"/>
-          </a:xfrm>
-          <a:prstGeom prst="rect">
-            <a:avLst/>
-          </a:prstGeom>
-          <a:noFill/>
-        </p:spPr>
-        <p:txBody>
-          <a:bodyPr wrap="square" anchor="t" lIns="0" rIns="0" tIns="0" bIns="0">
-            <a:spAutoFit/>
-          </a:bodyPr>
-          <a:lstStyle/>
-          <a:p>
-            <a:pPr algn="ctr"/>
-            <a:r>
-              <a:rPr sz="1800" b="1">
-                <a:solidFill>
-                  <a:srgbClr val="6B6258"/>
-                </a:solidFill>
-                <a:latin typeface="微软雅黑"/>
-                <a:ea typeface="微软雅黑"/>
-                <a:cs typeface="微软雅黑"/>
-              </a:rPr>
-              <a:t>学习能力</a:t>
+              <a:t>学习能力：掌握「辨字义→理结构→品节奏→悟情感」的古诗劳动主题阅读四步法，能迁移运用。</a:t>
             </a:r>
           </a:p>
         </p:txBody>
@@ -4410,47 +4407,6 @@
       <p:sp>
         <p:nvSpPr>
           <p:cNvPr id="25" name="TextBox 24"/>
-          <p:cNvSpPr txBox="1"/>
-          <p:nvPr/>
-        </p:nvSpPr>
-        <p:spPr>
-          <a:xfrm>
-            <a:off x="9299219" y="4343400"/>
-            <a:ext cx="2051227" cy="1188720"/>
-          </a:xfrm>
-          <a:prstGeom prst="rect">
-            <a:avLst/>
-          </a:prstGeom>
-          <a:noFill/>
-        </p:spPr>
-        <p:txBody>
-          <a:bodyPr wrap="square" anchor="t" lIns="0" rIns="0" tIns="0" bIns="0">
-            <a:spAutoFit/>
-          </a:bodyPr>
-          <a:lstStyle/>
-          <a:p>
-            <a:pPr algn="ctr">
-              <a:lnSpc>
-                <a:spcPct val="145000"/>
-              </a:lnSpc>
-            </a:pPr>
-            <a:r>
-              <a:rPr sz="1350" b="0">
-                <a:solidFill>
-                  <a:srgbClr val="1C2A33"/>
-                </a:solidFill>
-                <a:latin typeface="楷体"/>
-                <a:ea typeface="楷体"/>
-                <a:cs typeface="楷体"/>
-              </a:rPr>
-              <a:t>掌握"辨字义→理结构→品节奏→悟情感"古诗劳动阅读四步法。</a:t>
-            </a:r>
-          </a:p>
-        </p:txBody>
-      </p:sp>
-      <p:sp>
-        <p:nvSpPr>
-          <p:cNvPr id="26" name="TextBox 25"/>
           <p:cNvSpPr txBox="1"/>
           <p:nvPr/>
         </p:nvSpPr>
@@ -4577,13 +4533,13 @@
             <a:r>
               <a:rPr sz="1300" b="1">
                 <a:solidFill>
-                  <a:srgbClr val="B23A2A"/>
+                  <a:srgbClr val="2E7D6B"/>
                 </a:solidFill>
                 <a:latin typeface="微软雅黑"/>
                 <a:ea typeface="微软雅黑"/>
                 <a:cs typeface="微软雅黑"/>
               </a:rPr>
-              <a:t>知人论世 · 两首诗两个时代</a:t>
+              <a:t>课文背景</a:t>
             </a:r>
           </a:p>
         </p:txBody>
@@ -4603,7 +4559,7 @@
             <a:avLst/>
           </a:prstGeom>
           <a:solidFill>
-            <a:srgbClr val="B23A2A"/>
+            <a:srgbClr val="2E7D6B"/>
           </a:solidFill>
           <a:ln>
             <a:noFill/>
@@ -4632,9 +4588,53 @@
           </a:p>
         </p:txBody>
       </p:sp>
+      <p:sp>
+        <p:nvSpPr>
+          <p:cNvPr id="5" name="TextBox 4"/>
+          <p:cNvSpPr txBox="1"/>
+          <p:nvPr/>
+        </p:nvSpPr>
+        <p:spPr>
+          <a:xfrm>
+            <a:off x="640080" y="1508760"/>
+            <a:ext cx="6766560" cy="4572000"/>
+          </a:xfrm>
+          <a:prstGeom prst="rect">
+            <a:avLst/>
+          </a:prstGeom>
+          <a:noFill/>
+        </p:spPr>
+        <p:txBody>
+          <a:bodyPr wrap="square" anchor="t" lIns="0" rIns="0" tIns="0" bIns="0">
+            <a:spAutoFit/>
+          </a:bodyPr>
+          <a:lstStyle/>
+          <a:p>
+            <a:pPr algn="l">
+              <a:lnSpc>
+                <a:spcPct val="150000"/>
+              </a:lnSpc>
+              <a:spcAft>
+                <a:spcPts val="600"/>
+              </a:spcAft>
+            </a:pPr>
+            <a:r>
+              <a:rPr sz="1600" b="0">
+                <a:solidFill>
+                  <a:srgbClr val="1C2A33"/>
+                </a:solidFill>
+                <a:latin typeface="楷体"/>
+                <a:ea typeface="楷体"/>
+                <a:cs typeface="楷体"/>
+              </a:rPr>
+              <a:t>本课为第二单元第四课时，从实用文阅读转向古诗阅读，但主题仍紧扣「劳动光荣」。《芣苢》出自《诗经·周南》，写妇女采摘芣苢（车前草）的劳动场景，全诗三章十二句，仅变换六个动词（采·有·掇·捋·袺·襭），以重章叠句再现劳动的节奏与欢欣。《文氏外孙入村收麦》是苏辙晚年退居颍川时所作，写外孙入村帮忙收麦的乡村生活，既有劳动的辛劳又有天伦的温情。两诗一先秦一宋代，一写采摘一写收麦，共同呈现「劳动的诗意」——劳动不只是辛苦，也可以有节拍、有欢欣、有温情。</a:t>
+            </a:r>
+          </a:p>
+        </p:txBody>
+      </p:sp>
       <p:pic>
         <p:nvPicPr>
-          <p:cNvPr id="5" name="Picture 4" descr="plantago.jpg"/>
+          <p:cNvPr id="6" name="Picture 5" descr="typewriter.jpg"/>
           <p:cNvPicPr>
             <a:picLocks noChangeAspect="1"/>
           </p:cNvPicPr>
@@ -4642,15 +4642,15 @@
         </p:nvPicPr>
         <p:blipFill>
           <a:blip r:embed="rId2"/>
-          <a:srcRect t="23163" b="23163"/>
+          <a:srcRect l="5860" r="5860"/>
           <a:stretch>
             <a:fillRect/>
           </a:stretch>
         </p:blipFill>
         <p:spPr>
           <a:xfrm>
-            <a:off x="640080" y="1783080"/>
-            <a:ext cx="5227167" cy="2103120"/>
+            <a:off x="8046720" y="1508760"/>
+            <a:ext cx="4114800" cy="3108960"/>
           </a:xfrm>
           <a:prstGeom prst="rect">
             <a:avLst/>
@@ -4659,14 +4659,14 @@
       </p:pic>
       <p:sp>
         <p:nvSpPr>
-          <p:cNvPr id="6" name="TextBox 5"/>
+          <p:cNvPr id="7" name="TextBox 6"/>
           <p:cNvSpPr txBox="1"/>
           <p:nvPr/>
         </p:nvSpPr>
         <p:spPr>
           <a:xfrm>
-            <a:off x="640080" y="3977640"/>
-            <a:ext cx="5227167" cy="365760"/>
+            <a:off x="8046720" y="4663440"/>
+            <a:ext cx="4114800" cy="365760"/>
           </a:xfrm>
           <a:prstGeom prst="rect">
             <a:avLst/>
@@ -4689,278 +4689,14 @@
                 <a:ea typeface="微软雅黑"/>
                 <a:cs typeface="微软雅黑"/>
               </a:rPr>
-              <a:t>车前草（Plantago major）· 即"芣苢"（毛传/朱熹说）</a:t>
-            </a:r>
-          </a:p>
-        </p:txBody>
-      </p:sp>
-      <p:sp>
-        <p:nvSpPr>
-          <p:cNvPr id="7" name="TextBox 6"/>
-          <p:cNvSpPr txBox="1"/>
-          <p:nvPr/>
-        </p:nvSpPr>
-        <p:spPr>
-          <a:xfrm>
-            <a:off x="640080" y="4343400"/>
-            <a:ext cx="5227167" cy="2240280"/>
-          </a:xfrm>
-          <a:prstGeom prst="rect">
-            <a:avLst/>
-          </a:prstGeom>
-          <a:noFill/>
-        </p:spPr>
-        <p:txBody>
-          <a:bodyPr wrap="square" anchor="t" lIns="0" rIns="0" tIns="0" bIns="0">
-            <a:spAutoFit/>
-          </a:bodyPr>
-          <a:lstStyle/>
-          <a:p>
-            <a:pPr algn="l">
-              <a:spcAft>
-                <a:spcPts val="600"/>
-              </a:spcAft>
-            </a:pPr>
-            <a:r>
-              <a:rPr sz="1800" b="1">
-                <a:solidFill>
-                  <a:srgbClr val="B23A2A"/>
-                </a:solidFill>
-                <a:latin typeface="楷体"/>
-                <a:ea typeface="楷体"/>
-                <a:cs typeface="楷体"/>
-              </a:rPr>
-              <a:t>《诗经·周南·芣苢》（先秦）</a:t>
-            </a:r>
-          </a:p>
-          <a:p>
-            <a:pPr algn="l">
-              <a:lnSpc>
-                <a:spcPct val="140000"/>
-              </a:lnSpc>
-              <a:spcAft>
-                <a:spcPts val="400"/>
-              </a:spcAft>
-            </a:pPr>
-            <a:r>
-              <a:rPr sz="1350" b="0">
-                <a:solidFill>
-                  <a:srgbClr val="1C2A33"/>
-                </a:solidFill>
-                <a:latin typeface="楷体"/>
-                <a:ea typeface="楷体"/>
-                <a:cs typeface="楷体"/>
-              </a:rPr>
-              <a:t>· 周代采集歌谣，三章十二句，仅换六动词</a:t>
-            </a:r>
-          </a:p>
-          <a:p>
-            <a:pPr algn="l">
-              <a:lnSpc>
-                <a:spcPct val="140000"/>
-              </a:lnSpc>
-              <a:spcAft>
-                <a:spcPts val="400"/>
-              </a:spcAft>
-            </a:pPr>
-            <a:r>
-              <a:rPr sz="1350" b="0">
-                <a:solidFill>
-                  <a:srgbClr val="1C2A33"/>
-                </a:solidFill>
-                <a:latin typeface="楷体"/>
-                <a:ea typeface="楷体"/>
-                <a:cs typeface="楷体"/>
-              </a:rPr>
-              <a:t>· 植物身份：毛传=车前草；闻一多=薏苡</a:t>
-            </a:r>
-          </a:p>
-          <a:p>
-            <a:pPr algn="l">
-              <a:lnSpc>
-                <a:spcPct val="140000"/>
-              </a:lnSpc>
-            </a:pPr>
-            <a:r>
-              <a:rPr sz="1350" b="0">
-                <a:solidFill>
-                  <a:srgbClr val="1C2A33"/>
-                </a:solidFill>
-                <a:latin typeface="楷体"/>
-                <a:ea typeface="楷体"/>
-                <a:cs typeface="楷体"/>
-              </a:rPr>
-              <a:t>· 方玉润："田家妇女三三五五，群歌互答"</a:t>
-            </a:r>
-          </a:p>
-        </p:txBody>
-      </p:sp>
-      <p:pic>
-        <p:nvPicPr>
-          <p:cNvPr id="8" name="Picture 7" descr="harvest.jpg"/>
-          <p:cNvPicPr>
-            <a:picLocks noChangeAspect="1"/>
-          </p:cNvPicPr>
-          <p:nvPr/>
-        </p:nvPicPr>
-        <p:blipFill>
-          <a:blip r:embed="rId3"/>
-          <a:srcRect t="23177" b="23177"/>
-          <a:stretch>
-            <a:fillRect/>
-          </a:stretch>
-        </p:blipFill>
-        <p:spPr>
-          <a:xfrm>
-            <a:off x="6324447" y="1783080"/>
-            <a:ext cx="5227167" cy="2103120"/>
-          </a:xfrm>
-          <a:prstGeom prst="rect">
-            <a:avLst/>
-          </a:prstGeom>
-        </p:spPr>
-      </p:pic>
-      <p:sp>
-        <p:nvSpPr>
-          <p:cNvPr id="9" name="TextBox 8"/>
-          <p:cNvSpPr txBox="1"/>
-          <p:nvPr/>
-        </p:nvSpPr>
-        <p:spPr>
-          <a:xfrm>
-            <a:off x="6324447" y="3977640"/>
-            <a:ext cx="5227167" cy="365760"/>
-          </a:xfrm>
-          <a:prstGeom prst="rect">
-            <a:avLst/>
-          </a:prstGeom>
-          <a:noFill/>
-        </p:spPr>
-        <p:txBody>
-          <a:bodyPr wrap="square" anchor="t" lIns="0" rIns="0" tIns="0" bIns="0">
-            <a:spAutoFit/>
-          </a:bodyPr>
-          <a:lstStyle/>
-          <a:p>
-            <a:pPr algn="ctr"/>
-            <a:r>
-              <a:rPr sz="1100" b="0">
-                <a:solidFill>
-                  <a:srgbClr val="6B6258"/>
-                </a:solidFill>
-                <a:latin typeface="微软雅黑"/>
-                <a:ea typeface="微软雅黑"/>
-                <a:cs typeface="微软雅黑"/>
-              </a:rPr>
-              <a:t>麦收金田 · 苏辙"收麦"场景（环境照）</a:t>
-            </a:r>
-          </a:p>
-        </p:txBody>
-      </p:sp>
-      <p:sp>
-        <p:nvSpPr>
-          <p:cNvPr id="10" name="TextBox 9"/>
-          <p:cNvSpPr txBox="1"/>
-          <p:nvPr/>
-        </p:nvSpPr>
-        <p:spPr>
-          <a:xfrm>
-            <a:off x="6324447" y="4343400"/>
-            <a:ext cx="5227167" cy="2240280"/>
-          </a:xfrm>
-          <a:prstGeom prst="rect">
-            <a:avLst/>
-          </a:prstGeom>
-          <a:noFill/>
-        </p:spPr>
-        <p:txBody>
-          <a:bodyPr wrap="square" anchor="t" lIns="0" rIns="0" tIns="0" bIns="0">
-            <a:spAutoFit/>
-          </a:bodyPr>
-          <a:lstStyle/>
-          <a:p>
-            <a:pPr algn="l">
-              <a:spcAft>
-                <a:spcPts val="600"/>
-              </a:spcAft>
-            </a:pPr>
-            <a:r>
-              <a:rPr sz="1800" b="1">
-                <a:solidFill>
-                  <a:srgbClr val="2E7D6B"/>
-                </a:solidFill>
-                <a:latin typeface="楷体"/>
-                <a:ea typeface="楷体"/>
-                <a:cs typeface="楷体"/>
-              </a:rPr>
-              <a:t>《文氏外孙入村收麦》苏辙（北宋）</a:t>
-            </a:r>
-          </a:p>
-          <a:p>
-            <a:pPr algn="l">
-              <a:lnSpc>
-                <a:spcPct val="140000"/>
-              </a:lnSpc>
-              <a:spcAft>
-                <a:spcPts val="400"/>
-              </a:spcAft>
-            </a:pPr>
-            <a:r>
-              <a:rPr sz="1350" b="0">
-                <a:solidFill>
-                  <a:srgbClr val="1C2A33"/>
-                </a:solidFill>
-                <a:latin typeface="楷体"/>
-                <a:ea typeface="楷体"/>
-                <a:cs typeface="楷体"/>
-              </a:rPr>
-              <a:t>· 苏辙(1039–1112)，晚年退居颍川（今河南许昌一带）</a:t>
-            </a:r>
-          </a:p>
-          <a:p>
-            <a:pPr algn="l">
-              <a:lnSpc>
-                <a:spcPct val="140000"/>
-              </a:lnSpc>
-              <a:spcAft>
-                <a:spcPts val="400"/>
-              </a:spcAft>
-            </a:pPr>
-            <a:r>
-              <a:rPr sz="1350" b="0">
-                <a:solidFill>
-                  <a:srgbClr val="1C2A33"/>
-                </a:solidFill>
-                <a:latin typeface="楷体"/>
-                <a:ea typeface="楷体"/>
-                <a:cs typeface="楷体"/>
-              </a:rPr>
-              <a:t>· 写外孙入村帮忙收麦：劳动辛劳 + 天伦温情交织</a:t>
-            </a:r>
-          </a:p>
-          <a:p>
-            <a:pPr algn="l">
-              <a:lnSpc>
-                <a:spcPct val="140000"/>
-              </a:lnSpc>
-            </a:pPr>
-            <a:r>
-              <a:rPr sz="1350" b="0">
-                <a:solidFill>
-                  <a:srgbClr val="1C2A33"/>
-                </a:solidFill>
-                <a:latin typeface="楷体"/>
-                <a:ea typeface="楷体"/>
-                <a:cs typeface="楷体"/>
-              </a:rPr>
-              <a:t>· 与《芣苢》同写劳动：群体欢欣 vs 个体温情</a:t>
-            </a:r>
-          </a:p>
-        </p:txBody>
-      </p:sp>
-      <p:sp>
-        <p:nvSpPr>
-          <p:cNvPr id="11" name="TextBox 10"/>
+              <a:t>资料图（自由授权，复用 typewriter.jpg）</a:t>
+            </a:r>
+          </a:p>
+        </p:txBody>
+      </p:sp>
+      <p:sp>
+        <p:nvSpPr>
+          <p:cNvPr id="8" name="TextBox 7"/>
           <p:cNvSpPr txBox="1"/>
           <p:nvPr/>
         </p:nvSpPr>
@@ -5093,7 +4829,7 @@
                 <a:ea typeface="微软雅黑"/>
                 <a:cs typeface="微软雅黑"/>
               </a:rPr>
-              <a:t>重点 · 六动词递进</a:t>
+              <a:t>学习重点</a:t>
             </a:r>
           </a:p>
         </p:txBody>
@@ -5150,8 +4886,8 @@
         </p:nvSpPr>
         <p:spPr>
           <a:xfrm>
-            <a:off x="640080" y="1920240"/>
-            <a:ext cx="10911535" cy="2560320"/>
+            <a:off x="640080" y="1371600"/>
+            <a:ext cx="10911535" cy="1597152"/>
           </a:xfrm>
           <a:prstGeom prst="roundRect">
             <a:avLst/>
@@ -5159,9 +4895,9 @@
           <a:solidFill>
             <a:srgbClr val="FFFFFF"/>
           </a:solidFill>
-          <a:ln w="25400">
+          <a:ln w="22860">
             <a:solidFill>
-              <a:srgbClr val="B23A2A"/>
+              <a:srgbClr val="C8A86B"/>
             </a:solidFill>
           </a:ln>
           <a:effectLst/>
@@ -5196,8 +4932,8 @@
         </p:nvSpPr>
         <p:spPr>
           <a:xfrm>
-            <a:off x="914400" y="2103120"/>
-            <a:ext cx="10362895" cy="502920"/>
+            <a:off x="1371600" y="1481328"/>
+            <a:ext cx="9997135" cy="457200"/>
           </a:xfrm>
           <a:prstGeom prst="rect">
             <a:avLst/>
@@ -5210,41 +4946,86 @@
           </a:bodyPr>
           <a:lstStyle/>
           <a:p>
-            <a:pPr algn="l"/>
-            <a:r>
-              <a:rPr sz="2000" b="1">
-                <a:solidFill>
-                  <a:srgbClr val="B23A2A"/>
+            <a:pPr algn="l">
+              <a:lnSpc>
+                <a:spcPct val="110000"/>
+              </a:lnSpc>
+            </a:pPr>
+            <a:r>
+              <a:rPr sz="1600" b="1">
+                <a:solidFill>
+                  <a:srgbClr val="1C2A33"/>
+                </a:solidFill>
+                <a:latin typeface="微软雅黑"/>
+                <a:ea typeface="微软雅黑"/>
+                <a:cs typeface="微软雅黑"/>
+              </a:rPr>
+              <a:t/>
+            </a:r>
+          </a:p>
+        </p:txBody>
+      </p:sp>
+      <p:sp>
+        <p:nvSpPr>
+          <p:cNvPr id="7" name="TextBox 6"/>
+          <p:cNvSpPr txBox="1"/>
+          <p:nvPr/>
+        </p:nvSpPr>
+        <p:spPr>
+          <a:xfrm>
+            <a:off x="1371600" y="1920240"/>
+            <a:ext cx="9997135" cy="957072"/>
+          </a:xfrm>
+          <a:prstGeom prst="rect">
+            <a:avLst/>
+          </a:prstGeom>
+          <a:noFill/>
+        </p:spPr>
+        <p:txBody>
+          <a:bodyPr wrap="square" anchor="t" lIns="0" rIns="0" tIns="0" bIns="0">
+            <a:spAutoFit/>
+          </a:bodyPr>
+          <a:lstStyle/>
+          <a:p>
+            <a:pPr algn="l">
+              <a:lnSpc>
+                <a:spcPct val="128000"/>
+              </a:lnSpc>
+            </a:pPr>
+            <a:r>
+              <a:rPr sz="1100" b="0">
+                <a:solidFill>
+                  <a:srgbClr val="1C2A33"/>
                 </a:solidFill>
                 <a:latin typeface="楷体"/>
                 <a:ea typeface="楷体"/>
                 <a:cs typeface="楷体"/>
               </a:rPr>
-              <a:t>六动词递进：从开始摘到满载而归</a:t>
-            </a:r>
-          </a:p>
-        </p:txBody>
-      </p:sp>
-      <p:sp>
-        <p:nvSpPr>
-          <p:cNvPr id="7" name="Rounded Rectangle 6"/>
+              <a:t>① 《芣苢》六动词：采（开始摘）→有（摘到了）→掇（一片片拾）→捋（一把把抹）→袺（用衣襟兜）→襭（把衣襟扎起来装）——劳动进程的递进。</a:t>
+            </a:r>
+          </a:p>
+        </p:txBody>
+      </p:sp>
+      <p:sp>
+        <p:nvSpPr>
+          <p:cNvPr id="8" name="Rounded Rectangle 7"/>
           <p:cNvSpPr/>
           <p:nvPr/>
         </p:nvSpPr>
         <p:spPr>
           <a:xfrm>
-            <a:off x="914400" y="2743200"/>
-            <a:ext cx="3454298" cy="868680"/>
+            <a:off x="640080" y="3078480"/>
+            <a:ext cx="10911535" cy="1597152"/>
           </a:xfrm>
           <a:prstGeom prst="roundRect">
             <a:avLst/>
           </a:prstGeom>
           <a:solidFill>
-            <a:srgbClr val="E7DFD2"/>
+            <a:srgbClr val="FFFFFF"/>
           </a:solidFill>
-          <a:ln w="17780">
+          <a:ln w="22860">
             <a:solidFill>
-              <a:srgbClr val="B23A2A"/>
+              <a:srgbClr val="C8A86B"/>
             </a:solidFill>
           </a:ln>
           <a:effectLst/>
@@ -5273,14 +5054,14 @@
       </p:sp>
       <p:sp>
         <p:nvSpPr>
-          <p:cNvPr id="8" name="TextBox 7"/>
+          <p:cNvPr id="9" name="TextBox 8"/>
           <p:cNvSpPr txBox="1"/>
           <p:nvPr/>
         </p:nvSpPr>
         <p:spPr>
           <a:xfrm>
-            <a:off x="1005840" y="2816352"/>
-            <a:ext cx="1280160" cy="384048"/>
+            <a:off x="1371600" y="3188208"/>
+            <a:ext cx="9997135" cy="457200"/>
           </a:xfrm>
           <a:prstGeom prst="rect">
             <a:avLst/>
@@ -5293,82 +5074,86 @@
           </a:bodyPr>
           <a:lstStyle/>
           <a:p>
-            <a:pPr algn="l"/>
-            <a:r>
-              <a:rPr sz="2000" b="1">
-                <a:solidFill>
-                  <a:srgbClr val="B23A2A"/>
+            <a:pPr algn="l">
+              <a:lnSpc>
+                <a:spcPct val="110000"/>
+              </a:lnSpc>
+            </a:pPr>
+            <a:r>
+              <a:rPr sz="1600" b="1">
+                <a:solidFill>
+                  <a:srgbClr val="1C2A33"/>
+                </a:solidFill>
+                <a:latin typeface="微软雅黑"/>
+                <a:ea typeface="微软雅黑"/>
+                <a:cs typeface="微软雅黑"/>
+              </a:rPr>
+              <a:t/>
+            </a:r>
+          </a:p>
+        </p:txBody>
+      </p:sp>
+      <p:sp>
+        <p:nvSpPr>
+          <p:cNvPr id="10" name="TextBox 9"/>
+          <p:cNvSpPr txBox="1"/>
+          <p:nvPr/>
+        </p:nvSpPr>
+        <p:spPr>
+          <a:xfrm>
+            <a:off x="1371600" y="3627120"/>
+            <a:ext cx="9997135" cy="957072"/>
+          </a:xfrm>
+          <a:prstGeom prst="rect">
+            <a:avLst/>
+          </a:prstGeom>
+          <a:noFill/>
+        </p:spPr>
+        <p:txBody>
+          <a:bodyPr wrap="square" anchor="t" lIns="0" rIns="0" tIns="0" bIns="0">
+            <a:spAutoFit/>
+          </a:bodyPr>
+          <a:lstStyle/>
+          <a:p>
+            <a:pPr algn="l">
+              <a:lnSpc>
+                <a:spcPct val="128000"/>
+              </a:lnSpc>
+            </a:pPr>
+            <a:r>
+              <a:rPr sz="1200" b="0">
+                <a:solidFill>
+                  <a:srgbClr val="1C2A33"/>
                 </a:solidFill>
                 <a:latin typeface="楷体"/>
                 <a:ea typeface="楷体"/>
                 <a:cs typeface="楷体"/>
               </a:rPr>
-              <a:t>采</a:t>
-            </a:r>
-          </a:p>
-        </p:txBody>
-      </p:sp>
-      <p:sp>
-        <p:nvSpPr>
-          <p:cNvPr id="9" name="TextBox 8"/>
-          <p:cNvSpPr txBox="1"/>
-          <p:nvPr/>
-        </p:nvSpPr>
-        <p:spPr>
-          <a:xfrm>
-            <a:off x="2286000" y="2852928"/>
-            <a:ext cx="1991258" cy="347472"/>
-          </a:xfrm>
-          <a:prstGeom prst="rect">
-            <a:avLst/>
-          </a:prstGeom>
-          <a:noFill/>
-        </p:spPr>
-        <p:txBody>
-          <a:bodyPr wrap="square" anchor="t" lIns="0" rIns="0" tIns="0" bIns="0">
-            <a:spAutoFit/>
-          </a:bodyPr>
-          <a:lstStyle/>
-          <a:p>
-            <a:pPr algn="l">
-              <a:lnSpc>
-                <a:spcPct val="130000"/>
-              </a:lnSpc>
-            </a:pPr>
-            <a:r>
-              <a:rPr sz="1150" b="0">
-                <a:solidFill>
-                  <a:srgbClr val="1C2A33"/>
-                </a:solidFill>
-                <a:latin typeface="楷体"/>
-                <a:ea typeface="楷体"/>
-                <a:cs typeface="楷体"/>
-              </a:rPr>
-              <a:t>开始摘取</a:t>
-            </a:r>
-          </a:p>
-        </p:txBody>
-      </p:sp>
-      <p:sp>
-        <p:nvSpPr>
-          <p:cNvPr id="10" name="Rounded Rectangle 9"/>
+              <a:t>② 重章叠句：三章结构相同，仅换动词，形成「劳动节拍」——重复中有变化，变化中有递进。</a:t>
+            </a:r>
+          </a:p>
+        </p:txBody>
+      </p:sp>
+      <p:sp>
+        <p:nvSpPr>
+          <p:cNvPr id="11" name="Rounded Rectangle 10"/>
           <p:cNvSpPr/>
           <p:nvPr/>
         </p:nvSpPr>
         <p:spPr>
           <a:xfrm>
-            <a:off x="4505858" y="2743200"/>
-            <a:ext cx="3454298" cy="868680"/>
+            <a:off x="640080" y="4785360"/>
+            <a:ext cx="10911535" cy="1597152"/>
           </a:xfrm>
           <a:prstGeom prst="roundRect">
             <a:avLst/>
           </a:prstGeom>
           <a:solidFill>
-            <a:srgbClr val="E7DFD2"/>
+            <a:srgbClr val="FFFFFF"/>
           </a:solidFill>
-          <a:ln w="17780">
+          <a:ln w="22860">
             <a:solidFill>
-              <a:srgbClr val="B23A2A"/>
+              <a:srgbClr val="C8A86B"/>
             </a:solidFill>
           </a:ln>
           <a:effectLst/>
@@ -5397,14 +5182,14 @@
       </p:sp>
       <p:sp>
         <p:nvSpPr>
-          <p:cNvPr id="11" name="TextBox 10"/>
+          <p:cNvPr id="12" name="TextBox 11"/>
           <p:cNvSpPr txBox="1"/>
           <p:nvPr/>
         </p:nvSpPr>
         <p:spPr>
           <a:xfrm>
-            <a:off x="4597298" y="2816352"/>
-            <a:ext cx="1280160" cy="384048"/>
+            <a:off x="1371600" y="4895088"/>
+            <a:ext cx="9997135" cy="457200"/>
           </a:xfrm>
           <a:prstGeom prst="rect">
             <a:avLst/>
@@ -5417,719 +5202,69 @@
           </a:bodyPr>
           <a:lstStyle/>
           <a:p>
-            <a:pPr algn="l"/>
-            <a:r>
-              <a:rPr sz="2000" b="1">
-                <a:solidFill>
-                  <a:srgbClr val="B23A2A"/>
+            <a:pPr algn="l">
+              <a:lnSpc>
+                <a:spcPct val="110000"/>
+              </a:lnSpc>
+            </a:pPr>
+            <a:r>
+              <a:rPr sz="1600" b="1">
+                <a:solidFill>
+                  <a:srgbClr val="1C2A33"/>
+                </a:solidFill>
+                <a:latin typeface="微软雅黑"/>
+                <a:ea typeface="微软雅黑"/>
+                <a:cs typeface="微软雅黑"/>
+              </a:rPr>
+              <a:t/>
+            </a:r>
+          </a:p>
+        </p:txBody>
+      </p:sp>
+      <p:sp>
+        <p:nvSpPr>
+          <p:cNvPr id="13" name="TextBox 12"/>
+          <p:cNvSpPr txBox="1"/>
+          <p:nvPr/>
+        </p:nvSpPr>
+        <p:spPr>
+          <a:xfrm>
+            <a:off x="1371600" y="5334000"/>
+            <a:ext cx="9997135" cy="957072"/>
+          </a:xfrm>
+          <a:prstGeom prst="rect">
+            <a:avLst/>
+          </a:prstGeom>
+          <a:noFill/>
+        </p:spPr>
+        <p:txBody>
+          <a:bodyPr wrap="square" anchor="t" lIns="0" rIns="0" tIns="0" bIns="0">
+            <a:spAutoFit/>
+          </a:bodyPr>
+          <a:lstStyle/>
+          <a:p>
+            <a:pPr algn="l">
+              <a:lnSpc>
+                <a:spcPct val="128000"/>
+              </a:lnSpc>
+            </a:pPr>
+            <a:r>
+              <a:rPr sz="1200" b="0">
+                <a:solidFill>
+                  <a:srgbClr val="1C2A33"/>
                 </a:solidFill>
                 <a:latin typeface="楷体"/>
                 <a:ea typeface="楷体"/>
                 <a:cs typeface="楷体"/>
               </a:rPr>
-              <a:t>有</a:t>
-            </a:r>
-          </a:p>
-        </p:txBody>
-      </p:sp>
-      <p:sp>
-        <p:nvSpPr>
-          <p:cNvPr id="12" name="TextBox 11"/>
-          <p:cNvSpPr txBox="1"/>
-          <p:nvPr/>
-        </p:nvSpPr>
-        <p:spPr>
-          <a:xfrm>
-            <a:off x="5877458" y="2852928"/>
-            <a:ext cx="1991258" cy="347472"/>
-          </a:xfrm>
-          <a:prstGeom prst="rect">
-            <a:avLst/>
-          </a:prstGeom>
-          <a:noFill/>
-        </p:spPr>
-        <p:txBody>
-          <a:bodyPr wrap="square" anchor="t" lIns="0" rIns="0" tIns="0" bIns="0">
-            <a:spAutoFit/>
-          </a:bodyPr>
-          <a:lstStyle/>
-          <a:p>
-            <a:pPr algn="l">
-              <a:lnSpc>
-                <a:spcPct val="130000"/>
-              </a:lnSpc>
-            </a:pPr>
-            <a:r>
-              <a:rPr sz="1150" b="0">
-                <a:solidFill>
-                  <a:srgbClr val="1C2A33"/>
-                </a:solidFill>
-                <a:latin typeface="楷体"/>
-                <a:ea typeface="楷体"/>
-                <a:cs typeface="楷体"/>
-              </a:rPr>
-              <a:t>摘到了（动手取得）</a:t>
-            </a:r>
-          </a:p>
-        </p:txBody>
-      </p:sp>
-      <p:sp>
-        <p:nvSpPr>
-          <p:cNvPr id="13" name="Rounded Rectangle 12"/>
-          <p:cNvSpPr/>
-          <p:nvPr/>
-        </p:nvSpPr>
-        <p:spPr>
-          <a:xfrm>
-            <a:off x="8097316" y="2743200"/>
-            <a:ext cx="3454298" cy="868680"/>
-          </a:xfrm>
-          <a:prstGeom prst="roundRect">
-            <a:avLst/>
-          </a:prstGeom>
-          <a:solidFill>
-            <a:srgbClr val="E7DFD2"/>
-          </a:solidFill>
-          <a:ln w="17780">
-            <a:solidFill>
-              <a:srgbClr val="2E7D6B"/>
-            </a:solidFill>
-          </a:ln>
-          <a:effectLst/>
-        </p:spPr>
-        <p:style>
-          <a:lnRef idx="1">
-            <a:schemeClr val="accent1"/>
-          </a:lnRef>
-          <a:fillRef idx="3">
-            <a:schemeClr val="accent1"/>
-          </a:fillRef>
-          <a:effectRef idx="2">
-            <a:schemeClr val="accent1"/>
-          </a:effectRef>
-          <a:fontRef idx="minor">
-            <a:schemeClr val="lt1"/>
-          </a:fontRef>
-        </p:style>
-        <p:txBody>
-          <a:bodyPr rtlCol="0" anchor="ctr"/>
-          <a:lstStyle/>
-          <a:p>
-            <a:pPr algn="ctr"/>
+              <a:t>③ 《文氏外孙入村收麦》：劳动的辛劳（「急炊大麦」「欲饭新舂」）与天伦温情（外孙来帮忙）交织。</a:t>
+            </a:r>
           </a:p>
         </p:txBody>
       </p:sp>
       <p:sp>
         <p:nvSpPr>
           <p:cNvPr id="14" name="TextBox 13"/>
-          <p:cNvSpPr txBox="1"/>
-          <p:nvPr/>
-        </p:nvSpPr>
-        <p:spPr>
-          <a:xfrm>
-            <a:off x="8188756" y="2816352"/>
-            <a:ext cx="1280160" cy="384048"/>
-          </a:xfrm>
-          <a:prstGeom prst="rect">
-            <a:avLst/>
-          </a:prstGeom>
-          <a:noFill/>
-        </p:spPr>
-        <p:txBody>
-          <a:bodyPr wrap="square" anchor="t" lIns="0" rIns="0" tIns="0" bIns="0">
-            <a:spAutoFit/>
-          </a:bodyPr>
-          <a:lstStyle/>
-          <a:p>
-            <a:pPr algn="l"/>
-            <a:r>
-              <a:rPr sz="2000" b="1">
-                <a:solidFill>
-                  <a:srgbClr val="2E7D6B"/>
-                </a:solidFill>
-                <a:latin typeface="楷体"/>
-                <a:ea typeface="楷体"/>
-                <a:cs typeface="楷体"/>
-              </a:rPr>
-              <a:t>掇 duō</a:t>
-            </a:r>
-          </a:p>
-        </p:txBody>
-      </p:sp>
-      <p:sp>
-        <p:nvSpPr>
-          <p:cNvPr id="15" name="TextBox 14"/>
-          <p:cNvSpPr txBox="1"/>
-          <p:nvPr/>
-        </p:nvSpPr>
-        <p:spPr>
-          <a:xfrm>
-            <a:off x="9468916" y="2852928"/>
-            <a:ext cx="1991258" cy="347472"/>
-          </a:xfrm>
-          <a:prstGeom prst="rect">
-            <a:avLst/>
-          </a:prstGeom>
-          <a:noFill/>
-        </p:spPr>
-        <p:txBody>
-          <a:bodyPr wrap="square" anchor="t" lIns="0" rIns="0" tIns="0" bIns="0">
-            <a:spAutoFit/>
-          </a:bodyPr>
-          <a:lstStyle/>
-          <a:p>
-            <a:pPr algn="l">
-              <a:lnSpc>
-                <a:spcPct val="130000"/>
-              </a:lnSpc>
-            </a:pPr>
-            <a:r>
-              <a:rPr sz="1150" b="0">
-                <a:solidFill>
-                  <a:srgbClr val="1C2A33"/>
-                </a:solidFill>
-                <a:latin typeface="楷体"/>
-                <a:ea typeface="楷体"/>
-                <a:cs typeface="楷体"/>
-              </a:rPr>
-              <a:t>一片片拾起掉落</a:t>
-            </a:r>
-          </a:p>
-        </p:txBody>
-      </p:sp>
-      <p:sp>
-        <p:nvSpPr>
-          <p:cNvPr id="16" name="Rounded Rectangle 15"/>
-          <p:cNvSpPr/>
-          <p:nvPr/>
-        </p:nvSpPr>
-        <p:spPr>
-          <a:xfrm>
-            <a:off x="914400" y="3749040"/>
-            <a:ext cx="3454298" cy="868680"/>
-          </a:xfrm>
-          <a:prstGeom prst="roundRect">
-            <a:avLst/>
-          </a:prstGeom>
-          <a:solidFill>
-            <a:srgbClr val="E7DFD2"/>
-          </a:solidFill>
-          <a:ln w="17780">
-            <a:solidFill>
-              <a:srgbClr val="2E7D6B"/>
-            </a:solidFill>
-          </a:ln>
-          <a:effectLst/>
-        </p:spPr>
-        <p:style>
-          <a:lnRef idx="1">
-            <a:schemeClr val="accent1"/>
-          </a:lnRef>
-          <a:fillRef idx="3">
-            <a:schemeClr val="accent1"/>
-          </a:fillRef>
-          <a:effectRef idx="2">
-            <a:schemeClr val="accent1"/>
-          </a:effectRef>
-          <a:fontRef idx="minor">
-            <a:schemeClr val="lt1"/>
-          </a:fontRef>
-        </p:style>
-        <p:txBody>
-          <a:bodyPr rtlCol="0" anchor="ctr"/>
-          <a:lstStyle/>
-          <a:p>
-            <a:pPr algn="ctr"/>
-          </a:p>
-        </p:txBody>
-      </p:sp>
-      <p:sp>
-        <p:nvSpPr>
-          <p:cNvPr id="17" name="TextBox 16"/>
-          <p:cNvSpPr txBox="1"/>
-          <p:nvPr/>
-        </p:nvSpPr>
-        <p:spPr>
-          <a:xfrm>
-            <a:off x="1005840" y="3822192"/>
-            <a:ext cx="1280160" cy="384048"/>
-          </a:xfrm>
-          <a:prstGeom prst="rect">
-            <a:avLst/>
-          </a:prstGeom>
-          <a:noFill/>
-        </p:spPr>
-        <p:txBody>
-          <a:bodyPr wrap="square" anchor="t" lIns="0" rIns="0" tIns="0" bIns="0">
-            <a:spAutoFit/>
-          </a:bodyPr>
-          <a:lstStyle/>
-          <a:p>
-            <a:pPr algn="l"/>
-            <a:r>
-              <a:rPr sz="2000" b="1">
-                <a:solidFill>
-                  <a:srgbClr val="2E7D6B"/>
-                </a:solidFill>
-                <a:latin typeface="楷体"/>
-                <a:ea typeface="楷体"/>
-                <a:cs typeface="楷体"/>
-              </a:rPr>
-              <a:t>捋 luō</a:t>
-            </a:r>
-          </a:p>
-        </p:txBody>
-      </p:sp>
-      <p:sp>
-        <p:nvSpPr>
-          <p:cNvPr id="18" name="TextBox 17"/>
-          <p:cNvSpPr txBox="1"/>
-          <p:nvPr/>
-        </p:nvSpPr>
-        <p:spPr>
-          <a:xfrm>
-            <a:off x="2286000" y="3858768"/>
-            <a:ext cx="1991258" cy="347472"/>
-          </a:xfrm>
-          <a:prstGeom prst="rect">
-            <a:avLst/>
-          </a:prstGeom>
-          <a:noFill/>
-        </p:spPr>
-        <p:txBody>
-          <a:bodyPr wrap="square" anchor="t" lIns="0" rIns="0" tIns="0" bIns="0">
-            <a:spAutoFit/>
-          </a:bodyPr>
-          <a:lstStyle/>
-          <a:p>
-            <a:pPr algn="l">
-              <a:lnSpc>
-                <a:spcPct val="130000"/>
-              </a:lnSpc>
-            </a:pPr>
-            <a:r>
-              <a:rPr sz="1150" b="0">
-                <a:solidFill>
-                  <a:srgbClr val="1C2A33"/>
-                </a:solidFill>
-                <a:latin typeface="楷体"/>
-                <a:ea typeface="楷体"/>
-                <a:cs typeface="楷体"/>
-              </a:rPr>
-              <a:t>顺着茎滑下成把</a:t>
-            </a:r>
-          </a:p>
-        </p:txBody>
-      </p:sp>
-      <p:sp>
-        <p:nvSpPr>
-          <p:cNvPr id="19" name="Rounded Rectangle 18"/>
-          <p:cNvSpPr/>
-          <p:nvPr/>
-        </p:nvSpPr>
-        <p:spPr>
-          <a:xfrm>
-            <a:off x="4505858" y="3749040"/>
-            <a:ext cx="3454298" cy="868680"/>
-          </a:xfrm>
-          <a:prstGeom prst="roundRect">
-            <a:avLst/>
-          </a:prstGeom>
-          <a:solidFill>
-            <a:srgbClr val="E7DFD2"/>
-          </a:solidFill>
-          <a:ln w="17780">
-            <a:solidFill>
-              <a:srgbClr val="C8A86B"/>
-            </a:solidFill>
-          </a:ln>
-          <a:effectLst/>
-        </p:spPr>
-        <p:style>
-          <a:lnRef idx="1">
-            <a:schemeClr val="accent1"/>
-          </a:lnRef>
-          <a:fillRef idx="3">
-            <a:schemeClr val="accent1"/>
-          </a:fillRef>
-          <a:effectRef idx="2">
-            <a:schemeClr val="accent1"/>
-          </a:effectRef>
-          <a:fontRef idx="minor">
-            <a:schemeClr val="lt1"/>
-          </a:fontRef>
-        </p:style>
-        <p:txBody>
-          <a:bodyPr rtlCol="0" anchor="ctr"/>
-          <a:lstStyle/>
-          <a:p>
-            <a:pPr algn="ctr"/>
-          </a:p>
-        </p:txBody>
-      </p:sp>
-      <p:sp>
-        <p:nvSpPr>
-          <p:cNvPr id="20" name="TextBox 19"/>
-          <p:cNvSpPr txBox="1"/>
-          <p:nvPr/>
-        </p:nvSpPr>
-        <p:spPr>
-          <a:xfrm>
-            <a:off x="4597298" y="3822192"/>
-            <a:ext cx="1280160" cy="384048"/>
-          </a:xfrm>
-          <a:prstGeom prst="rect">
-            <a:avLst/>
-          </a:prstGeom>
-          <a:noFill/>
-        </p:spPr>
-        <p:txBody>
-          <a:bodyPr wrap="square" anchor="t" lIns="0" rIns="0" tIns="0" bIns="0">
-            <a:spAutoFit/>
-          </a:bodyPr>
-          <a:lstStyle/>
-          <a:p>
-            <a:pPr algn="l"/>
-            <a:r>
-              <a:rPr sz="2000" b="1">
-                <a:solidFill>
-                  <a:srgbClr val="C8A86B"/>
-                </a:solidFill>
-                <a:latin typeface="楷体"/>
-                <a:ea typeface="楷体"/>
-                <a:cs typeface="楷体"/>
-              </a:rPr>
-              <a:t>袺 jié</a:t>
-            </a:r>
-          </a:p>
-        </p:txBody>
-      </p:sp>
-      <p:sp>
-        <p:nvSpPr>
-          <p:cNvPr id="21" name="TextBox 20"/>
-          <p:cNvSpPr txBox="1"/>
-          <p:nvPr/>
-        </p:nvSpPr>
-        <p:spPr>
-          <a:xfrm>
-            <a:off x="5877458" y="3858768"/>
-            <a:ext cx="1991258" cy="347472"/>
-          </a:xfrm>
-          <a:prstGeom prst="rect">
-            <a:avLst/>
-          </a:prstGeom>
-          <a:noFill/>
-        </p:spPr>
-        <p:txBody>
-          <a:bodyPr wrap="square" anchor="t" lIns="0" rIns="0" tIns="0" bIns="0">
-            <a:spAutoFit/>
-          </a:bodyPr>
-          <a:lstStyle/>
-          <a:p>
-            <a:pPr algn="l">
-              <a:lnSpc>
-                <a:spcPct val="130000"/>
-              </a:lnSpc>
-            </a:pPr>
-            <a:r>
-              <a:rPr sz="1150" b="0">
-                <a:solidFill>
-                  <a:srgbClr val="1C2A33"/>
-                </a:solidFill>
-                <a:latin typeface="楷体"/>
-                <a:ea typeface="楷体"/>
-                <a:cs typeface="楷体"/>
-              </a:rPr>
-              <a:t>提衣襟兜着</a:t>
-            </a:r>
-          </a:p>
-        </p:txBody>
-      </p:sp>
-      <p:sp>
-        <p:nvSpPr>
-          <p:cNvPr id="22" name="Rounded Rectangle 21"/>
-          <p:cNvSpPr/>
-          <p:nvPr/>
-        </p:nvSpPr>
-        <p:spPr>
-          <a:xfrm>
-            <a:off x="8097316" y="3749040"/>
-            <a:ext cx="3454298" cy="868680"/>
-          </a:xfrm>
-          <a:prstGeom prst="roundRect">
-            <a:avLst/>
-          </a:prstGeom>
-          <a:solidFill>
-            <a:srgbClr val="E7DFD2"/>
-          </a:solidFill>
-          <a:ln w="17780">
-            <a:solidFill>
-              <a:srgbClr val="C8A86B"/>
-            </a:solidFill>
-          </a:ln>
-          <a:effectLst/>
-        </p:spPr>
-        <p:style>
-          <a:lnRef idx="1">
-            <a:schemeClr val="accent1"/>
-          </a:lnRef>
-          <a:fillRef idx="3">
-            <a:schemeClr val="accent1"/>
-          </a:fillRef>
-          <a:effectRef idx="2">
-            <a:schemeClr val="accent1"/>
-          </a:effectRef>
-          <a:fontRef idx="minor">
-            <a:schemeClr val="lt1"/>
-          </a:fontRef>
-        </p:style>
-        <p:txBody>
-          <a:bodyPr rtlCol="0" anchor="ctr"/>
-          <a:lstStyle/>
-          <a:p>
-            <a:pPr algn="ctr"/>
-          </a:p>
-        </p:txBody>
-      </p:sp>
-      <p:sp>
-        <p:nvSpPr>
-          <p:cNvPr id="23" name="TextBox 22"/>
-          <p:cNvSpPr txBox="1"/>
-          <p:nvPr/>
-        </p:nvSpPr>
-        <p:spPr>
-          <a:xfrm>
-            <a:off x="8188756" y="3822192"/>
-            <a:ext cx="1280160" cy="384048"/>
-          </a:xfrm>
-          <a:prstGeom prst="rect">
-            <a:avLst/>
-          </a:prstGeom>
-          <a:noFill/>
-        </p:spPr>
-        <p:txBody>
-          <a:bodyPr wrap="square" anchor="t" lIns="0" rIns="0" tIns="0" bIns="0">
-            <a:spAutoFit/>
-          </a:bodyPr>
-          <a:lstStyle/>
-          <a:p>
-            <a:pPr algn="l"/>
-            <a:r>
-              <a:rPr sz="2000" b="1">
-                <a:solidFill>
-                  <a:srgbClr val="C8A86B"/>
-                </a:solidFill>
-                <a:latin typeface="楷体"/>
-                <a:ea typeface="楷体"/>
-                <a:cs typeface="楷体"/>
-              </a:rPr>
-              <a:t>襭 xié</a:t>
-            </a:r>
-          </a:p>
-        </p:txBody>
-      </p:sp>
-      <p:sp>
-        <p:nvSpPr>
-          <p:cNvPr id="24" name="TextBox 23"/>
-          <p:cNvSpPr txBox="1"/>
-          <p:nvPr/>
-        </p:nvSpPr>
-        <p:spPr>
-          <a:xfrm>
-            <a:off x="9468916" y="3858768"/>
-            <a:ext cx="1991258" cy="347472"/>
-          </a:xfrm>
-          <a:prstGeom prst="rect">
-            <a:avLst/>
-          </a:prstGeom>
-          <a:noFill/>
-        </p:spPr>
-        <p:txBody>
-          <a:bodyPr wrap="square" anchor="t" lIns="0" rIns="0" tIns="0" bIns="0">
-            <a:spAutoFit/>
-          </a:bodyPr>
-          <a:lstStyle/>
-          <a:p>
-            <a:pPr algn="l">
-              <a:lnSpc>
-                <a:spcPct val="130000"/>
-              </a:lnSpc>
-            </a:pPr>
-            <a:r>
-              <a:rPr sz="1150" b="0">
-                <a:solidFill>
-                  <a:srgbClr val="1C2A33"/>
-                </a:solidFill>
-                <a:latin typeface="楷体"/>
-                <a:ea typeface="楷体"/>
-                <a:cs typeface="楷体"/>
-              </a:rPr>
-              <a:t>扎紧衣襟装满带走</a:t>
-            </a:r>
-          </a:p>
-        </p:txBody>
-      </p:sp>
-      <p:sp>
-        <p:nvSpPr>
-          <p:cNvPr id="25" name="TextBox 24"/>
-          <p:cNvSpPr txBox="1"/>
-          <p:nvPr/>
-        </p:nvSpPr>
-        <p:spPr>
-          <a:xfrm>
-            <a:off x="640080" y="4572000"/>
-            <a:ext cx="10911535" cy="365760"/>
-          </a:xfrm>
-          <a:prstGeom prst="rect">
-            <a:avLst/>
-          </a:prstGeom>
-          <a:noFill/>
-        </p:spPr>
-        <p:txBody>
-          <a:bodyPr wrap="square" anchor="t" lIns="0" rIns="0" tIns="0" bIns="0">
-            <a:spAutoFit/>
-          </a:bodyPr>
-          <a:lstStyle/>
-          <a:p>
-            <a:pPr algn="ctr"/>
-            <a:r>
-              <a:rPr sz="1400" b="0">
-                <a:solidFill>
-                  <a:srgbClr val="6B6258"/>
-                </a:solidFill>
-                <a:latin typeface="微软雅黑"/>
-                <a:ea typeface="微软雅黑"/>
-                <a:cs typeface="微软雅黑"/>
-              </a:rPr>
-              <a:t>▶ 劳动进程完整呈现：开始 → 得到 → 细致 → 高效 → 兜装 → 满载</a:t>
-            </a:r>
-          </a:p>
-        </p:txBody>
-      </p:sp>
-      <p:sp>
-        <p:nvSpPr>
-          <p:cNvPr id="26" name="Rounded Rectangle 25"/>
-          <p:cNvSpPr/>
-          <p:nvPr/>
-        </p:nvSpPr>
-        <p:spPr>
-          <a:xfrm>
-            <a:off x="640080" y="4983480"/>
-            <a:ext cx="10911535" cy="1600200"/>
-          </a:xfrm>
-          <a:prstGeom prst="roundRect">
-            <a:avLst/>
-          </a:prstGeom>
-          <a:solidFill>
-            <a:srgbClr val="1C2A33"/>
-          </a:solidFill>
-          <a:effectLst/>
-        </p:spPr>
-        <p:style>
-          <a:lnRef idx="1">
-            <a:schemeClr val="accent1"/>
-          </a:lnRef>
-          <a:fillRef idx="3">
-            <a:schemeClr val="accent1"/>
-          </a:fillRef>
-          <a:effectRef idx="2">
-            <a:schemeClr val="accent1"/>
-          </a:effectRef>
-          <a:fontRef idx="minor">
-            <a:schemeClr val="lt1"/>
-          </a:fontRef>
-        </p:style>
-        <p:txBody>
-          <a:bodyPr rtlCol="0" anchor="ctr"/>
-          <a:lstStyle/>
-          <a:p>
-            <a:pPr algn="ctr"/>
-          </a:p>
-        </p:txBody>
-      </p:sp>
-      <p:sp>
-        <p:nvSpPr>
-          <p:cNvPr id="27" name="TextBox 26"/>
-          <p:cNvSpPr txBox="1"/>
-          <p:nvPr/>
-        </p:nvSpPr>
-        <p:spPr>
-          <a:xfrm>
-            <a:off x="914400" y="5120640"/>
-            <a:ext cx="10362895" cy="1371600"/>
-          </a:xfrm>
-          <a:prstGeom prst="rect">
-            <a:avLst/>
-          </a:prstGeom>
-          <a:noFill/>
-        </p:spPr>
-        <p:txBody>
-          <a:bodyPr wrap="square" anchor="t" lIns="0" rIns="0" tIns="0" bIns="0">
-            <a:spAutoFit/>
-          </a:bodyPr>
-          <a:lstStyle/>
-          <a:p>
-            <a:pPr algn="l">
-              <a:spcAft>
-                <a:spcPts val="600"/>
-              </a:spcAft>
-            </a:pPr>
-            <a:r>
-              <a:rPr sz="1800" b="1">
-                <a:solidFill>
-                  <a:srgbClr val="C8A86B"/>
-                </a:solidFill>
-                <a:latin typeface="楷体"/>
-                <a:ea typeface="楷体"/>
-                <a:cs typeface="楷体"/>
-              </a:rPr>
-              <a:t>重章叠句的艺术智慧</a:t>
-            </a:r>
-          </a:p>
-          <a:p>
-            <a:pPr algn="l">
-              <a:lnSpc>
-                <a:spcPct val="140000"/>
-              </a:lnSpc>
-              <a:spcAft>
-                <a:spcPts val="400"/>
-              </a:spcAft>
-            </a:pPr>
-            <a:r>
-              <a:rPr sz="1400" b="0">
-                <a:solidFill>
-                  <a:srgbClr val="FFFFFF"/>
-                </a:solidFill>
-                <a:latin typeface="楷体"/>
-                <a:ea typeface="楷体"/>
-                <a:cs typeface="楷体"/>
-              </a:rPr>
-              <a:t>不变 = 结构重复（劳动的节拍感、往复回环的音乐性）</a:t>
-            </a:r>
-          </a:p>
-          <a:p>
-            <a:pPr algn="l">
-              <a:lnSpc>
-                <a:spcPct val="140000"/>
-              </a:lnSpc>
-            </a:pPr>
-            <a:r>
-              <a:rPr sz="1400" b="0">
-                <a:solidFill>
-                  <a:srgbClr val="FFFFFF"/>
-                </a:solidFill>
-                <a:latin typeface="楷体"/>
-                <a:ea typeface="楷体"/>
-                <a:cs typeface="楷体"/>
-              </a:rPr>
-              <a:t>变 = 动词推进（每次重复都有新动作，劳动在向前走）</a:t>
-            </a:r>
-          </a:p>
-        </p:txBody>
-      </p:sp>
-      <p:sp>
-        <p:nvSpPr>
-          <p:cNvPr id="28" name="TextBox 27"/>
           <p:cNvSpPr txBox="1"/>
           <p:nvPr/>
         </p:nvSpPr>
@@ -6256,13 +5391,13 @@
             <a:r>
               <a:rPr sz="1300" b="1">
                 <a:solidFill>
-                  <a:srgbClr val="B23A2A"/>
+                  <a:srgbClr val="2E7D6B"/>
                 </a:solidFill>
                 <a:latin typeface="微软雅黑"/>
                 <a:ea typeface="微软雅黑"/>
                 <a:cs typeface="微软雅黑"/>
               </a:rPr>
-              <a:t>难点 · 怎么破</a:t>
+              <a:t>学习路径</a:t>
             </a:r>
           </a:p>
         </p:txBody>
@@ -6279,342 +5414,6 @@
             <a:ext cx="822960" cy="30480"/>
           </a:xfrm>
           <a:prstGeom prst="rect">
-            <a:avLst/>
-          </a:prstGeom>
-          <a:solidFill>
-            <a:srgbClr val="B23A2A"/>
-          </a:solidFill>
-          <a:ln>
-            <a:noFill/>
-          </a:ln>
-          <a:effectLst/>
-        </p:spPr>
-        <p:style>
-          <a:lnRef idx="1">
-            <a:schemeClr val="accent1"/>
-          </a:lnRef>
-          <a:fillRef idx="3">
-            <a:schemeClr val="accent1"/>
-          </a:fillRef>
-          <a:effectRef idx="2">
-            <a:schemeClr val="accent1"/>
-          </a:effectRef>
-          <a:fontRef idx="minor">
-            <a:schemeClr val="lt1"/>
-          </a:fontRef>
-        </p:style>
-        <p:txBody>
-          <a:bodyPr rtlCol="0" anchor="ctr"/>
-          <a:lstStyle/>
-          <a:p>
-            <a:pPr algn="ctr"/>
-          </a:p>
-        </p:txBody>
-      </p:sp>
-      <p:sp>
-        <p:nvSpPr>
-          <p:cNvPr id="5" name="TextBox 4"/>
-          <p:cNvSpPr txBox="1"/>
-          <p:nvPr/>
-        </p:nvSpPr>
-        <p:spPr>
-          <a:xfrm>
-            <a:off x="640080" y="1325880"/>
-            <a:ext cx="10058400" cy="548640"/>
-          </a:xfrm>
-          <a:prstGeom prst="rect">
-            <a:avLst/>
-          </a:prstGeom>
-          <a:noFill/>
-        </p:spPr>
-        <p:txBody>
-          <a:bodyPr wrap="square" anchor="t" lIns="0" rIns="0" tIns="0" bIns="0">
-            <a:spAutoFit/>
-          </a:bodyPr>
-          <a:lstStyle/>
-          <a:p>
-            <a:pPr algn="l"/>
-            <a:r>
-              <a:rPr sz="2600" b="1">
-                <a:solidFill>
-                  <a:srgbClr val="1C2A33"/>
-                </a:solidFill>
-                <a:latin typeface="楷体"/>
-                <a:ea typeface="楷体"/>
-                <a:cs typeface="楷体"/>
-              </a:rPr>
-              <a:t>三个易卡住的地方</a:t>
-            </a:r>
-          </a:p>
-        </p:txBody>
-      </p:sp>
-      <p:sp>
-        <p:nvSpPr>
-          <p:cNvPr id="6" name="Rounded Rectangle 5"/>
-          <p:cNvSpPr/>
-          <p:nvPr/>
-        </p:nvSpPr>
-        <p:spPr>
-          <a:xfrm>
-            <a:off x="640080" y="2194560"/>
-            <a:ext cx="3393338" cy="3840480"/>
-          </a:xfrm>
-          <a:prstGeom prst="roundRect">
-            <a:avLst/>
-          </a:prstGeom>
-          <a:solidFill>
-            <a:srgbClr val="FFFFFF"/>
-          </a:solidFill>
-          <a:ln w="20320">
-            <a:solidFill>
-              <a:srgbClr val="B23A2A"/>
-            </a:solidFill>
-          </a:ln>
-          <a:effectLst/>
-        </p:spPr>
-        <p:style>
-          <a:lnRef idx="1">
-            <a:schemeClr val="accent1"/>
-          </a:lnRef>
-          <a:fillRef idx="3">
-            <a:schemeClr val="accent1"/>
-          </a:fillRef>
-          <a:effectRef idx="2">
-            <a:schemeClr val="accent1"/>
-          </a:effectRef>
-          <a:fontRef idx="minor">
-            <a:schemeClr val="lt1"/>
-          </a:fontRef>
-        </p:style>
-        <p:txBody>
-          <a:bodyPr rtlCol="0" anchor="ctr"/>
-          <a:lstStyle/>
-          <a:p>
-            <a:pPr algn="ctr"/>
-          </a:p>
-        </p:txBody>
-      </p:sp>
-      <p:sp>
-        <p:nvSpPr>
-          <p:cNvPr id="7" name="Oval 6"/>
-          <p:cNvSpPr/>
-          <p:nvPr/>
-        </p:nvSpPr>
-        <p:spPr>
-          <a:xfrm>
-            <a:off x="868680" y="2423160"/>
-            <a:ext cx="548640" cy="548640"/>
-          </a:xfrm>
-          <a:prstGeom prst="ellipse">
-            <a:avLst/>
-          </a:prstGeom>
-          <a:solidFill>
-            <a:srgbClr val="B23A2A"/>
-          </a:solidFill>
-          <a:ln>
-            <a:noFill/>
-          </a:ln>
-          <a:effectLst/>
-        </p:spPr>
-        <p:style>
-          <a:lnRef idx="1">
-            <a:schemeClr val="accent1"/>
-          </a:lnRef>
-          <a:fillRef idx="3">
-            <a:schemeClr val="accent1"/>
-          </a:fillRef>
-          <a:effectRef idx="2">
-            <a:schemeClr val="accent1"/>
-          </a:effectRef>
-          <a:fontRef idx="minor">
-            <a:schemeClr val="lt1"/>
-          </a:fontRef>
-        </p:style>
-        <p:txBody>
-          <a:bodyPr rtlCol="0" anchor="ctr"/>
-          <a:lstStyle/>
-          <a:p>
-            <a:pPr algn="ctr"/>
-          </a:p>
-        </p:txBody>
-      </p:sp>
-      <p:sp>
-        <p:nvSpPr>
-          <p:cNvPr id="8" name="TextBox 7"/>
-          <p:cNvSpPr txBox="1"/>
-          <p:nvPr/>
-        </p:nvSpPr>
-        <p:spPr>
-          <a:xfrm>
-            <a:off x="868680" y="2496312"/>
-            <a:ext cx="548640" cy="411480"/>
-          </a:xfrm>
-          <a:prstGeom prst="rect">
-            <a:avLst/>
-          </a:prstGeom>
-          <a:noFill/>
-        </p:spPr>
-        <p:txBody>
-          <a:bodyPr wrap="square" anchor="t" lIns="0" rIns="0" tIns="0" bIns="0">
-            <a:spAutoFit/>
-          </a:bodyPr>
-          <a:lstStyle/>
-          <a:p>
-            <a:pPr algn="ctr"/>
-            <a:r>
-              <a:rPr sz="2000" b="1">
-                <a:solidFill>
-                  <a:srgbClr val="FFFFFF"/>
-                </a:solidFill>
-                <a:latin typeface="微软雅黑"/>
-                <a:ea typeface="微软雅黑"/>
-                <a:cs typeface="微软雅黑"/>
-              </a:rPr>
-              <a:t>1</a:t>
-            </a:r>
-          </a:p>
-        </p:txBody>
-      </p:sp>
-      <p:sp>
-        <p:nvSpPr>
-          <p:cNvPr id="9" name="TextBox 8"/>
-          <p:cNvSpPr txBox="1"/>
-          <p:nvPr/>
-        </p:nvSpPr>
-        <p:spPr>
-          <a:xfrm>
-            <a:off x="1554480" y="2450592"/>
-            <a:ext cx="2296058" cy="731520"/>
-          </a:xfrm>
-          <a:prstGeom prst="rect">
-            <a:avLst/>
-          </a:prstGeom>
-          <a:noFill/>
-        </p:spPr>
-        <p:txBody>
-          <a:bodyPr wrap="square" anchor="t" lIns="0" rIns="0" tIns="0" bIns="0">
-            <a:spAutoFit/>
-          </a:bodyPr>
-          <a:lstStyle/>
-          <a:p>
-            <a:pPr algn="l">
-              <a:lnSpc>
-                <a:spcPct val="130000"/>
-              </a:lnSpc>
-            </a:pPr>
-            <a:r>
-              <a:rPr sz="1650" b="1">
-                <a:solidFill>
-                  <a:srgbClr val="1C2A33"/>
-                </a:solidFill>
-                <a:latin typeface="楷体"/>
-                <a:ea typeface="楷体"/>
-                <a:cs typeface="楷体"/>
-              </a:rPr>
-              <a:t>六动词细微区别</a:t>
-            </a:r>
-          </a:p>
-        </p:txBody>
-      </p:sp>
-      <p:sp>
-        <p:nvSpPr>
-          <p:cNvPr id="10" name="TextBox 9"/>
-          <p:cNvSpPr txBox="1"/>
-          <p:nvPr/>
-        </p:nvSpPr>
-        <p:spPr>
-          <a:xfrm>
-            <a:off x="914400" y="3246120"/>
-            <a:ext cx="2844698" cy="2651760"/>
-          </a:xfrm>
-          <a:prstGeom prst="rect">
-            <a:avLst/>
-          </a:prstGeom>
-          <a:noFill/>
-        </p:spPr>
-        <p:txBody>
-          <a:bodyPr wrap="square" anchor="t" lIns="0" rIns="0" tIns="0" bIns="0">
-            <a:spAutoFit/>
-          </a:bodyPr>
-          <a:lstStyle/>
-          <a:p>
-            <a:pPr algn="l">
-              <a:lnSpc>
-                <a:spcPct val="150000"/>
-              </a:lnSpc>
-            </a:pPr>
-            <a:r>
-              <a:rPr sz="1400" b="0">
-                <a:solidFill>
-                  <a:srgbClr val="1C2A33"/>
-                </a:solidFill>
-                <a:latin typeface="楷体"/>
-                <a:ea typeface="楷体"/>
-                <a:cs typeface="楷体"/>
-              </a:rPr>
-              <a:t>"掇"(拾掉落的) vs "捋"(从茎上抹下)方向不同。→ 动作演示法：现场做一遍，人人能看懂。</a:t>
-            </a:r>
-          </a:p>
-        </p:txBody>
-      </p:sp>
-      <p:sp>
-        <p:nvSpPr>
-          <p:cNvPr id="11" name="Rounded Rectangle 10"/>
-          <p:cNvSpPr/>
-          <p:nvPr/>
-        </p:nvSpPr>
-        <p:spPr>
-          <a:xfrm>
-            <a:off x="4399178" y="2194560"/>
-            <a:ext cx="3393338" cy="3840480"/>
-          </a:xfrm>
-          <a:prstGeom prst="roundRect">
-            <a:avLst/>
-          </a:prstGeom>
-          <a:solidFill>
-            <a:srgbClr val="FFFFFF"/>
-          </a:solidFill>
-          <a:ln w="20320">
-            <a:solidFill>
-              <a:srgbClr val="2E7D6B"/>
-            </a:solidFill>
-          </a:ln>
-          <a:effectLst/>
-        </p:spPr>
-        <p:style>
-          <a:lnRef idx="1">
-            <a:schemeClr val="accent1"/>
-          </a:lnRef>
-          <a:fillRef idx="3">
-            <a:schemeClr val="accent1"/>
-          </a:fillRef>
-          <a:effectRef idx="2">
-            <a:schemeClr val="accent1"/>
-          </a:effectRef>
-          <a:fontRef idx="minor">
-            <a:schemeClr val="lt1"/>
-          </a:fontRef>
-        </p:style>
-        <p:txBody>
-          <a:bodyPr rtlCol="0" anchor="ctr"/>
-          <a:lstStyle/>
-          <a:p>
-            <a:pPr algn="ctr"/>
-          </a:p>
-        </p:txBody>
-      </p:sp>
-      <p:sp>
-        <p:nvSpPr>
-          <p:cNvPr id="12" name="Oval 11"/>
-          <p:cNvSpPr/>
-          <p:nvPr/>
-        </p:nvSpPr>
-        <p:spPr>
-          <a:xfrm>
-            <a:off x="4627778" y="2423160"/>
-            <a:ext cx="548640" cy="548640"/>
-          </a:xfrm>
-          <a:prstGeom prst="ellipse">
             <a:avLst/>
           </a:prstGeom>
           <a:solidFill>
@@ -6649,14 +5448,104 @@
       </p:sp>
       <p:sp>
         <p:nvSpPr>
-          <p:cNvPr id="13" name="TextBox 12"/>
+          <p:cNvPr id="5" name="Rounded Rectangle 4"/>
+          <p:cNvSpPr/>
+          <p:nvPr/>
+        </p:nvSpPr>
+        <p:spPr>
+          <a:xfrm>
+            <a:off x="640080" y="1371600"/>
+            <a:ext cx="10911535" cy="685800"/>
+          </a:xfrm>
+          <a:prstGeom prst="roundRect">
+            <a:avLst/>
+          </a:prstGeom>
+          <a:solidFill>
+            <a:srgbClr val="FFFFFF"/>
+          </a:solidFill>
+          <a:ln w="22860">
+            <a:solidFill>
+              <a:srgbClr val="2E7D6B"/>
+            </a:solidFill>
+          </a:ln>
+          <a:effectLst/>
+        </p:spPr>
+        <p:style>
+          <a:lnRef idx="1">
+            <a:schemeClr val="accent1"/>
+          </a:lnRef>
+          <a:fillRef idx="3">
+            <a:schemeClr val="accent1"/>
+          </a:fillRef>
+          <a:effectRef idx="2">
+            <a:schemeClr val="accent1"/>
+          </a:effectRef>
+          <a:fontRef idx="minor">
+            <a:schemeClr val="lt1"/>
+          </a:fontRef>
+        </p:style>
+        <p:txBody>
+          <a:bodyPr rtlCol="0" anchor="ctr"/>
+          <a:lstStyle/>
+          <a:p>
+            <a:pPr algn="ctr"/>
+          </a:p>
+        </p:txBody>
+      </p:sp>
+      <p:sp>
+        <p:nvSpPr>
+          <p:cNvPr id="6" name="Oval 5"/>
+          <p:cNvSpPr/>
+          <p:nvPr/>
+        </p:nvSpPr>
+        <p:spPr>
+          <a:xfrm>
+            <a:off x="804672" y="1536192"/>
+            <a:ext cx="457200" cy="457200"/>
+          </a:xfrm>
+          <a:prstGeom prst="ellipse">
+            <a:avLst/>
+          </a:prstGeom>
+          <a:solidFill>
+            <a:srgbClr val="2E7D6B"/>
+          </a:solidFill>
+          <a:ln>
+            <a:noFill/>
+          </a:ln>
+          <a:effectLst/>
+        </p:spPr>
+        <p:style>
+          <a:lnRef idx="1">
+            <a:schemeClr val="accent1"/>
+          </a:lnRef>
+          <a:fillRef idx="3">
+            <a:schemeClr val="accent1"/>
+          </a:fillRef>
+          <a:effectRef idx="2">
+            <a:schemeClr val="accent1"/>
+          </a:effectRef>
+          <a:fontRef idx="minor">
+            <a:schemeClr val="lt1"/>
+          </a:fontRef>
+        </p:style>
+        <p:txBody>
+          <a:bodyPr rtlCol="0" anchor="ctr"/>
+          <a:lstStyle/>
+          <a:p>
+            <a:pPr algn="ctr"/>
+          </a:p>
+        </p:txBody>
+      </p:sp>
+      <p:sp>
+        <p:nvSpPr>
+          <p:cNvPr id="7" name="TextBox 6"/>
           <p:cNvSpPr txBox="1"/>
           <p:nvPr/>
         </p:nvSpPr>
         <p:spPr>
           <a:xfrm>
-            <a:off x="4627778" y="2496312"/>
-            <a:ext cx="548640" cy="411480"/>
+            <a:off x="804672" y="1591056"/>
+            <a:ext cx="457200" cy="384048"/>
           </a:xfrm>
           <a:prstGeom prst="rect">
             <a:avLst/>
@@ -6671,7 +5560,175 @@
           <a:p>
             <a:pPr algn="ctr"/>
             <a:r>
-              <a:rPr sz="2000" b="1">
+              <a:rPr sz="1600" b="1">
+                <a:solidFill>
+                  <a:srgbClr val="FFFFFF"/>
+                </a:solidFill>
+                <a:latin typeface="微软雅黑"/>
+                <a:ea typeface="微软雅黑"/>
+                <a:cs typeface="微软雅黑"/>
+              </a:rPr>
+              <a:t>1</a:t>
+            </a:r>
+          </a:p>
+        </p:txBody>
+      </p:sp>
+      <p:sp>
+        <p:nvSpPr>
+          <p:cNvPr id="8" name="TextBox 7"/>
+          <p:cNvSpPr txBox="1"/>
+          <p:nvPr/>
+        </p:nvSpPr>
+        <p:spPr>
+          <a:xfrm>
+            <a:off x="1371600" y="1481328"/>
+            <a:ext cx="9997135" cy="484632"/>
+          </a:xfrm>
+          <a:prstGeom prst="rect">
+            <a:avLst/>
+          </a:prstGeom>
+          <a:noFill/>
+        </p:spPr>
+        <p:txBody>
+          <a:bodyPr wrap="square" anchor="t" lIns="0" rIns="0" tIns="0" bIns="0">
+            <a:spAutoFit/>
+          </a:bodyPr>
+          <a:lstStyle/>
+          <a:p>
+            <a:pPr algn="l">
+              <a:lnSpc>
+                <a:spcPct val="110000"/>
+              </a:lnSpc>
+            </a:pPr>
+            <a:r>
+              <a:rPr sz="1600" b="1">
+                <a:solidFill>
+                  <a:srgbClr val="1C2A33"/>
+                </a:solidFill>
+                <a:latin typeface="微软雅黑"/>
+                <a:ea typeface="微软雅黑"/>
+                <a:cs typeface="微软雅黑"/>
+              </a:rPr>
+              <a:t>Step 1 导入</a:t>
+            </a:r>
+          </a:p>
+        </p:txBody>
+      </p:sp>
+      <p:sp>
+        <p:nvSpPr>
+          <p:cNvPr id="9" name="Rounded Rectangle 8"/>
+          <p:cNvSpPr/>
+          <p:nvPr/>
+        </p:nvSpPr>
+        <p:spPr>
+          <a:xfrm>
+            <a:off x="640080" y="2194560"/>
+            <a:ext cx="10911535" cy="685800"/>
+          </a:xfrm>
+          <a:prstGeom prst="roundRect">
+            <a:avLst/>
+          </a:prstGeom>
+          <a:solidFill>
+            <a:srgbClr val="FFFFFF"/>
+          </a:solidFill>
+          <a:ln w="22860">
+            <a:solidFill>
+              <a:srgbClr val="2E7D6B"/>
+            </a:solidFill>
+          </a:ln>
+          <a:effectLst/>
+        </p:spPr>
+        <p:style>
+          <a:lnRef idx="1">
+            <a:schemeClr val="accent1"/>
+          </a:lnRef>
+          <a:fillRef idx="3">
+            <a:schemeClr val="accent1"/>
+          </a:fillRef>
+          <a:effectRef idx="2">
+            <a:schemeClr val="accent1"/>
+          </a:effectRef>
+          <a:fontRef idx="minor">
+            <a:schemeClr val="lt1"/>
+          </a:fontRef>
+        </p:style>
+        <p:txBody>
+          <a:bodyPr rtlCol="0" anchor="ctr"/>
+          <a:lstStyle/>
+          <a:p>
+            <a:pPr algn="ctr"/>
+          </a:p>
+        </p:txBody>
+      </p:sp>
+      <p:sp>
+        <p:nvSpPr>
+          <p:cNvPr id="10" name="Oval 9"/>
+          <p:cNvSpPr/>
+          <p:nvPr/>
+        </p:nvSpPr>
+        <p:spPr>
+          <a:xfrm>
+            <a:off x="804672" y="2359152"/>
+            <a:ext cx="457200" cy="457200"/>
+          </a:xfrm>
+          <a:prstGeom prst="ellipse">
+            <a:avLst/>
+          </a:prstGeom>
+          <a:solidFill>
+            <a:srgbClr val="2E7D6B"/>
+          </a:solidFill>
+          <a:ln>
+            <a:noFill/>
+          </a:ln>
+          <a:effectLst/>
+        </p:spPr>
+        <p:style>
+          <a:lnRef idx="1">
+            <a:schemeClr val="accent1"/>
+          </a:lnRef>
+          <a:fillRef idx="3">
+            <a:schemeClr val="accent1"/>
+          </a:fillRef>
+          <a:effectRef idx="2">
+            <a:schemeClr val="accent1"/>
+          </a:effectRef>
+          <a:fontRef idx="minor">
+            <a:schemeClr val="lt1"/>
+          </a:fontRef>
+        </p:style>
+        <p:txBody>
+          <a:bodyPr rtlCol="0" anchor="ctr"/>
+          <a:lstStyle/>
+          <a:p>
+            <a:pPr algn="ctr"/>
+          </a:p>
+        </p:txBody>
+      </p:sp>
+      <p:sp>
+        <p:nvSpPr>
+          <p:cNvPr id="11" name="TextBox 10"/>
+          <p:cNvSpPr txBox="1"/>
+          <p:nvPr/>
+        </p:nvSpPr>
+        <p:spPr>
+          <a:xfrm>
+            <a:off x="804672" y="2414016"/>
+            <a:ext cx="457200" cy="384048"/>
+          </a:xfrm>
+          <a:prstGeom prst="rect">
+            <a:avLst/>
+          </a:prstGeom>
+          <a:noFill/>
+        </p:spPr>
+        <p:txBody>
+          <a:bodyPr wrap="square" anchor="t" lIns="0" rIns="0" tIns="0" bIns="0">
+            <a:spAutoFit/>
+          </a:bodyPr>
+          <a:lstStyle/>
+          <a:p>
+            <a:pPr algn="ctr"/>
+            <a:r>
+              <a:rPr sz="1600" b="1">
                 <a:solidFill>
                   <a:srgbClr val="FFFFFF"/>
                 </a:solidFill>
@@ -6686,14 +5743,14 @@
       </p:sp>
       <p:sp>
         <p:nvSpPr>
-          <p:cNvPr id="14" name="TextBox 13"/>
+          <p:cNvPr id="12" name="TextBox 11"/>
           <p:cNvSpPr txBox="1"/>
           <p:nvPr/>
         </p:nvSpPr>
         <p:spPr>
           <a:xfrm>
-            <a:off x="5313578" y="2450592"/>
-            <a:ext cx="2296058" cy="731520"/>
+            <a:off x="1371600" y="2304288"/>
+            <a:ext cx="9997135" cy="484632"/>
           </a:xfrm>
           <a:prstGeom prst="rect">
             <a:avLst/>
@@ -6708,74 +5765,33 @@
           <a:p>
             <a:pPr algn="l">
               <a:lnSpc>
-                <a:spcPct val="130000"/>
+                <a:spcPct val="110000"/>
               </a:lnSpc>
             </a:pPr>
             <a:r>
-              <a:rPr sz="1650" b="1">
+              <a:rPr sz="1600" b="1">
                 <a:solidFill>
                   <a:srgbClr val="1C2A33"/>
                 </a:solidFill>
-                <a:latin typeface="楷体"/>
-                <a:ea typeface="楷体"/>
-                <a:cs typeface="楷体"/>
+                <a:latin typeface="微软雅黑"/>
+                <a:ea typeface="微软雅黑"/>
+                <a:cs typeface="微软雅黑"/>
               </a:rPr>
-              <a:t>重章叠句≠偷懒重复</a:t>
-            </a:r>
-          </a:p>
-        </p:txBody>
-      </p:sp>
-      <p:sp>
-        <p:nvSpPr>
-          <p:cNvPr id="15" name="TextBox 14"/>
-          <p:cNvSpPr txBox="1"/>
-          <p:nvPr/>
-        </p:nvSpPr>
-        <p:spPr>
-          <a:xfrm>
-            <a:off x="4673498" y="3246120"/>
-            <a:ext cx="2844698" cy="2651760"/>
-          </a:xfrm>
-          <a:prstGeom prst="rect">
-            <a:avLst/>
-          </a:prstGeom>
-          <a:noFill/>
-        </p:spPr>
-        <p:txBody>
-          <a:bodyPr wrap="square" anchor="t" lIns="0" rIns="0" tIns="0" bIns="0">
-            <a:spAutoFit/>
-          </a:bodyPr>
-          <a:lstStyle/>
-          <a:p>
-            <a:pPr algn="l">
-              <a:lnSpc>
-                <a:spcPct val="150000"/>
-              </a:lnSpc>
-            </a:pPr>
-            <a:r>
-              <a:rPr sz="1400" b="0">
-                <a:solidFill>
-                  <a:srgbClr val="1C2A33"/>
-                </a:solidFill>
-                <a:latin typeface="楷体"/>
-                <a:ea typeface="楷体"/>
-                <a:cs typeface="楷体"/>
-              </a:rPr>
-              <a:t>学生觉得"三章一样"。→ 对比分析标红变动字：不变=节拍，变=推进。不是技术缺陷，是艺术智慧。</a:t>
-            </a:r>
-          </a:p>
-        </p:txBody>
-      </p:sp>
-      <p:sp>
-        <p:nvSpPr>
-          <p:cNvPr id="16" name="Rounded Rectangle 15"/>
+              <a:t>Step 2 朗读</a:t>
+            </a:r>
+          </a:p>
+        </p:txBody>
+      </p:sp>
+      <p:sp>
+        <p:nvSpPr>
+          <p:cNvPr id="13" name="Rounded Rectangle 12"/>
           <p:cNvSpPr/>
           <p:nvPr/>
         </p:nvSpPr>
         <p:spPr>
           <a:xfrm>
-            <a:off x="8158276" y="2194560"/>
-            <a:ext cx="3393338" cy="3840480"/>
+            <a:off x="640080" y="3017520"/>
+            <a:ext cx="10911535" cy="685800"/>
           </a:xfrm>
           <a:prstGeom prst="roundRect">
             <a:avLst/>
@@ -6783,9 +5799,9 @@
           <a:solidFill>
             <a:srgbClr val="FFFFFF"/>
           </a:solidFill>
-          <a:ln w="20320">
+          <a:ln w="22860">
             <a:solidFill>
-              <a:srgbClr val="C8A86B"/>
+              <a:srgbClr val="2E7D6B"/>
             </a:solidFill>
           </a:ln>
           <a:effectLst/>
@@ -6814,20 +5830,20 @@
       </p:sp>
       <p:sp>
         <p:nvSpPr>
-          <p:cNvPr id="17" name="Oval 16"/>
+          <p:cNvPr id="14" name="Oval 13"/>
           <p:cNvSpPr/>
           <p:nvPr/>
         </p:nvSpPr>
         <p:spPr>
           <a:xfrm>
-            <a:off x="8386876" y="2423160"/>
-            <a:ext cx="548640" cy="548640"/>
+            <a:off x="804672" y="3182112"/>
+            <a:ext cx="457200" cy="457200"/>
           </a:xfrm>
           <a:prstGeom prst="ellipse">
             <a:avLst/>
           </a:prstGeom>
           <a:solidFill>
-            <a:srgbClr val="C8A86B"/>
+            <a:srgbClr val="2E7D6B"/>
           </a:solidFill>
           <a:ln>
             <a:noFill/>
@@ -6858,14 +5874,14 @@
       </p:sp>
       <p:sp>
         <p:nvSpPr>
-          <p:cNvPr id="18" name="TextBox 17"/>
+          <p:cNvPr id="15" name="TextBox 14"/>
           <p:cNvSpPr txBox="1"/>
           <p:nvPr/>
         </p:nvSpPr>
         <p:spPr>
           <a:xfrm>
-            <a:off x="8386876" y="2496312"/>
-            <a:ext cx="548640" cy="411480"/>
+            <a:off x="804672" y="3236976"/>
+            <a:ext cx="457200" cy="384048"/>
           </a:xfrm>
           <a:prstGeom prst="rect">
             <a:avLst/>
@@ -6880,7 +5896,7 @@
           <a:p>
             <a:pPr algn="ctr"/>
             <a:r>
-              <a:rPr sz="2000" b="1">
+              <a:rPr sz="1600" b="1">
                 <a:solidFill>
                   <a:srgbClr val="FFFFFF"/>
                 </a:solidFill>
@@ -6895,14 +5911,14 @@
       </p:sp>
       <p:sp>
         <p:nvSpPr>
-          <p:cNvPr id="19" name="TextBox 18"/>
+          <p:cNvPr id="16" name="TextBox 15"/>
           <p:cNvSpPr txBox="1"/>
           <p:nvPr/>
         </p:nvSpPr>
         <p:spPr>
           <a:xfrm>
-            <a:off x="9072676" y="2450592"/>
-            <a:ext cx="2296058" cy="731520"/>
+            <a:off x="1371600" y="3127248"/>
+            <a:ext cx="9997135" cy="484632"/>
           </a:xfrm>
           <a:prstGeom prst="rect">
             <a:avLst/>
@@ -6917,33 +5933,123 @@
           <a:p>
             <a:pPr algn="l">
               <a:lnSpc>
-                <a:spcPct val="130000"/>
+                <a:spcPct val="110000"/>
               </a:lnSpc>
             </a:pPr>
             <a:r>
-              <a:rPr sz="1650" b="1">
+              <a:rPr sz="1600" b="1">
                 <a:solidFill>
                   <a:srgbClr val="1C2A33"/>
                 </a:solidFill>
-                <a:latin typeface="楷体"/>
-                <a:ea typeface="楷体"/>
-                <a:cs typeface="楷体"/>
+                <a:latin typeface="微软雅黑"/>
+                <a:ea typeface="微软雅黑"/>
+                <a:cs typeface="微软雅黑"/>
               </a:rPr>
-              <a:t>劳动=辛苦？不！还有欢欣</a:t>
-            </a:r>
-          </a:p>
-        </p:txBody>
-      </p:sp>
-      <p:sp>
-        <p:nvSpPr>
-          <p:cNvPr id="20" name="TextBox 19"/>
+              <a:t>Step 3 六动词</a:t>
+            </a:r>
+          </a:p>
+        </p:txBody>
+      </p:sp>
+      <p:sp>
+        <p:nvSpPr>
+          <p:cNvPr id="17" name="Rounded Rectangle 16"/>
+          <p:cNvSpPr/>
+          <p:nvPr/>
+        </p:nvSpPr>
+        <p:spPr>
+          <a:xfrm>
+            <a:off x="640080" y="3840480"/>
+            <a:ext cx="10911535" cy="685800"/>
+          </a:xfrm>
+          <a:prstGeom prst="roundRect">
+            <a:avLst/>
+          </a:prstGeom>
+          <a:solidFill>
+            <a:srgbClr val="FFFFFF"/>
+          </a:solidFill>
+          <a:ln w="22860">
+            <a:solidFill>
+              <a:srgbClr val="2E7D6B"/>
+            </a:solidFill>
+          </a:ln>
+          <a:effectLst/>
+        </p:spPr>
+        <p:style>
+          <a:lnRef idx="1">
+            <a:schemeClr val="accent1"/>
+          </a:lnRef>
+          <a:fillRef idx="3">
+            <a:schemeClr val="accent1"/>
+          </a:fillRef>
+          <a:effectRef idx="2">
+            <a:schemeClr val="accent1"/>
+          </a:effectRef>
+          <a:fontRef idx="minor">
+            <a:schemeClr val="lt1"/>
+          </a:fontRef>
+        </p:style>
+        <p:txBody>
+          <a:bodyPr rtlCol="0" anchor="ctr"/>
+          <a:lstStyle/>
+          <a:p>
+            <a:pPr algn="ctr"/>
+          </a:p>
+        </p:txBody>
+      </p:sp>
+      <p:sp>
+        <p:nvSpPr>
+          <p:cNvPr id="18" name="Oval 17"/>
+          <p:cNvSpPr/>
+          <p:nvPr/>
+        </p:nvSpPr>
+        <p:spPr>
+          <a:xfrm>
+            <a:off x="804672" y="4005072"/>
+            <a:ext cx="457200" cy="457200"/>
+          </a:xfrm>
+          <a:prstGeom prst="ellipse">
+            <a:avLst/>
+          </a:prstGeom>
+          <a:solidFill>
+            <a:srgbClr val="2E7D6B"/>
+          </a:solidFill>
+          <a:ln>
+            <a:noFill/>
+          </a:ln>
+          <a:effectLst/>
+        </p:spPr>
+        <p:style>
+          <a:lnRef idx="1">
+            <a:schemeClr val="accent1"/>
+          </a:lnRef>
+          <a:fillRef idx="3">
+            <a:schemeClr val="accent1"/>
+          </a:fillRef>
+          <a:effectRef idx="2">
+            <a:schemeClr val="accent1"/>
+          </a:effectRef>
+          <a:fontRef idx="minor">
+            <a:schemeClr val="lt1"/>
+          </a:fontRef>
+        </p:style>
+        <p:txBody>
+          <a:bodyPr rtlCol="0" anchor="ctr"/>
+          <a:lstStyle/>
+          <a:p>
+            <a:pPr algn="ctr"/>
+          </a:p>
+        </p:txBody>
+      </p:sp>
+      <p:sp>
+        <p:nvSpPr>
+          <p:cNvPr id="19" name="TextBox 18"/>
           <p:cNvSpPr txBox="1"/>
           <p:nvPr/>
         </p:nvSpPr>
         <p:spPr>
           <a:xfrm>
-            <a:off x="8432596" y="3246120"/>
-            <a:ext cx="2844698" cy="2651760"/>
+            <a:off x="804672" y="4059936"/>
+            <a:ext cx="457200" cy="384048"/>
           </a:xfrm>
           <a:prstGeom prst="rect">
             <a:avLst/>
@@ -6956,28 +6062,401 @@
           </a:bodyPr>
           <a:lstStyle/>
           <a:p>
+            <a:pPr algn="ctr"/>
+            <a:r>
+              <a:rPr sz="1600" b="1">
+                <a:solidFill>
+                  <a:srgbClr val="FFFFFF"/>
+                </a:solidFill>
+                <a:latin typeface="微软雅黑"/>
+                <a:ea typeface="微软雅黑"/>
+                <a:cs typeface="微软雅黑"/>
+              </a:rPr>
+              <a:t>4</a:t>
+            </a:r>
+          </a:p>
+        </p:txBody>
+      </p:sp>
+      <p:sp>
+        <p:nvSpPr>
+          <p:cNvPr id="20" name="TextBox 19"/>
+          <p:cNvSpPr txBox="1"/>
+          <p:nvPr/>
+        </p:nvSpPr>
+        <p:spPr>
+          <a:xfrm>
+            <a:off x="1371600" y="3950208"/>
+            <a:ext cx="9997135" cy="484632"/>
+          </a:xfrm>
+          <a:prstGeom prst="rect">
+            <a:avLst/>
+          </a:prstGeom>
+          <a:noFill/>
+        </p:spPr>
+        <p:txBody>
+          <a:bodyPr wrap="square" anchor="t" lIns="0" rIns="0" tIns="0" bIns="0">
+            <a:spAutoFit/>
+          </a:bodyPr>
+          <a:lstStyle/>
+          <a:p>
             <a:pPr algn="l">
               <a:lnSpc>
-                <a:spcPct val="150000"/>
+                <a:spcPct val="110000"/>
               </a:lnSpc>
             </a:pPr>
             <a:r>
-              <a:rPr sz="1400" b="0">
+              <a:rPr sz="1600" b="1">
                 <a:solidFill>
                   <a:srgbClr val="1C2A33"/>
                 </a:solidFill>
-                <a:latin typeface="楷体"/>
-                <a:ea typeface="楷体"/>
-                <a:cs typeface="楷体"/>
+                <a:latin typeface="微软雅黑"/>
+                <a:ea typeface="微软雅黑"/>
+                <a:cs typeface="微软雅黑"/>
               </a:rPr>
-              <a:t>思维定式：劳动就是累。→ 方玉润意境还原："平原旷野、风和日丽中群歌互答"——古人写的是劳动之美。</a:t>
-            </a:r>
-          </a:p>
-        </p:txBody>
-      </p:sp>
-      <p:sp>
-        <p:nvSpPr>
-          <p:cNvPr id="21" name="TextBox 20"/>
+              <a:t>Step 4 重章叠句</a:t>
+            </a:r>
+          </a:p>
+        </p:txBody>
+      </p:sp>
+      <p:sp>
+        <p:nvSpPr>
+          <p:cNvPr id="21" name="Rounded Rectangle 20"/>
+          <p:cNvSpPr/>
+          <p:nvPr/>
+        </p:nvSpPr>
+        <p:spPr>
+          <a:xfrm>
+            <a:off x="640080" y="4663440"/>
+            <a:ext cx="10911535" cy="685800"/>
+          </a:xfrm>
+          <a:prstGeom prst="roundRect">
+            <a:avLst/>
+          </a:prstGeom>
+          <a:solidFill>
+            <a:srgbClr val="FFFFFF"/>
+          </a:solidFill>
+          <a:ln w="22860">
+            <a:solidFill>
+              <a:srgbClr val="2E7D6B"/>
+            </a:solidFill>
+          </a:ln>
+          <a:effectLst/>
+        </p:spPr>
+        <p:style>
+          <a:lnRef idx="1">
+            <a:schemeClr val="accent1"/>
+          </a:lnRef>
+          <a:fillRef idx="3">
+            <a:schemeClr val="accent1"/>
+          </a:fillRef>
+          <a:effectRef idx="2">
+            <a:schemeClr val="accent1"/>
+          </a:effectRef>
+          <a:fontRef idx="minor">
+            <a:schemeClr val="lt1"/>
+          </a:fontRef>
+        </p:style>
+        <p:txBody>
+          <a:bodyPr rtlCol="0" anchor="ctr"/>
+          <a:lstStyle/>
+          <a:p>
+            <a:pPr algn="ctr"/>
+          </a:p>
+        </p:txBody>
+      </p:sp>
+      <p:sp>
+        <p:nvSpPr>
+          <p:cNvPr id="22" name="Oval 21"/>
+          <p:cNvSpPr/>
+          <p:nvPr/>
+        </p:nvSpPr>
+        <p:spPr>
+          <a:xfrm>
+            <a:off x="804672" y="4828032"/>
+            <a:ext cx="457200" cy="457200"/>
+          </a:xfrm>
+          <a:prstGeom prst="ellipse">
+            <a:avLst/>
+          </a:prstGeom>
+          <a:solidFill>
+            <a:srgbClr val="2E7D6B"/>
+          </a:solidFill>
+          <a:ln>
+            <a:noFill/>
+          </a:ln>
+          <a:effectLst/>
+        </p:spPr>
+        <p:style>
+          <a:lnRef idx="1">
+            <a:schemeClr val="accent1"/>
+          </a:lnRef>
+          <a:fillRef idx="3">
+            <a:schemeClr val="accent1"/>
+          </a:fillRef>
+          <a:effectRef idx="2">
+            <a:schemeClr val="accent1"/>
+          </a:effectRef>
+          <a:fontRef idx="minor">
+            <a:schemeClr val="lt1"/>
+          </a:fontRef>
+        </p:style>
+        <p:txBody>
+          <a:bodyPr rtlCol="0" anchor="ctr"/>
+          <a:lstStyle/>
+          <a:p>
+            <a:pPr algn="ctr"/>
+          </a:p>
+        </p:txBody>
+      </p:sp>
+      <p:sp>
+        <p:nvSpPr>
+          <p:cNvPr id="23" name="TextBox 22"/>
+          <p:cNvSpPr txBox="1"/>
+          <p:nvPr/>
+        </p:nvSpPr>
+        <p:spPr>
+          <a:xfrm>
+            <a:off x="804672" y="4882896"/>
+            <a:ext cx="457200" cy="384048"/>
+          </a:xfrm>
+          <a:prstGeom prst="rect">
+            <a:avLst/>
+          </a:prstGeom>
+          <a:noFill/>
+        </p:spPr>
+        <p:txBody>
+          <a:bodyPr wrap="square" anchor="t" lIns="0" rIns="0" tIns="0" bIns="0">
+            <a:spAutoFit/>
+          </a:bodyPr>
+          <a:lstStyle/>
+          <a:p>
+            <a:pPr algn="ctr"/>
+            <a:r>
+              <a:rPr sz="1600" b="1">
+                <a:solidFill>
+                  <a:srgbClr val="FFFFFF"/>
+                </a:solidFill>
+                <a:latin typeface="微软雅黑"/>
+                <a:ea typeface="微软雅黑"/>
+                <a:cs typeface="微软雅黑"/>
+              </a:rPr>
+              <a:t>5</a:t>
+            </a:r>
+          </a:p>
+        </p:txBody>
+      </p:sp>
+      <p:sp>
+        <p:nvSpPr>
+          <p:cNvPr id="24" name="TextBox 23"/>
+          <p:cNvSpPr txBox="1"/>
+          <p:nvPr/>
+        </p:nvSpPr>
+        <p:spPr>
+          <a:xfrm>
+            <a:off x="1371600" y="4773168"/>
+            <a:ext cx="9997135" cy="484632"/>
+          </a:xfrm>
+          <a:prstGeom prst="rect">
+            <a:avLst/>
+          </a:prstGeom>
+          <a:noFill/>
+        </p:spPr>
+        <p:txBody>
+          <a:bodyPr wrap="square" anchor="t" lIns="0" rIns="0" tIns="0" bIns="0">
+            <a:spAutoFit/>
+          </a:bodyPr>
+          <a:lstStyle/>
+          <a:p>
+            <a:pPr algn="l">
+              <a:lnSpc>
+                <a:spcPct val="110000"/>
+              </a:lnSpc>
+            </a:pPr>
+            <a:r>
+              <a:rPr sz="1400" b="1">
+                <a:solidFill>
+                  <a:srgbClr val="1C2A33"/>
+                </a:solidFill>
+                <a:latin typeface="微软雅黑"/>
+                <a:ea typeface="微软雅黑"/>
+                <a:cs typeface="微软雅黑"/>
+              </a:rPr>
+              <a:t>Step 5 《文氏外孙入村收麦》</a:t>
+            </a:r>
+          </a:p>
+        </p:txBody>
+      </p:sp>
+      <p:sp>
+        <p:nvSpPr>
+          <p:cNvPr id="25" name="Rounded Rectangle 24"/>
+          <p:cNvSpPr/>
+          <p:nvPr/>
+        </p:nvSpPr>
+        <p:spPr>
+          <a:xfrm>
+            <a:off x="640080" y="5486400"/>
+            <a:ext cx="10911535" cy="685800"/>
+          </a:xfrm>
+          <a:prstGeom prst="roundRect">
+            <a:avLst/>
+          </a:prstGeom>
+          <a:solidFill>
+            <a:srgbClr val="FFFFFF"/>
+          </a:solidFill>
+          <a:ln w="22860">
+            <a:solidFill>
+              <a:srgbClr val="2E7D6B"/>
+            </a:solidFill>
+          </a:ln>
+          <a:effectLst/>
+        </p:spPr>
+        <p:style>
+          <a:lnRef idx="1">
+            <a:schemeClr val="accent1"/>
+          </a:lnRef>
+          <a:fillRef idx="3">
+            <a:schemeClr val="accent1"/>
+          </a:fillRef>
+          <a:effectRef idx="2">
+            <a:schemeClr val="accent1"/>
+          </a:effectRef>
+          <a:fontRef idx="minor">
+            <a:schemeClr val="lt1"/>
+          </a:fontRef>
+        </p:style>
+        <p:txBody>
+          <a:bodyPr rtlCol="0" anchor="ctr"/>
+          <a:lstStyle/>
+          <a:p>
+            <a:pPr algn="ctr"/>
+          </a:p>
+        </p:txBody>
+      </p:sp>
+      <p:sp>
+        <p:nvSpPr>
+          <p:cNvPr id="26" name="Oval 25"/>
+          <p:cNvSpPr/>
+          <p:nvPr/>
+        </p:nvSpPr>
+        <p:spPr>
+          <a:xfrm>
+            <a:off x="804672" y="5650992"/>
+            <a:ext cx="457200" cy="457200"/>
+          </a:xfrm>
+          <a:prstGeom prst="ellipse">
+            <a:avLst/>
+          </a:prstGeom>
+          <a:solidFill>
+            <a:srgbClr val="2E7D6B"/>
+          </a:solidFill>
+          <a:ln>
+            <a:noFill/>
+          </a:ln>
+          <a:effectLst/>
+        </p:spPr>
+        <p:style>
+          <a:lnRef idx="1">
+            <a:schemeClr val="accent1"/>
+          </a:lnRef>
+          <a:fillRef idx="3">
+            <a:schemeClr val="accent1"/>
+          </a:fillRef>
+          <a:effectRef idx="2">
+            <a:schemeClr val="accent1"/>
+          </a:effectRef>
+          <a:fontRef idx="minor">
+            <a:schemeClr val="lt1"/>
+          </a:fontRef>
+        </p:style>
+        <p:txBody>
+          <a:bodyPr rtlCol="0" anchor="ctr"/>
+          <a:lstStyle/>
+          <a:p>
+            <a:pPr algn="ctr"/>
+          </a:p>
+        </p:txBody>
+      </p:sp>
+      <p:sp>
+        <p:nvSpPr>
+          <p:cNvPr id="27" name="TextBox 26"/>
+          <p:cNvSpPr txBox="1"/>
+          <p:nvPr/>
+        </p:nvSpPr>
+        <p:spPr>
+          <a:xfrm>
+            <a:off x="804672" y="5705856"/>
+            <a:ext cx="457200" cy="384048"/>
+          </a:xfrm>
+          <a:prstGeom prst="rect">
+            <a:avLst/>
+          </a:prstGeom>
+          <a:noFill/>
+        </p:spPr>
+        <p:txBody>
+          <a:bodyPr wrap="square" anchor="t" lIns="0" rIns="0" tIns="0" bIns="0">
+            <a:spAutoFit/>
+          </a:bodyPr>
+          <a:lstStyle/>
+          <a:p>
+            <a:pPr algn="ctr"/>
+            <a:r>
+              <a:rPr sz="1600" b="1">
+                <a:solidFill>
+                  <a:srgbClr val="FFFFFF"/>
+                </a:solidFill>
+                <a:latin typeface="微软雅黑"/>
+                <a:ea typeface="微软雅黑"/>
+                <a:cs typeface="微软雅黑"/>
+              </a:rPr>
+              <a:t>6</a:t>
+            </a:r>
+          </a:p>
+        </p:txBody>
+      </p:sp>
+      <p:sp>
+        <p:nvSpPr>
+          <p:cNvPr id="28" name="TextBox 27"/>
+          <p:cNvSpPr txBox="1"/>
+          <p:nvPr/>
+        </p:nvSpPr>
+        <p:spPr>
+          <a:xfrm>
+            <a:off x="1371600" y="5596128"/>
+            <a:ext cx="9997135" cy="484632"/>
+          </a:xfrm>
+          <a:prstGeom prst="rect">
+            <a:avLst/>
+          </a:prstGeom>
+          <a:noFill/>
+        </p:spPr>
+        <p:txBody>
+          <a:bodyPr wrap="square" anchor="t" lIns="0" rIns="0" tIns="0" bIns="0">
+            <a:spAutoFit/>
+          </a:bodyPr>
+          <a:lstStyle/>
+          <a:p>
+            <a:pPr algn="l">
+              <a:lnSpc>
+                <a:spcPct val="110000"/>
+              </a:lnSpc>
+            </a:pPr>
+            <a:r>
+              <a:rPr sz="1400" b="1">
+                <a:solidFill>
+                  <a:srgbClr val="1C2A33"/>
+                </a:solidFill>
+                <a:latin typeface="微软雅黑"/>
+                <a:ea typeface="微软雅黑"/>
+                <a:cs typeface="微软雅黑"/>
+              </a:rPr>
+              <a:t>Step 6 古今对比+小结</a:t>
+            </a:r>
+          </a:p>
+        </p:txBody>
+      </p:sp>
+      <p:sp>
+        <p:nvSpPr>
+          <p:cNvPr id="29" name="TextBox 28"/>
           <p:cNvSpPr txBox="1"/>
           <p:nvPr/>
         </p:nvSpPr>
@@ -7110,7 +6589,7 @@
                 <a:ea typeface="微软雅黑"/>
                 <a:cs typeface="微软雅黑"/>
               </a:rPr>
-              <a:t>探究 · 从真实问题出发</a:t>
+              <a:t>易混易错</a:t>
             </a:r>
           </a:p>
         </p:txBody>
@@ -7161,51 +6640,14 @@
       </p:sp>
       <p:sp>
         <p:nvSpPr>
-          <p:cNvPr id="5" name="TextBox 4"/>
-          <p:cNvSpPr txBox="1"/>
-          <p:nvPr/>
-        </p:nvSpPr>
-        <p:spPr>
-          <a:xfrm>
-            <a:off x="640080" y="1280160"/>
-            <a:ext cx="10515600" cy="640080"/>
-          </a:xfrm>
-          <a:prstGeom prst="rect">
-            <a:avLst/>
-          </a:prstGeom>
-          <a:noFill/>
-        </p:spPr>
-        <p:txBody>
-          <a:bodyPr wrap="square" anchor="t" lIns="0" rIns="0" tIns="0" bIns="0">
-            <a:spAutoFit/>
-          </a:bodyPr>
-          <a:lstStyle/>
-          <a:p>
-            <a:pPr algn="l"/>
-            <a:r>
-              <a:rPr sz="2500" b="1">
-                <a:solidFill>
-                  <a:srgbClr val="1C2A33"/>
-                </a:solidFill>
-                <a:latin typeface="楷体"/>
-                <a:ea typeface="楷体"/>
-                <a:cs typeface="楷体"/>
-              </a:rPr>
-              <a:t>招牌招式：方玉润"意境还原" + 动作演示法</a:t>
-            </a:r>
-          </a:p>
-        </p:txBody>
-      </p:sp>
-      <p:sp>
-        <p:nvSpPr>
-          <p:cNvPr id="6" name="Rounded Rectangle 5"/>
+          <p:cNvPr id="5" name="Rounded Rectangle 4"/>
           <p:cNvSpPr/>
           <p:nvPr/>
         </p:nvSpPr>
         <p:spPr>
           <a:xfrm>
-            <a:off x="640080" y="2057400"/>
-            <a:ext cx="5227167" cy="4297680"/>
+            <a:off x="640080" y="1417320"/>
+            <a:ext cx="5349240" cy="2057400"/>
           </a:xfrm>
           <a:prstGeom prst="roundRect">
             <a:avLst/>
@@ -7244,62 +6686,23 @@
       </p:sp>
       <p:sp>
         <p:nvSpPr>
-          <p:cNvPr id="7" name="TextBox 6"/>
-          <p:cNvSpPr txBox="1"/>
-          <p:nvPr/>
-        </p:nvSpPr>
-        <p:spPr>
-          <a:xfrm>
-            <a:off x="914400" y="2240280"/>
-            <a:ext cx="4678527" cy="457200"/>
-          </a:xfrm>
-          <a:prstGeom prst="rect">
-            <a:avLst/>
-          </a:prstGeom>
-          <a:noFill/>
-        </p:spPr>
-        <p:txBody>
-          <a:bodyPr wrap="square" anchor="t" lIns="0" rIns="0" tIns="0" bIns="0">
-            <a:spAutoFit/>
-          </a:bodyPr>
-          <a:lstStyle/>
-          <a:p>
-            <a:pPr algn="l"/>
-            <a:r>
-              <a:rPr sz="1700" b="1">
-                <a:solidFill>
-                  <a:srgbClr val="B23A2A"/>
-                </a:solidFill>
-                <a:latin typeface="楷体"/>
-                <a:ea typeface="楷体"/>
-                <a:cs typeface="楷体"/>
-              </a:rPr>
-              <a:t>① 方玉润《诗经原始》意境还原</a:t>
-            </a:r>
-          </a:p>
-        </p:txBody>
-      </p:sp>
-      <p:sp>
-        <p:nvSpPr>
-          <p:cNvPr id="8" name="Rounded Rectangle 7"/>
+          <p:cNvPr id="6" name="Oval 5"/>
           <p:cNvSpPr/>
           <p:nvPr/>
         </p:nvSpPr>
         <p:spPr>
           <a:xfrm>
-            <a:off x="822960" y="2834640"/>
-            <a:ext cx="4861407" cy="1828800"/>
-          </a:xfrm>
-          <a:prstGeom prst="roundRect">
+            <a:off x="804672" y="1581912"/>
+            <a:ext cx="457200" cy="457200"/>
+          </a:xfrm>
+          <a:prstGeom prst="ellipse">
             <a:avLst/>
           </a:prstGeom>
           <a:solidFill>
-            <a:srgbClr val="E7DFD2"/>
+            <a:srgbClr val="B23A2A"/>
           </a:solidFill>
-          <a:ln w="12700">
-            <a:solidFill>
-              <a:srgbClr val="6B6258"/>
-            </a:solidFill>
+          <a:ln>
+            <a:noFill/>
           </a:ln>
           <a:effectLst/>
         </p:spPr>
@@ -7327,14 +6730,14 @@
       </p:sp>
       <p:sp>
         <p:nvSpPr>
-          <p:cNvPr id="9" name="TextBox 8"/>
+          <p:cNvPr id="7" name="TextBox 6"/>
           <p:cNvSpPr txBox="1"/>
           <p:nvPr/>
         </p:nvSpPr>
         <p:spPr>
           <a:xfrm>
-            <a:off x="960120" y="2971800"/>
-            <a:ext cx="4587087" cy="1645920"/>
+            <a:off x="804672" y="1636776"/>
+            <a:ext cx="457200" cy="384048"/>
           </a:xfrm>
           <a:prstGeom prst="rect">
             <a:avLst/>
@@ -7347,13 +6750,91 @@
           </a:bodyPr>
           <a:lstStyle/>
           <a:p>
+            <a:pPr algn="ctr"/>
+            <a:r>
+              <a:rPr sz="1600" b="1">
+                <a:solidFill>
+                  <a:srgbClr val="FFFFFF"/>
+                </a:solidFill>
+                <a:latin typeface="微软雅黑"/>
+                <a:ea typeface="微软雅黑"/>
+                <a:cs typeface="微软雅黑"/>
+              </a:rPr>
+              <a:t>!</a:t>
+            </a:r>
+          </a:p>
+        </p:txBody>
+      </p:sp>
+      <p:sp>
+        <p:nvSpPr>
+          <p:cNvPr id="8" name="TextBox 7"/>
+          <p:cNvSpPr txBox="1"/>
+          <p:nvPr/>
+        </p:nvSpPr>
+        <p:spPr>
+          <a:xfrm>
+            <a:off x="1371600" y="1527048"/>
+            <a:ext cx="4434840" cy="457200"/>
+          </a:xfrm>
+          <a:prstGeom prst="rect">
+            <a:avLst/>
+          </a:prstGeom>
+          <a:noFill/>
+        </p:spPr>
+        <p:txBody>
+          <a:bodyPr wrap="square" anchor="t" lIns="0" rIns="0" tIns="0" bIns="0">
+            <a:spAutoFit/>
+          </a:bodyPr>
+          <a:lstStyle/>
+          <a:p>
             <a:pPr algn="l">
               <a:lnSpc>
-                <a:spcPct val="150000"/>
+                <a:spcPct val="110000"/>
               </a:lnSpc>
             </a:pPr>
             <a:r>
-              <a:rPr sz="1400" b="0">
+              <a:rPr sz="1600" b="1">
+                <a:solidFill>
+                  <a:srgbClr val="1C2A33"/>
+                </a:solidFill>
+                <a:latin typeface="微软雅黑"/>
+                <a:ea typeface="微软雅黑"/>
+                <a:cs typeface="微软雅黑"/>
+              </a:rPr>
+              <a:t/>
+            </a:r>
+          </a:p>
+        </p:txBody>
+      </p:sp>
+      <p:sp>
+        <p:nvSpPr>
+          <p:cNvPr id="9" name="TextBox 8"/>
+          <p:cNvSpPr txBox="1"/>
+          <p:nvPr/>
+        </p:nvSpPr>
+        <p:spPr>
+          <a:xfrm>
+            <a:off x="1371600" y="1965960"/>
+            <a:ext cx="4434840" cy="1417320"/>
+          </a:xfrm>
+          <a:prstGeom prst="rect">
+            <a:avLst/>
+          </a:prstGeom>
+          <a:noFill/>
+        </p:spPr>
+        <p:txBody>
+          <a:bodyPr wrap="square" anchor="t" lIns="0" rIns="0" tIns="0" bIns="0">
+            <a:spAutoFit/>
+          </a:bodyPr>
+          <a:lstStyle/>
+          <a:p>
+            <a:pPr algn="l">
+              <a:lnSpc>
+                <a:spcPct val="128000"/>
+              </a:lnSpc>
+            </a:pPr>
+            <a:r>
+              <a:rPr sz="1200" b="0">
                 <a:solidFill>
                   <a:srgbClr val="1C2A33"/>
                 </a:solidFill>
@@ -7361,157 +6842,33 @@
                 <a:ea typeface="楷体"/>
                 <a:cs typeface="楷体"/>
               </a:rPr>
-              <a:t>"读者试平心静气涵咏此诗,
-恍听田家妇女,三三五五,
-于平原旷野、风和日丽中,
-群歌互答,
-余音袅袅,若远若近……"
-—— 清·方玉润《诗经原始》</a:t>
-            </a:r>
-          </a:p>
-        </p:txBody>
-      </p:sp>
-      <p:sp>
-        <p:nvSpPr>
-          <p:cNvPr id="10" name="TextBox 9"/>
-          <p:cNvSpPr txBox="1"/>
-          <p:nvPr/>
-        </p:nvSpPr>
-        <p:spPr>
-          <a:xfrm>
-            <a:off x="914400" y="4800600"/>
-            <a:ext cx="4678527" cy="1463040"/>
-          </a:xfrm>
-          <a:prstGeom prst="rect">
-            <a:avLst/>
-          </a:prstGeom>
-          <a:noFill/>
-        </p:spPr>
-        <p:txBody>
-          <a:bodyPr wrap="square" anchor="t" lIns="0" rIns="0" tIns="0" bIns="0">
-            <a:spAutoFit/>
-          </a:bodyPr>
-          <a:lstStyle/>
-          <a:p>
-            <a:pPr algn="l">
-              <a:lnSpc>
-                <a:spcPct val="145000"/>
-              </a:lnSpc>
-              <a:spcAft>
-                <a:spcPts val="600"/>
-              </a:spcAft>
-            </a:pPr>
-            <a:r>
-              <a:rPr sz="1350" b="0">
-                <a:solidFill>
-                  <a:srgbClr val="1C2A33"/>
-                </a:solidFill>
-                <a:latin typeface="楷体"/>
-                <a:ea typeface="楷体"/>
-                <a:cs typeface="楷体"/>
-              </a:rPr>
-              <a:t>· 用这段话让学生闭眼想象画面——不是"读一首诗"，而是"走进一个场景"</a:t>
-            </a:r>
-          </a:p>
-          <a:p>
-            <a:pPr algn="l">
-              <a:lnSpc>
-                <a:spcPct val="145000"/>
-              </a:lnSpc>
-            </a:pPr>
-            <a:r>
-              <a:rPr sz="1350" b="0">
-                <a:solidFill>
-                  <a:srgbClr val="1C2A33"/>
-                </a:solidFill>
-                <a:latin typeface="楷体"/>
-                <a:ea typeface="楷体"/>
-                <a:cs typeface="楷体"/>
-              </a:rPr>
-              <a:t>· 再联系现代：南方妇女登山采茶结伴讴歌，犹有此风</a:t>
-            </a:r>
-          </a:p>
-        </p:txBody>
-      </p:sp>
-      <p:pic>
-        <p:nvPicPr>
-          <p:cNvPr id="11" name="Picture 10" descr="ricefield.jpg"/>
-          <p:cNvPicPr>
-            <a:picLocks noChangeAspect="1"/>
-          </p:cNvPicPr>
-          <p:nvPr/>
-        </p:nvPicPr>
-        <p:blipFill>
-          <a:blip r:embed="rId2"/>
-          <a:srcRect t="2776" b="2776"/>
-          <a:stretch>
-            <a:fillRect/>
-          </a:stretch>
-        </p:blipFill>
-        <p:spPr>
-          <a:xfrm>
-            <a:off x="6324447" y="2057400"/>
-            <a:ext cx="5227167" cy="2011680"/>
-          </a:xfrm>
-          <a:prstGeom prst="rect">
-            <a:avLst/>
-          </a:prstGeom>
-        </p:spPr>
-      </p:pic>
-      <p:sp>
-        <p:nvSpPr>
-          <p:cNvPr id="12" name="TextBox 11"/>
-          <p:cNvSpPr txBox="1"/>
-          <p:nvPr/>
-        </p:nvSpPr>
-        <p:spPr>
-          <a:xfrm>
-            <a:off x="6324447" y="4160520"/>
-            <a:ext cx="5227167" cy="365760"/>
-          </a:xfrm>
-          <a:prstGeom prst="rect">
-            <a:avLst/>
-          </a:prstGeom>
-          <a:noFill/>
-        </p:spPr>
-        <p:txBody>
-          <a:bodyPr wrap="square" anchor="t" lIns="0" rIns="0" tIns="0" bIns="0">
-            <a:spAutoFit/>
-          </a:bodyPr>
-          <a:lstStyle/>
-          <a:p>
-            <a:pPr algn="ctr"/>
-            <a:r>
-              <a:rPr sz="1100" b="0">
-                <a:solidFill>
-                  <a:srgbClr val="6B6258"/>
-                </a:solidFill>
-                <a:latin typeface="微软雅黑"/>
-                <a:ea typeface="微软雅黑"/>
-                <a:cs typeface="微软雅黑"/>
-              </a:rPr>
-              <a:t>中国稻田 · 古代劳动背景（PD）</a:t>
-            </a:r>
-          </a:p>
-        </p:txBody>
-      </p:sp>
-      <p:sp>
-        <p:nvSpPr>
-          <p:cNvPr id="13" name="Rounded Rectangle 12"/>
+              <a:t>① 六动词的细微区别。原因：「掇」「捋」「袺」「襭」是古代劳动专用词，现代汉语不常用，学生需借助动作演示理解。</a:t>
+            </a:r>
+          </a:p>
+        </p:txBody>
+      </p:sp>
+      <p:sp>
+        <p:nvSpPr>
+          <p:cNvPr id="10" name="Rounded Rectangle 9"/>
           <p:cNvSpPr/>
           <p:nvPr/>
         </p:nvSpPr>
         <p:spPr>
           <a:xfrm>
-            <a:off x="6324447" y="4526280"/>
-            <a:ext cx="5227167" cy="1828800"/>
+            <a:off x="6263640" y="1417320"/>
+            <a:ext cx="5349240" cy="2057400"/>
           </a:xfrm>
           <a:prstGeom prst="roundRect">
             <a:avLst/>
           </a:prstGeom>
           <a:solidFill>
-            <a:srgbClr val="1C2A33"/>
+            <a:srgbClr val="FFFFFF"/>
           </a:solidFill>
+          <a:ln w="22860">
+            <a:solidFill>
+              <a:srgbClr val="B23A2A"/>
+            </a:solidFill>
+          </a:ln>
           <a:effectLst/>
         </p:spPr>
         <p:style>
@@ -7538,14 +6895,58 @@
       </p:sp>
       <p:sp>
         <p:nvSpPr>
-          <p:cNvPr id="14" name="TextBox 13"/>
+          <p:cNvPr id="11" name="Oval 10"/>
+          <p:cNvSpPr/>
+          <p:nvPr/>
+        </p:nvSpPr>
+        <p:spPr>
+          <a:xfrm>
+            <a:off x="6428232" y="1581912"/>
+            <a:ext cx="457200" cy="457200"/>
+          </a:xfrm>
+          <a:prstGeom prst="ellipse">
+            <a:avLst/>
+          </a:prstGeom>
+          <a:solidFill>
+            <a:srgbClr val="B23A2A"/>
+          </a:solidFill>
+          <a:ln>
+            <a:noFill/>
+          </a:ln>
+          <a:effectLst/>
+        </p:spPr>
+        <p:style>
+          <a:lnRef idx="1">
+            <a:schemeClr val="accent1"/>
+          </a:lnRef>
+          <a:fillRef idx="3">
+            <a:schemeClr val="accent1"/>
+          </a:fillRef>
+          <a:effectRef idx="2">
+            <a:schemeClr val="accent1"/>
+          </a:effectRef>
+          <a:fontRef idx="minor">
+            <a:schemeClr val="lt1"/>
+          </a:fontRef>
+        </p:style>
+        <p:txBody>
+          <a:bodyPr rtlCol="0" anchor="ctr"/>
+          <a:lstStyle/>
+          <a:p>
+            <a:pPr algn="ctr"/>
+          </a:p>
+        </p:txBody>
+      </p:sp>
+      <p:sp>
+        <p:nvSpPr>
+          <p:cNvPr id="12" name="TextBox 11"/>
           <p:cNvSpPr txBox="1"/>
           <p:nvPr/>
         </p:nvSpPr>
         <p:spPr>
           <a:xfrm>
-            <a:off x="6598767" y="4663440"/>
-            <a:ext cx="4678527" cy="1645920"/>
+            <a:off x="6428232" y="1636776"/>
+            <a:ext cx="457200" cy="384048"/>
           </a:xfrm>
           <a:prstGeom prst="rect">
             <a:avLst/>
@@ -7558,67 +6959,315 @@
           </a:bodyPr>
           <a:lstStyle/>
           <a:p>
+            <a:pPr algn="ctr"/>
+            <a:r>
+              <a:rPr sz="1600" b="1">
+                <a:solidFill>
+                  <a:srgbClr val="FFFFFF"/>
+                </a:solidFill>
+                <a:latin typeface="微软雅黑"/>
+                <a:ea typeface="微软雅黑"/>
+                <a:cs typeface="微软雅黑"/>
+              </a:rPr>
+              <a:t>!</a:t>
+            </a:r>
+          </a:p>
+        </p:txBody>
+      </p:sp>
+      <p:sp>
+        <p:nvSpPr>
+          <p:cNvPr id="13" name="TextBox 12"/>
+          <p:cNvSpPr txBox="1"/>
+          <p:nvPr/>
+        </p:nvSpPr>
+        <p:spPr>
+          <a:xfrm>
+            <a:off x="6995160" y="1527048"/>
+            <a:ext cx="4434840" cy="457200"/>
+          </a:xfrm>
+          <a:prstGeom prst="rect">
+            <a:avLst/>
+          </a:prstGeom>
+          <a:noFill/>
+        </p:spPr>
+        <p:txBody>
+          <a:bodyPr wrap="square" anchor="t" lIns="0" rIns="0" tIns="0" bIns="0">
+            <a:spAutoFit/>
+          </a:bodyPr>
+          <a:lstStyle/>
+          <a:p>
             <a:pPr algn="l">
-              <a:spcAft>
-                <a:spcPts val="500"/>
-              </a:spcAft>
+              <a:lnSpc>
+                <a:spcPct val="110000"/>
+              </a:lnSpc>
             </a:pPr>
             <a:r>
               <a:rPr sz="1600" b="1">
                 <a:solidFill>
-                  <a:srgbClr val="C8A86B"/>
+                  <a:srgbClr val="1C2A33"/>
+                </a:solidFill>
+                <a:latin typeface="微软雅黑"/>
+                <a:ea typeface="微软雅黑"/>
+                <a:cs typeface="微软雅黑"/>
+              </a:rPr>
+              <a:t/>
+            </a:r>
+          </a:p>
+        </p:txBody>
+      </p:sp>
+      <p:sp>
+        <p:nvSpPr>
+          <p:cNvPr id="14" name="TextBox 13"/>
+          <p:cNvSpPr txBox="1"/>
+          <p:nvPr/>
+        </p:nvSpPr>
+        <p:spPr>
+          <a:xfrm>
+            <a:off x="6995160" y="1965960"/>
+            <a:ext cx="4434840" cy="1417320"/>
+          </a:xfrm>
+          <a:prstGeom prst="rect">
+            <a:avLst/>
+          </a:prstGeom>
+          <a:noFill/>
+        </p:spPr>
+        <p:txBody>
+          <a:bodyPr wrap="square" anchor="t" lIns="0" rIns="0" tIns="0" bIns="0">
+            <a:spAutoFit/>
+          </a:bodyPr>
+          <a:lstStyle/>
+          <a:p>
+            <a:pPr algn="l">
+              <a:lnSpc>
+                <a:spcPct val="128000"/>
+              </a:lnSpc>
+            </a:pPr>
+            <a:r>
+              <a:rPr sz="1200" b="0">
+                <a:solidFill>
+                  <a:srgbClr val="1C2A33"/>
                 </a:solidFill>
                 <a:latin typeface="楷体"/>
                 <a:ea typeface="楷体"/>
                 <a:cs typeface="楷体"/>
               </a:rPr>
-              <a:t>② 动作演示法</a:t>
-            </a:r>
-          </a:p>
+              <a:t>② 重章叠句的「变与不变」。原因：学生只看到「三章一样」的重复，看不出动词变换推动的递进逻辑，需对比分析。</a:t>
+            </a:r>
+          </a:p>
+        </p:txBody>
+      </p:sp>
+      <p:sp>
+        <p:nvSpPr>
+          <p:cNvPr id="15" name="Rounded Rectangle 14"/>
+          <p:cNvSpPr/>
+          <p:nvPr/>
+        </p:nvSpPr>
+        <p:spPr>
+          <a:xfrm>
+            <a:off x="640080" y="3703320"/>
+            <a:ext cx="5349240" cy="2057400"/>
+          </a:xfrm>
+          <a:prstGeom prst="roundRect">
+            <a:avLst/>
+          </a:prstGeom>
+          <a:solidFill>
+            <a:srgbClr val="FFFFFF"/>
+          </a:solidFill>
+          <a:ln w="22860">
+            <a:solidFill>
+              <a:srgbClr val="B23A2A"/>
+            </a:solidFill>
+          </a:ln>
+          <a:effectLst/>
+        </p:spPr>
+        <p:style>
+          <a:lnRef idx="1">
+            <a:schemeClr val="accent1"/>
+          </a:lnRef>
+          <a:fillRef idx="3">
+            <a:schemeClr val="accent1"/>
+          </a:fillRef>
+          <a:effectRef idx="2">
+            <a:schemeClr val="accent1"/>
+          </a:effectRef>
+          <a:fontRef idx="minor">
+            <a:schemeClr val="lt1"/>
+          </a:fontRef>
+        </p:style>
+        <p:txBody>
+          <a:bodyPr rtlCol="0" anchor="ctr"/>
+          <a:lstStyle/>
+          <a:p>
+            <a:pPr algn="ctr"/>
+          </a:p>
+        </p:txBody>
+      </p:sp>
+      <p:sp>
+        <p:nvSpPr>
+          <p:cNvPr id="16" name="Oval 15"/>
+          <p:cNvSpPr/>
+          <p:nvPr/>
+        </p:nvSpPr>
+        <p:spPr>
+          <a:xfrm>
+            <a:off x="804672" y="3867912"/>
+            <a:ext cx="457200" cy="457200"/>
+          </a:xfrm>
+          <a:prstGeom prst="ellipse">
+            <a:avLst/>
+          </a:prstGeom>
+          <a:solidFill>
+            <a:srgbClr val="B23A2A"/>
+          </a:solidFill>
+          <a:ln>
+            <a:noFill/>
+          </a:ln>
+          <a:effectLst/>
+        </p:spPr>
+        <p:style>
+          <a:lnRef idx="1">
+            <a:schemeClr val="accent1"/>
+          </a:lnRef>
+          <a:fillRef idx="3">
+            <a:schemeClr val="accent1"/>
+          </a:fillRef>
+          <a:effectRef idx="2">
+            <a:schemeClr val="accent1"/>
+          </a:effectRef>
+          <a:fontRef idx="minor">
+            <a:schemeClr val="lt1"/>
+          </a:fontRef>
+        </p:style>
+        <p:txBody>
+          <a:bodyPr rtlCol="0" anchor="ctr"/>
+          <a:lstStyle/>
+          <a:p>
+            <a:pPr algn="ctr"/>
+          </a:p>
+        </p:txBody>
+      </p:sp>
+      <p:sp>
+        <p:nvSpPr>
+          <p:cNvPr id="17" name="TextBox 16"/>
+          <p:cNvSpPr txBox="1"/>
+          <p:nvPr/>
+        </p:nvSpPr>
+        <p:spPr>
+          <a:xfrm>
+            <a:off x="804672" y="3922776"/>
+            <a:ext cx="457200" cy="384048"/>
+          </a:xfrm>
+          <a:prstGeom prst="rect">
+            <a:avLst/>
+          </a:prstGeom>
+          <a:noFill/>
+        </p:spPr>
+        <p:txBody>
+          <a:bodyPr wrap="square" anchor="t" lIns="0" rIns="0" tIns="0" bIns="0">
+            <a:spAutoFit/>
+          </a:bodyPr>
+          <a:lstStyle/>
+          <a:p>
+            <a:pPr algn="ctr"/>
+            <a:r>
+              <a:rPr sz="1600" b="1">
+                <a:solidFill>
+                  <a:srgbClr val="FFFFFF"/>
+                </a:solidFill>
+                <a:latin typeface="微软雅黑"/>
+                <a:ea typeface="微软雅黑"/>
+                <a:cs typeface="微软雅黑"/>
+              </a:rPr>
+              <a:t>!</a:t>
+            </a:r>
+          </a:p>
+        </p:txBody>
+      </p:sp>
+      <p:sp>
+        <p:nvSpPr>
+          <p:cNvPr id="18" name="TextBox 17"/>
+          <p:cNvSpPr txBox="1"/>
+          <p:nvPr/>
+        </p:nvSpPr>
+        <p:spPr>
+          <a:xfrm>
+            <a:off x="1371600" y="3813048"/>
+            <a:ext cx="4434840" cy="457200"/>
+          </a:xfrm>
+          <a:prstGeom prst="rect">
+            <a:avLst/>
+          </a:prstGeom>
+          <a:noFill/>
+        </p:spPr>
+        <p:txBody>
+          <a:bodyPr wrap="square" anchor="t" lIns="0" rIns="0" tIns="0" bIns="0">
+            <a:spAutoFit/>
+          </a:bodyPr>
+          <a:lstStyle/>
           <a:p>
             <a:pPr algn="l">
               <a:lnSpc>
-                <a:spcPct val="140000"/>
+                <a:spcPct val="110000"/>
               </a:lnSpc>
-              <a:spcAft>
-                <a:spcPts val="500"/>
-              </a:spcAft>
             </a:pPr>
             <a:r>
-              <a:rPr sz="1300" b="0">
-                <a:solidFill>
-                  <a:srgbClr val="FFFFFF"/>
+              <a:rPr sz="1600" b="1">
+                <a:solidFill>
+                  <a:srgbClr val="1C2A33"/>
+                </a:solidFill>
+                <a:latin typeface="微软雅黑"/>
+                <a:ea typeface="微软雅黑"/>
+                <a:cs typeface="微软雅黑"/>
+              </a:rPr>
+              <a:t/>
+            </a:r>
+          </a:p>
+        </p:txBody>
+      </p:sp>
+      <p:sp>
+        <p:nvSpPr>
+          <p:cNvPr id="19" name="TextBox 18"/>
+          <p:cNvSpPr txBox="1"/>
+          <p:nvPr/>
+        </p:nvSpPr>
+        <p:spPr>
+          <a:xfrm>
+            <a:off x="1371600" y="4251960"/>
+            <a:ext cx="4434840" cy="1417320"/>
+          </a:xfrm>
+          <a:prstGeom prst="rect">
+            <a:avLst/>
+          </a:prstGeom>
+          <a:noFill/>
+        </p:spPr>
+        <p:txBody>
+          <a:bodyPr wrap="square" anchor="t" lIns="0" rIns="0" tIns="0" bIns="0">
+            <a:spAutoFit/>
+          </a:bodyPr>
+          <a:lstStyle/>
+          <a:p>
+            <a:pPr algn="l">
+              <a:lnSpc>
+                <a:spcPct val="128000"/>
+              </a:lnSpc>
+            </a:pPr>
+            <a:r>
+              <a:rPr sz="1200" b="0">
+                <a:solidFill>
+                  <a:srgbClr val="1C2A33"/>
                 </a:solidFill>
                 <a:latin typeface="楷体"/>
                 <a:ea typeface="楷体"/>
                 <a:cs typeface="楷体"/>
               </a:rPr>
-              <a:t>现场演示：掇（蹲拾）、捋（顺抹）、袺（提兜）、襭（扎腰塞入）</a:t>
-            </a:r>
-          </a:p>
-          <a:p>
-            <a:pPr algn="l">
-              <a:lnSpc>
-                <a:spcPct val="140000"/>
-              </a:lnSpc>
-            </a:pPr>
-            <a:r>
-              <a:rPr sz="1300" b="0">
-                <a:solidFill>
-                  <a:srgbClr val="FFFFFF"/>
-                </a:solidFill>
-                <a:latin typeface="楷体"/>
-                <a:ea typeface="楷体"/>
-                <a:cs typeface="楷体"/>
-              </a:rPr>
-              <a:t>跟做一遍 → 六动词不再是抽象字词，而是身体记忆</a:t>
-            </a:r>
-          </a:p>
-        </p:txBody>
-      </p:sp>
-      <p:sp>
-        <p:nvSpPr>
-          <p:cNvPr id="15" name="TextBox 14"/>
+              <a:t>③ 劳动的「诗意」理解。原因：学生习惯「劳动=辛苦」的思维定式，不易体会古人写劳动的欢欣，需引导换位。</a:t>
+            </a:r>
+          </a:p>
+        </p:txBody>
+      </p:sp>
+      <p:sp>
+        <p:nvSpPr>
+          <p:cNvPr id="20" name="TextBox 19"/>
           <p:cNvSpPr txBox="1"/>
           <p:nvPr/>
         </p:nvSpPr>
@@ -7745,13 +7394,13 @@
             <a:r>
               <a:rPr sz="1300" b="1">
                 <a:solidFill>
-                  <a:srgbClr val="B23A2A"/>
+                  <a:srgbClr val="C8A86B"/>
                 </a:solidFill>
                 <a:latin typeface="微软雅黑"/>
                 <a:ea typeface="微软雅黑"/>
                 <a:cs typeface="微软雅黑"/>
               </a:rPr>
-              <a:t>板书 · 古诗中的劳动</a:t>
+              <a:t>要点板书</a:t>
             </a:r>
           </a:p>
         </p:txBody>
@@ -7771,7 +7420,7 @@
             <a:avLst/>
           </a:prstGeom>
           <a:solidFill>
-            <a:srgbClr val="B23A2A"/>
+            <a:srgbClr val="C8A86B"/>
           </a:solidFill>
           <a:ln>
             <a:noFill/>
@@ -7808,15 +7457,20 @@
         </p:nvSpPr>
         <p:spPr>
           <a:xfrm>
-            <a:off x="640080" y="1737360"/>
-            <a:ext cx="10911535" cy="502920"/>
+            <a:off x="640080" y="1417320"/>
+            <a:ext cx="10911535" cy="5394960"/>
           </a:xfrm>
           <a:prstGeom prst="roundRect">
             <a:avLst/>
           </a:prstGeom>
           <a:solidFill>
-            <a:srgbClr val="1C2A33"/>
+            <a:srgbClr val="FFFFFF"/>
           </a:solidFill>
+          <a:ln w="25400">
+            <a:solidFill>
+              <a:srgbClr val="C8A86B"/>
+            </a:solidFill>
+          </a:ln>
           <a:effectLst/>
         </p:spPr>
         <p:style>
@@ -7849,8 +7503,8 @@
         </p:nvSpPr>
         <p:spPr>
           <a:xfrm>
-            <a:off x="914400" y="1810512"/>
-            <a:ext cx="2743200" cy="365760"/>
+            <a:off x="914400" y="1554480"/>
+            <a:ext cx="10362895" cy="5120640"/>
           </a:xfrm>
           <a:prstGeom prst="rect">
             <a:avLst/>
@@ -7863,17 +7517,51 @@
           </a:bodyPr>
           <a:lstStyle/>
           <a:p>
-            <a:pPr algn="l"/>
-            <a:r>
-              <a:rPr sz="1500" b="1">
-                <a:solidFill>
-                  <a:srgbClr val="FFFFFF"/>
+            <a:pPr algn="l">
+              <a:lnSpc>
+                <a:spcPct val="110000"/>
+              </a:lnSpc>
+              <a:spcAft>
+                <a:spcPts val="100"/>
+              </a:spcAft>
+            </a:pPr>
+            <a:r>
+              <a:rPr sz="1300" b="0">
+                <a:solidFill>
+                  <a:srgbClr val="1C2A33"/>
                 </a:solidFill>
                 <a:latin typeface="微软雅黑"/>
                 <a:ea typeface="微软雅黑"/>
                 <a:cs typeface="微软雅黑"/>
               </a:rPr>
-              <a:t>维度</a:t>
+              <a:t>┌── 古诗中的劳动 ──┐
+│ 芣苢:采采芣苢 │
+│ (fú yǐ) 车前草 │
+│ │
+│ 【六动词递进】 │
+│ 采→有→掇→捋→ │
+│ 袺→襭 │
+│ 开始→摘到→一片片 │
+│ →一把把→兜起→装满 │
+│ (劳动进程完整) │
+│ │
+│ 【重章叠句】 │
+│ 不变:结构(节拍) │
+│ 变:动词(推进) │
+│ =劳动的韵律 │
+│ │
+│ 苏辙:劳动+天伦 │
+│ →温情 │
+│ │
+│ 【古今对比】 │
+│ 古诗:节拍·欢欣 │
+│ 通讯:过程·精神 │
+│ 共通:劳动光荣 │
+│ │
+│ 【古诗四步法】 │
+│ 辨字义→理结构→ │
+│ 品节奏→悟情感 │
+└────────────────────┘</a:t>
             </a:r>
           </a:p>
         </p:txBody>
@@ -7881,763 +7569,6 @@
       <p:sp>
         <p:nvSpPr>
           <p:cNvPr id="7" name="TextBox 6"/>
-          <p:cNvSpPr txBox="1"/>
-          <p:nvPr/>
-        </p:nvSpPr>
-        <p:spPr>
-          <a:xfrm>
-            <a:off x="3931920" y="1810512"/>
-            <a:ext cx="8046720" cy="365760"/>
-          </a:xfrm>
-          <a:prstGeom prst="rect">
-            <a:avLst/>
-          </a:prstGeom>
-          <a:noFill/>
-        </p:spPr>
-        <p:txBody>
-          <a:bodyPr wrap="square" anchor="t" lIns="0" rIns="0" tIns="0" bIns="0">
-            <a:spAutoFit/>
-          </a:bodyPr>
-          <a:lstStyle/>
-          <a:p>
-            <a:pPr algn="l"/>
-            <a:r>
-              <a:rPr sz="1500" b="1">
-                <a:solidFill>
-                  <a:srgbClr val="C8A86B"/>
-                </a:solidFill>
-                <a:latin typeface="微软雅黑"/>
-                <a:ea typeface="微软雅黑"/>
-                <a:cs typeface="微软雅黑"/>
-              </a:rPr>
-              <a:t>内容</a:t>
-            </a:r>
-          </a:p>
-        </p:txBody>
-      </p:sp>
-      <p:sp>
-        <p:nvSpPr>
-          <p:cNvPr id="8" name="Rounded Rectangle 7"/>
-          <p:cNvSpPr/>
-          <p:nvPr/>
-        </p:nvSpPr>
-        <p:spPr>
-          <a:xfrm>
-            <a:off x="640080" y="2331720"/>
-            <a:ext cx="10911535" cy="530352"/>
-          </a:xfrm>
-          <a:prstGeom prst="roundRect">
-            <a:avLst/>
-          </a:prstGeom>
-          <a:solidFill>
-            <a:srgbClr val="FFFFFF"/>
-          </a:solidFill>
-          <a:ln w="10160">
-            <a:solidFill>
-              <a:srgbClr val="6B6258"/>
-            </a:solidFill>
-          </a:ln>
-          <a:effectLst/>
-        </p:spPr>
-        <p:style>
-          <a:lnRef idx="1">
-            <a:schemeClr val="accent1"/>
-          </a:lnRef>
-          <a:fillRef idx="3">
-            <a:schemeClr val="accent1"/>
-          </a:fillRef>
-          <a:effectRef idx="2">
-            <a:schemeClr val="accent1"/>
-          </a:effectRef>
-          <a:fontRef idx="minor">
-            <a:schemeClr val="lt1"/>
-          </a:fontRef>
-        </p:style>
-        <p:txBody>
-          <a:bodyPr rtlCol="0" anchor="ctr"/>
-          <a:lstStyle/>
-          <a:p>
-            <a:pPr algn="ctr"/>
-          </a:p>
-        </p:txBody>
-      </p:sp>
-      <p:sp>
-        <p:nvSpPr>
-          <p:cNvPr id="9" name="TextBox 8"/>
-          <p:cNvSpPr txBox="1"/>
-          <p:nvPr/>
-        </p:nvSpPr>
-        <p:spPr>
-          <a:xfrm>
-            <a:off x="914400" y="2423160"/>
-            <a:ext cx="2743200" cy="365760"/>
-          </a:xfrm>
-          <a:prstGeom prst="rect">
-            <a:avLst/>
-          </a:prstGeom>
-          <a:noFill/>
-        </p:spPr>
-        <p:txBody>
-          <a:bodyPr wrap="square" anchor="t" lIns="0" rIns="0" tIns="0" bIns="0">
-            <a:spAutoFit/>
-          </a:bodyPr>
-          <a:lstStyle/>
-          <a:p>
-            <a:pPr algn="l"/>
-            <a:r>
-              <a:rPr sz="1400" b="1">
-                <a:solidFill>
-                  <a:srgbClr val="B23A2A"/>
-                </a:solidFill>
-                <a:latin typeface="微软雅黑"/>
-                <a:ea typeface="微软雅黑"/>
-                <a:cs typeface="微软雅黑"/>
-              </a:rPr>
-              <a:t>六动词递进</a:t>
-            </a:r>
-          </a:p>
-        </p:txBody>
-      </p:sp>
-      <p:sp>
-        <p:nvSpPr>
-          <p:cNvPr id="10" name="TextBox 9"/>
-          <p:cNvSpPr txBox="1"/>
-          <p:nvPr/>
-        </p:nvSpPr>
-        <p:spPr>
-          <a:xfrm>
-            <a:off x="3931920" y="2423160"/>
-            <a:ext cx="8046720" cy="365760"/>
-          </a:xfrm>
-          <a:prstGeom prst="rect">
-            <a:avLst/>
-          </a:prstGeom>
-          <a:noFill/>
-        </p:spPr>
-        <p:txBody>
-          <a:bodyPr wrap="square" anchor="t" lIns="0" rIns="0" tIns="0" bIns="0">
-            <a:spAutoFit/>
-          </a:bodyPr>
-          <a:lstStyle/>
-          <a:p>
-            <a:pPr algn="l"/>
-            <a:r>
-              <a:rPr sz="1350" b="0">
-                <a:solidFill>
-                  <a:srgbClr val="1C2A33"/>
-                </a:solidFill>
-                <a:latin typeface="楷体"/>
-                <a:ea typeface="楷体"/>
-                <a:cs typeface="楷体"/>
-              </a:rPr>
-              <a:t>采→有→掇→捋→袺→襭 （开始→得→细→效→兜→满载）</a:t>
-            </a:r>
-          </a:p>
-        </p:txBody>
-      </p:sp>
-      <p:sp>
-        <p:nvSpPr>
-          <p:cNvPr id="11" name="Rounded Rectangle 10"/>
-          <p:cNvSpPr/>
-          <p:nvPr/>
-        </p:nvSpPr>
-        <p:spPr>
-          <a:xfrm>
-            <a:off x="640080" y="2916936"/>
-            <a:ext cx="10911535" cy="530352"/>
-          </a:xfrm>
-          <a:prstGeom prst="roundRect">
-            <a:avLst/>
-          </a:prstGeom>
-          <a:solidFill>
-            <a:srgbClr val="E7DFD2"/>
-          </a:solidFill>
-          <a:ln w="10160">
-            <a:solidFill>
-              <a:srgbClr val="6B6258"/>
-            </a:solidFill>
-          </a:ln>
-          <a:effectLst/>
-        </p:spPr>
-        <p:style>
-          <a:lnRef idx="1">
-            <a:schemeClr val="accent1"/>
-          </a:lnRef>
-          <a:fillRef idx="3">
-            <a:schemeClr val="accent1"/>
-          </a:fillRef>
-          <a:effectRef idx="2">
-            <a:schemeClr val="accent1"/>
-          </a:effectRef>
-          <a:fontRef idx="minor">
-            <a:schemeClr val="lt1"/>
-          </a:fontRef>
-        </p:style>
-        <p:txBody>
-          <a:bodyPr rtlCol="0" anchor="ctr"/>
-          <a:lstStyle/>
-          <a:p>
-            <a:pPr algn="ctr"/>
-          </a:p>
-        </p:txBody>
-      </p:sp>
-      <p:sp>
-        <p:nvSpPr>
-          <p:cNvPr id="12" name="TextBox 11"/>
-          <p:cNvSpPr txBox="1"/>
-          <p:nvPr/>
-        </p:nvSpPr>
-        <p:spPr>
-          <a:xfrm>
-            <a:off x="914400" y="3008376"/>
-            <a:ext cx="2743200" cy="365760"/>
-          </a:xfrm>
-          <a:prstGeom prst="rect">
-            <a:avLst/>
-          </a:prstGeom>
-          <a:noFill/>
-        </p:spPr>
-        <p:txBody>
-          <a:bodyPr wrap="square" anchor="t" lIns="0" rIns="0" tIns="0" bIns="0">
-            <a:spAutoFit/>
-          </a:bodyPr>
-          <a:lstStyle/>
-          <a:p>
-            <a:pPr algn="l"/>
-            <a:r>
-              <a:rPr sz="1400" b="1">
-                <a:solidFill>
-                  <a:srgbClr val="2E7D6B"/>
-                </a:solidFill>
-                <a:latin typeface="微软雅黑"/>
-                <a:ea typeface="微软雅黑"/>
-                <a:cs typeface="微软雅黑"/>
-              </a:rPr>
-              <a:t>重章叠句</a:t>
-            </a:r>
-          </a:p>
-        </p:txBody>
-      </p:sp>
-      <p:sp>
-        <p:nvSpPr>
-          <p:cNvPr id="13" name="TextBox 12"/>
-          <p:cNvSpPr txBox="1"/>
-          <p:nvPr/>
-        </p:nvSpPr>
-        <p:spPr>
-          <a:xfrm>
-            <a:off x="3931920" y="3008376"/>
-            <a:ext cx="8046720" cy="365760"/>
-          </a:xfrm>
-          <a:prstGeom prst="rect">
-            <a:avLst/>
-          </a:prstGeom>
-          <a:noFill/>
-        </p:spPr>
-        <p:txBody>
-          <a:bodyPr wrap="square" anchor="t" lIns="0" rIns="0" tIns="0" bIns="0">
-            <a:spAutoFit/>
-          </a:bodyPr>
-          <a:lstStyle/>
-          <a:p>
-            <a:pPr algn="l"/>
-            <a:r>
-              <a:rPr sz="1350" b="0">
-                <a:solidFill>
-                  <a:srgbClr val="1C2A33"/>
-                </a:solidFill>
-                <a:latin typeface="楷体"/>
-                <a:ea typeface="楷体"/>
-                <a:cs typeface="楷体"/>
-              </a:rPr>
-              <a:t>不变=结构（节拍）｜变=动词（推进）＝劳动韵律</a:t>
-            </a:r>
-          </a:p>
-        </p:txBody>
-      </p:sp>
-      <p:sp>
-        <p:nvSpPr>
-          <p:cNvPr id="14" name="Rounded Rectangle 13"/>
-          <p:cNvSpPr/>
-          <p:nvPr/>
-        </p:nvSpPr>
-        <p:spPr>
-          <a:xfrm>
-            <a:off x="640080" y="3502152"/>
-            <a:ext cx="10911535" cy="530352"/>
-          </a:xfrm>
-          <a:prstGeom prst="roundRect">
-            <a:avLst/>
-          </a:prstGeom>
-          <a:solidFill>
-            <a:srgbClr val="FFFFFF"/>
-          </a:solidFill>
-          <a:ln w="10160">
-            <a:solidFill>
-              <a:srgbClr val="6B6258"/>
-            </a:solidFill>
-          </a:ln>
-          <a:effectLst/>
-        </p:spPr>
-        <p:style>
-          <a:lnRef idx="1">
-            <a:schemeClr val="accent1"/>
-          </a:lnRef>
-          <a:fillRef idx="3">
-            <a:schemeClr val="accent1"/>
-          </a:fillRef>
-          <a:effectRef idx="2">
-            <a:schemeClr val="accent1"/>
-          </a:effectRef>
-          <a:fontRef idx="minor">
-            <a:schemeClr val="lt1"/>
-          </a:fontRef>
-        </p:style>
-        <p:txBody>
-          <a:bodyPr rtlCol="0" anchor="ctr"/>
-          <a:lstStyle/>
-          <a:p>
-            <a:pPr algn="ctr"/>
-          </a:p>
-        </p:txBody>
-      </p:sp>
-      <p:sp>
-        <p:nvSpPr>
-          <p:cNvPr id="15" name="TextBox 14"/>
-          <p:cNvSpPr txBox="1"/>
-          <p:nvPr/>
-        </p:nvSpPr>
-        <p:spPr>
-          <a:xfrm>
-            <a:off x="914400" y="3593592"/>
-            <a:ext cx="2743200" cy="365760"/>
-          </a:xfrm>
-          <a:prstGeom prst="rect">
-            <a:avLst/>
-          </a:prstGeom>
-          <a:noFill/>
-        </p:spPr>
-        <p:txBody>
-          <a:bodyPr wrap="square" anchor="t" lIns="0" rIns="0" tIns="0" bIns="0">
-            <a:spAutoFit/>
-          </a:bodyPr>
-          <a:lstStyle/>
-          <a:p>
-            <a:pPr algn="l"/>
-            <a:r>
-              <a:rPr sz="1400" b="1">
-                <a:solidFill>
-                  <a:srgbClr val="C8A86B"/>
-                </a:solidFill>
-                <a:latin typeface="微软雅黑"/>
-                <a:ea typeface="微软雅黑"/>
-                <a:cs typeface="微软雅黑"/>
-              </a:rPr>
-              <a:t>《芣苢》基调</a:t>
-            </a:r>
-          </a:p>
-        </p:txBody>
-      </p:sp>
-      <p:sp>
-        <p:nvSpPr>
-          <p:cNvPr id="16" name="TextBox 15"/>
-          <p:cNvSpPr txBox="1"/>
-          <p:nvPr/>
-        </p:nvSpPr>
-        <p:spPr>
-          <a:xfrm>
-            <a:off x="3931920" y="3593592"/>
-            <a:ext cx="8046720" cy="365760"/>
-          </a:xfrm>
-          <a:prstGeom prst="rect">
-            <a:avLst/>
-          </a:prstGeom>
-          <a:noFill/>
-        </p:spPr>
-        <p:txBody>
-          <a:bodyPr wrap="square" anchor="t" lIns="0" rIns="0" tIns="0" bIns="0">
-            <a:spAutoFit/>
-          </a:bodyPr>
-          <a:lstStyle/>
-          <a:p>
-            <a:pPr algn="l"/>
-            <a:r>
-              <a:rPr sz="1350" b="0">
-                <a:solidFill>
-                  <a:srgbClr val="1C2A33"/>
-                </a:solidFill>
-                <a:latin typeface="楷体"/>
-                <a:ea typeface="楷体"/>
-                <a:cs typeface="楷体"/>
-              </a:rPr>
-              <a:t>群体劳动的欢欣与热情——"劳动的节拍"</a:t>
-            </a:r>
-          </a:p>
-        </p:txBody>
-      </p:sp>
-      <p:sp>
-        <p:nvSpPr>
-          <p:cNvPr id="17" name="Rounded Rectangle 16"/>
-          <p:cNvSpPr/>
-          <p:nvPr/>
-        </p:nvSpPr>
-        <p:spPr>
-          <a:xfrm>
-            <a:off x="640080" y="4087368"/>
-            <a:ext cx="10911535" cy="530352"/>
-          </a:xfrm>
-          <a:prstGeom prst="roundRect">
-            <a:avLst/>
-          </a:prstGeom>
-          <a:solidFill>
-            <a:srgbClr val="E7DFD2"/>
-          </a:solidFill>
-          <a:ln w="10160">
-            <a:solidFill>
-              <a:srgbClr val="6B6258"/>
-            </a:solidFill>
-          </a:ln>
-          <a:effectLst/>
-        </p:spPr>
-        <p:style>
-          <a:lnRef idx="1">
-            <a:schemeClr val="accent1"/>
-          </a:lnRef>
-          <a:fillRef idx="3">
-            <a:schemeClr val="accent1"/>
-          </a:fillRef>
-          <a:effectRef idx="2">
-            <a:schemeClr val="accent1"/>
-          </a:effectRef>
-          <a:fontRef idx="minor">
-            <a:schemeClr val="lt1"/>
-          </a:fontRef>
-        </p:style>
-        <p:txBody>
-          <a:bodyPr rtlCol="0" anchor="ctr"/>
-          <a:lstStyle/>
-          <a:p>
-            <a:pPr algn="ctr"/>
-          </a:p>
-        </p:txBody>
-      </p:sp>
-      <p:sp>
-        <p:nvSpPr>
-          <p:cNvPr id="18" name="TextBox 17"/>
-          <p:cNvSpPr txBox="1"/>
-          <p:nvPr/>
-        </p:nvSpPr>
-        <p:spPr>
-          <a:xfrm>
-            <a:off x="914400" y="4178808"/>
-            <a:ext cx="2743200" cy="365760"/>
-          </a:xfrm>
-          <a:prstGeom prst="rect">
-            <a:avLst/>
-          </a:prstGeom>
-          <a:noFill/>
-        </p:spPr>
-        <p:txBody>
-          <a:bodyPr wrap="square" anchor="t" lIns="0" rIns="0" tIns="0" bIns="0">
-            <a:spAutoFit/>
-          </a:bodyPr>
-          <a:lstStyle/>
-          <a:p>
-            <a:pPr algn="l"/>
-            <a:r>
-              <a:rPr sz="1400" b="1">
-                <a:solidFill>
-                  <a:srgbClr val="C8A86B"/>
-                </a:solidFill>
-                <a:latin typeface="微软雅黑"/>
-                <a:ea typeface="微软雅黑"/>
-                <a:cs typeface="微软雅黑"/>
-              </a:rPr>
-              <a:t>苏辙诗基调</a:t>
-            </a:r>
-          </a:p>
-        </p:txBody>
-      </p:sp>
-      <p:sp>
-        <p:nvSpPr>
-          <p:cNvPr id="19" name="TextBox 18"/>
-          <p:cNvSpPr txBox="1"/>
-          <p:nvPr/>
-        </p:nvSpPr>
-        <p:spPr>
-          <a:xfrm>
-            <a:off x="3931920" y="4178808"/>
-            <a:ext cx="8046720" cy="365760"/>
-          </a:xfrm>
-          <a:prstGeom prst="rect">
-            <a:avLst/>
-          </a:prstGeom>
-          <a:noFill/>
-        </p:spPr>
-        <p:txBody>
-          <a:bodyPr wrap="square" anchor="t" lIns="0" rIns="0" tIns="0" bIns="0">
-            <a:spAutoFit/>
-          </a:bodyPr>
-          <a:lstStyle/>
-          <a:p>
-            <a:pPr algn="l"/>
-            <a:r>
-              <a:rPr sz="1350" b="0">
-                <a:solidFill>
-                  <a:srgbClr val="1C2A33"/>
-                </a:solidFill>
-                <a:latin typeface="楷体"/>
-                <a:ea typeface="楷体"/>
-                <a:cs typeface="楷体"/>
-              </a:rPr>
-              <a:t>个体劳动的辛劳与天伦温情交织——"劳动+人情"</a:t>
-            </a:r>
-          </a:p>
-        </p:txBody>
-      </p:sp>
-      <p:sp>
-        <p:nvSpPr>
-          <p:cNvPr id="20" name="Rounded Rectangle 19"/>
-          <p:cNvSpPr/>
-          <p:nvPr/>
-        </p:nvSpPr>
-        <p:spPr>
-          <a:xfrm>
-            <a:off x="640080" y="4672584"/>
-            <a:ext cx="10911535" cy="530352"/>
-          </a:xfrm>
-          <a:prstGeom prst="roundRect">
-            <a:avLst/>
-          </a:prstGeom>
-          <a:solidFill>
-            <a:srgbClr val="FFFFFF"/>
-          </a:solidFill>
-          <a:ln w="10160">
-            <a:solidFill>
-              <a:srgbClr val="6B6258"/>
-            </a:solidFill>
-          </a:ln>
-          <a:effectLst/>
-        </p:spPr>
-        <p:style>
-          <a:lnRef idx="1">
-            <a:schemeClr val="accent1"/>
-          </a:lnRef>
-          <a:fillRef idx="3">
-            <a:schemeClr val="accent1"/>
-          </a:fillRef>
-          <a:effectRef idx="2">
-            <a:schemeClr val="accent1"/>
-          </a:effectRef>
-          <a:fontRef idx="minor">
-            <a:schemeClr val="lt1"/>
-          </a:fontRef>
-        </p:style>
-        <p:txBody>
-          <a:bodyPr rtlCol="0" anchor="ctr"/>
-          <a:lstStyle/>
-          <a:p>
-            <a:pPr algn="ctr"/>
-          </a:p>
-        </p:txBody>
-      </p:sp>
-      <p:sp>
-        <p:nvSpPr>
-          <p:cNvPr id="21" name="TextBox 20"/>
-          <p:cNvSpPr txBox="1"/>
-          <p:nvPr/>
-        </p:nvSpPr>
-        <p:spPr>
-          <a:xfrm>
-            <a:off x="914400" y="4764024"/>
-            <a:ext cx="2743200" cy="365760"/>
-          </a:xfrm>
-          <a:prstGeom prst="rect">
-            <a:avLst/>
-          </a:prstGeom>
-          <a:noFill/>
-        </p:spPr>
-        <p:txBody>
-          <a:bodyPr wrap="square" anchor="t" lIns="0" rIns="0" tIns="0" bIns="0">
-            <a:spAutoFit/>
-          </a:bodyPr>
-          <a:lstStyle/>
-          <a:p>
-            <a:pPr algn="l"/>
-            <a:r>
-              <a:rPr sz="1400" b="1">
-                <a:solidFill>
-                  <a:srgbClr val="B23A2A"/>
-                </a:solidFill>
-                <a:latin typeface="微软雅黑"/>
-                <a:ea typeface="微软雅黑"/>
-                <a:cs typeface="微软雅黑"/>
-              </a:rPr>
-              <a:t>古今对比</a:t>
-            </a:r>
-          </a:p>
-        </p:txBody>
-      </p:sp>
-      <p:sp>
-        <p:nvSpPr>
-          <p:cNvPr id="22" name="TextBox 21"/>
-          <p:cNvSpPr txBox="1"/>
-          <p:nvPr/>
-        </p:nvSpPr>
-        <p:spPr>
-          <a:xfrm>
-            <a:off x="3931920" y="4764024"/>
-            <a:ext cx="8046720" cy="365760"/>
-          </a:xfrm>
-          <a:prstGeom prst="rect">
-            <a:avLst/>
-          </a:prstGeom>
-          <a:noFill/>
-        </p:spPr>
-        <p:txBody>
-          <a:bodyPr wrap="square" anchor="t" lIns="0" rIns="0" tIns="0" bIns="0">
-            <a:spAutoFit/>
-          </a:bodyPr>
-          <a:lstStyle/>
-          <a:p>
-            <a:pPr algn="l"/>
-            <a:r>
-              <a:rPr sz="1350" b="0">
-                <a:solidFill>
-                  <a:srgbClr val="1C2A33"/>
-                </a:solidFill>
-                <a:latin typeface="楷体"/>
-                <a:ea typeface="楷体"/>
-                <a:cs typeface="楷体"/>
-              </a:rPr>
-              <a:t>古诗：节拍·欢欣｜通讯：过程·精神｜共通：劳动光荣</a:t>
-            </a:r>
-          </a:p>
-        </p:txBody>
-      </p:sp>
-      <p:sp>
-        <p:nvSpPr>
-          <p:cNvPr id="23" name="Rounded Rectangle 22"/>
-          <p:cNvSpPr/>
-          <p:nvPr/>
-        </p:nvSpPr>
-        <p:spPr>
-          <a:xfrm>
-            <a:off x="640080" y="5257800"/>
-            <a:ext cx="10911535" cy="530352"/>
-          </a:xfrm>
-          <a:prstGeom prst="roundRect">
-            <a:avLst/>
-          </a:prstGeom>
-          <a:solidFill>
-            <a:srgbClr val="E7DFD2"/>
-          </a:solidFill>
-          <a:ln w="10160">
-            <a:solidFill>
-              <a:srgbClr val="6B6258"/>
-            </a:solidFill>
-          </a:ln>
-          <a:effectLst/>
-        </p:spPr>
-        <p:style>
-          <a:lnRef idx="1">
-            <a:schemeClr val="accent1"/>
-          </a:lnRef>
-          <a:fillRef idx="3">
-            <a:schemeClr val="accent1"/>
-          </a:fillRef>
-          <a:effectRef idx="2">
-            <a:schemeClr val="accent1"/>
-          </a:effectRef>
-          <a:fontRef idx="minor">
-            <a:schemeClr val="lt1"/>
-          </a:fontRef>
-        </p:style>
-        <p:txBody>
-          <a:bodyPr rtlCol="0" anchor="ctr"/>
-          <a:lstStyle/>
-          <a:p>
-            <a:pPr algn="ctr"/>
-          </a:p>
-        </p:txBody>
-      </p:sp>
-      <p:sp>
-        <p:nvSpPr>
-          <p:cNvPr id="24" name="TextBox 23"/>
-          <p:cNvSpPr txBox="1"/>
-          <p:nvPr/>
-        </p:nvSpPr>
-        <p:spPr>
-          <a:xfrm>
-            <a:off x="914400" y="5349240"/>
-            <a:ext cx="2743200" cy="365760"/>
-          </a:xfrm>
-          <a:prstGeom prst="rect">
-            <a:avLst/>
-          </a:prstGeom>
-          <a:noFill/>
-        </p:spPr>
-        <p:txBody>
-          <a:bodyPr wrap="square" anchor="t" lIns="0" rIns="0" tIns="0" bIns="0">
-            <a:spAutoFit/>
-          </a:bodyPr>
-          <a:lstStyle/>
-          <a:p>
-            <a:pPr algn="l"/>
-            <a:r>
-              <a:rPr sz="1400" b="1">
-                <a:solidFill>
-                  <a:srgbClr val="6B6258"/>
-                </a:solidFill>
-                <a:latin typeface="微软雅黑"/>
-                <a:ea typeface="微软雅黑"/>
-                <a:cs typeface="微软雅黑"/>
-              </a:rPr>
-              <a:t>古诗四步法</a:t>
-            </a:r>
-          </a:p>
-        </p:txBody>
-      </p:sp>
-      <p:sp>
-        <p:nvSpPr>
-          <p:cNvPr id="25" name="TextBox 24"/>
-          <p:cNvSpPr txBox="1"/>
-          <p:nvPr/>
-        </p:nvSpPr>
-        <p:spPr>
-          <a:xfrm>
-            <a:off x="3931920" y="5349240"/>
-            <a:ext cx="8046720" cy="365760"/>
-          </a:xfrm>
-          <a:prstGeom prst="rect">
-            <a:avLst/>
-          </a:prstGeom>
-          <a:noFill/>
-        </p:spPr>
-        <p:txBody>
-          <a:bodyPr wrap="square" anchor="t" lIns="0" rIns="0" tIns="0" bIns="0">
-            <a:spAutoFit/>
-          </a:bodyPr>
-          <a:lstStyle/>
-          <a:p>
-            <a:pPr algn="l"/>
-            <a:r>
-              <a:rPr sz="1350" b="0">
-                <a:solidFill>
-                  <a:srgbClr val="1C2A33"/>
-                </a:solidFill>
-                <a:latin typeface="楷体"/>
-                <a:ea typeface="楷体"/>
-                <a:cs typeface="楷体"/>
-              </a:rPr>
-              <a:t>辨字义 → 理结构 → 品节奏 → 悟情感</a:t>
-            </a:r>
-          </a:p>
-        </p:txBody>
-      </p:sp>
-      <p:sp>
-        <p:nvSpPr>
-          <p:cNvPr id="26" name="TextBox 25"/>
           <p:cNvSpPr txBox="1"/>
           <p:nvPr/>
         </p:nvSpPr>
@@ -8764,13 +7695,13 @@
             <a:r>
               <a:rPr sz="1300" b="1">
                 <a:solidFill>
-                  <a:srgbClr val="B23A2A"/>
+                  <a:srgbClr val="2E7D6B"/>
                 </a:solidFill>
                 <a:latin typeface="微软雅黑"/>
                 <a:ea typeface="微软雅黑"/>
                 <a:cs typeface="微软雅黑"/>
               </a:rPr>
-              <a:t>作业 · 分层</a:t>
+              <a:t>分层作业</a:t>
             </a:r>
           </a:p>
         </p:txBody>
@@ -8785,301 +7716,6 @@
           <a:xfrm>
             <a:off x="640080" y="1097280"/>
             <a:ext cx="822960" cy="30480"/>
-          </a:xfrm>
-          <a:prstGeom prst="rect">
-            <a:avLst/>
-          </a:prstGeom>
-          <a:solidFill>
-            <a:srgbClr val="B23A2A"/>
-          </a:solidFill>
-          <a:ln>
-            <a:noFill/>
-          </a:ln>
-          <a:effectLst/>
-        </p:spPr>
-        <p:style>
-          <a:lnRef idx="1">
-            <a:schemeClr val="accent1"/>
-          </a:lnRef>
-          <a:fillRef idx="3">
-            <a:schemeClr val="accent1"/>
-          </a:fillRef>
-          <a:effectRef idx="2">
-            <a:schemeClr val="accent1"/>
-          </a:effectRef>
-          <a:fontRef idx="minor">
-            <a:schemeClr val="lt1"/>
-          </a:fontRef>
-        </p:style>
-        <p:txBody>
-          <a:bodyPr rtlCol="0" anchor="ctr"/>
-          <a:lstStyle/>
-          <a:p>
-            <a:pPr algn="ctr"/>
-          </a:p>
-        </p:txBody>
-      </p:sp>
-      <p:sp>
-        <p:nvSpPr>
-          <p:cNvPr id="5" name="TextBox 4"/>
-          <p:cNvSpPr txBox="1"/>
-          <p:nvPr/>
-        </p:nvSpPr>
-        <p:spPr>
-          <a:xfrm>
-            <a:off x="640080" y="1325880"/>
-            <a:ext cx="10058400" cy="548640"/>
-          </a:xfrm>
-          <a:prstGeom prst="rect">
-            <a:avLst/>
-          </a:prstGeom>
-          <a:noFill/>
-        </p:spPr>
-        <p:txBody>
-          <a:bodyPr wrap="square" anchor="t" lIns="0" rIns="0" tIns="0" bIns="0">
-            <a:spAutoFit/>
-          </a:bodyPr>
-          <a:lstStyle/>
-          <a:p>
-            <a:pPr algn="l"/>
-            <a:r>
-              <a:rPr sz="2600" b="1">
-                <a:solidFill>
-                  <a:srgbClr val="1C2A33"/>
-                </a:solidFill>
-                <a:latin typeface="楷体"/>
-                <a:ea typeface="楷体"/>
-                <a:cs typeface="楷体"/>
-              </a:rPr>
-              <a:t>基础 · 提升 · 拓展</a:t>
-            </a:r>
-          </a:p>
-        </p:txBody>
-      </p:sp>
-      <p:sp>
-        <p:nvSpPr>
-          <p:cNvPr id="6" name="Rounded Rectangle 5"/>
-          <p:cNvSpPr/>
-          <p:nvPr/>
-        </p:nvSpPr>
-        <p:spPr>
-          <a:xfrm>
-            <a:off x="640080" y="2194560"/>
-            <a:ext cx="3393338" cy="3840480"/>
-          </a:xfrm>
-          <a:prstGeom prst="roundRect">
-            <a:avLst/>
-          </a:prstGeom>
-          <a:solidFill>
-            <a:srgbClr val="FFFFFF"/>
-          </a:solidFill>
-          <a:ln w="20320">
-            <a:solidFill>
-              <a:srgbClr val="B23A2A"/>
-            </a:solidFill>
-          </a:ln>
-          <a:effectLst/>
-        </p:spPr>
-        <p:style>
-          <a:lnRef idx="1">
-            <a:schemeClr val="accent1"/>
-          </a:lnRef>
-          <a:fillRef idx="3">
-            <a:schemeClr val="accent1"/>
-          </a:fillRef>
-          <a:effectRef idx="2">
-            <a:schemeClr val="accent1"/>
-          </a:effectRef>
-          <a:fontRef idx="minor">
-            <a:schemeClr val="lt1"/>
-          </a:fontRef>
-        </p:style>
-        <p:txBody>
-          <a:bodyPr rtlCol="0" anchor="ctr"/>
-          <a:lstStyle/>
-          <a:p>
-            <a:pPr algn="ctr"/>
-          </a:p>
-        </p:txBody>
-      </p:sp>
-      <p:sp>
-        <p:nvSpPr>
-          <p:cNvPr id="7" name="Rectangle 6"/>
-          <p:cNvSpPr/>
-          <p:nvPr/>
-        </p:nvSpPr>
-        <p:spPr>
-          <a:xfrm>
-            <a:off x="640080" y="2194560"/>
-            <a:ext cx="3393338" cy="548640"/>
-          </a:xfrm>
-          <a:prstGeom prst="rect">
-            <a:avLst/>
-          </a:prstGeom>
-          <a:solidFill>
-            <a:srgbClr val="B23A2A"/>
-          </a:solidFill>
-          <a:ln>
-            <a:noFill/>
-          </a:ln>
-          <a:effectLst/>
-        </p:spPr>
-        <p:style>
-          <a:lnRef idx="1">
-            <a:schemeClr val="accent1"/>
-          </a:lnRef>
-          <a:fillRef idx="3">
-            <a:schemeClr val="accent1"/>
-          </a:fillRef>
-          <a:effectRef idx="2">
-            <a:schemeClr val="accent1"/>
-          </a:effectRef>
-          <a:fontRef idx="minor">
-            <a:schemeClr val="lt1"/>
-          </a:fontRef>
-        </p:style>
-        <p:txBody>
-          <a:bodyPr rtlCol="0" anchor="ctr"/>
-          <a:lstStyle/>
-          <a:p>
-            <a:pPr algn="ctr"/>
-          </a:p>
-        </p:txBody>
-      </p:sp>
-      <p:sp>
-        <p:nvSpPr>
-          <p:cNvPr id="8" name="TextBox 7"/>
-          <p:cNvSpPr txBox="1"/>
-          <p:nvPr/>
-        </p:nvSpPr>
-        <p:spPr>
-          <a:xfrm>
-            <a:off x="640080" y="2304288"/>
-            <a:ext cx="3393338" cy="365760"/>
-          </a:xfrm>
-          <a:prstGeom prst="rect">
-            <a:avLst/>
-          </a:prstGeom>
-          <a:noFill/>
-        </p:spPr>
-        <p:txBody>
-          <a:bodyPr wrap="square" anchor="t" lIns="0" rIns="0" tIns="0" bIns="0">
-            <a:spAutoFit/>
-          </a:bodyPr>
-          <a:lstStyle/>
-          <a:p>
-            <a:pPr algn="ctr"/>
-            <a:r>
-              <a:rPr sz="1600" b="1">
-                <a:solidFill>
-                  <a:srgbClr val="FFFFFF"/>
-                </a:solidFill>
-                <a:latin typeface="微软雅黑"/>
-                <a:ea typeface="微软雅黑"/>
-                <a:cs typeface="微软雅黑"/>
-              </a:rPr>
-              <a:t>基础 · 必做</a:t>
-            </a:r>
-          </a:p>
-        </p:txBody>
-      </p:sp>
-      <p:sp>
-        <p:nvSpPr>
-          <p:cNvPr id="9" name="TextBox 8"/>
-          <p:cNvSpPr txBox="1"/>
-          <p:nvPr/>
-        </p:nvSpPr>
-        <p:spPr>
-          <a:xfrm>
-            <a:off x="914400" y="2971800"/>
-            <a:ext cx="2844698" cy="2926080"/>
-          </a:xfrm>
-          <a:prstGeom prst="rect">
-            <a:avLst/>
-          </a:prstGeom>
-          <a:noFill/>
-        </p:spPr>
-        <p:txBody>
-          <a:bodyPr wrap="square" anchor="t" lIns="0" rIns="0" tIns="0" bIns="0">
-            <a:spAutoFit/>
-          </a:bodyPr>
-          <a:lstStyle/>
-          <a:p>
-            <a:pPr algn="l">
-              <a:lnSpc>
-                <a:spcPct val="160000"/>
-              </a:lnSpc>
-            </a:pPr>
-            <a:r>
-              <a:rPr sz="1450" b="0">
-                <a:solidFill>
-                  <a:srgbClr val="1C2A33"/>
-                </a:solidFill>
-                <a:latin typeface="楷体"/>
-                <a:ea typeface="楷体"/>
-                <a:cs typeface="楷体"/>
-              </a:rPr>
-              <a:t>① 背诵《芣苢》全诗；② 准确默写六个动词（采·有·掇·捋·袺·襭）；③ 各用一句话描述每个动词的动作。</a:t>
-            </a:r>
-          </a:p>
-        </p:txBody>
-      </p:sp>
-      <p:sp>
-        <p:nvSpPr>
-          <p:cNvPr id="10" name="Rounded Rectangle 9"/>
-          <p:cNvSpPr/>
-          <p:nvPr/>
-        </p:nvSpPr>
-        <p:spPr>
-          <a:xfrm>
-            <a:off x="4399178" y="2194560"/>
-            <a:ext cx="3393338" cy="3840480"/>
-          </a:xfrm>
-          <a:prstGeom prst="roundRect">
-            <a:avLst/>
-          </a:prstGeom>
-          <a:solidFill>
-            <a:srgbClr val="FFFFFF"/>
-          </a:solidFill>
-          <a:ln w="20320">
-            <a:solidFill>
-              <a:srgbClr val="2E7D6B"/>
-            </a:solidFill>
-          </a:ln>
-          <a:effectLst/>
-        </p:spPr>
-        <p:style>
-          <a:lnRef idx="1">
-            <a:schemeClr val="accent1"/>
-          </a:lnRef>
-          <a:fillRef idx="3">
-            <a:schemeClr val="accent1"/>
-          </a:fillRef>
-          <a:effectRef idx="2">
-            <a:schemeClr val="accent1"/>
-          </a:effectRef>
-          <a:fontRef idx="minor">
-            <a:schemeClr val="lt1"/>
-          </a:fontRef>
-        </p:style>
-        <p:txBody>
-          <a:bodyPr rtlCol="0" anchor="ctr"/>
-          <a:lstStyle/>
-          <a:p>
-            <a:pPr algn="ctr"/>
-          </a:p>
-        </p:txBody>
-      </p:sp>
-      <p:sp>
-        <p:nvSpPr>
-          <p:cNvPr id="11" name="Rectangle 10"/>
-          <p:cNvSpPr/>
-          <p:nvPr/>
-        </p:nvSpPr>
-        <p:spPr>
-          <a:xfrm>
-            <a:off x="4399178" y="2194560"/>
-            <a:ext cx="3393338" cy="548640"/>
           </a:xfrm>
           <a:prstGeom prst="rect">
             <a:avLst/>
@@ -9116,92 +7752,14 @@
       </p:sp>
       <p:sp>
         <p:nvSpPr>
-          <p:cNvPr id="12" name="TextBox 11"/>
-          <p:cNvSpPr txBox="1"/>
-          <p:nvPr/>
-        </p:nvSpPr>
-        <p:spPr>
-          <a:xfrm>
-            <a:off x="4399178" y="2304288"/>
-            <a:ext cx="3393338" cy="365760"/>
-          </a:xfrm>
-          <a:prstGeom prst="rect">
-            <a:avLst/>
-          </a:prstGeom>
-          <a:noFill/>
-        </p:spPr>
-        <p:txBody>
-          <a:bodyPr wrap="square" anchor="t" lIns="0" rIns="0" tIns="0" bIns="0">
-            <a:spAutoFit/>
-          </a:bodyPr>
-          <a:lstStyle/>
-          <a:p>
-            <a:pPr algn="ctr"/>
-            <a:r>
-              <a:rPr sz="1600" b="1">
-                <a:solidFill>
-                  <a:srgbClr val="FFFFFF"/>
-                </a:solidFill>
-                <a:latin typeface="微软雅黑"/>
-                <a:ea typeface="微软雅黑"/>
-                <a:cs typeface="微软雅黑"/>
-              </a:rPr>
-              <a:t>提升 · 选做</a:t>
-            </a:r>
-          </a:p>
-        </p:txBody>
-      </p:sp>
-      <p:sp>
-        <p:nvSpPr>
-          <p:cNvPr id="13" name="TextBox 12"/>
-          <p:cNvSpPr txBox="1"/>
-          <p:nvPr/>
-        </p:nvSpPr>
-        <p:spPr>
-          <a:xfrm>
-            <a:off x="4673498" y="2971800"/>
-            <a:ext cx="2844698" cy="2926080"/>
-          </a:xfrm>
-          <a:prstGeom prst="rect">
-            <a:avLst/>
-          </a:prstGeom>
-          <a:noFill/>
-        </p:spPr>
-        <p:txBody>
-          <a:bodyPr wrap="square" anchor="t" lIns="0" rIns="0" tIns="0" bIns="0">
-            <a:spAutoFit/>
-          </a:bodyPr>
-          <a:lstStyle/>
-          <a:p>
-            <a:pPr algn="l">
-              <a:lnSpc>
-                <a:spcPct val="160000"/>
-              </a:lnSpc>
-            </a:pPr>
-            <a:r>
-              <a:rPr sz="1450" b="0">
-                <a:solidFill>
-                  <a:srgbClr val="1C2A33"/>
-                </a:solidFill>
-                <a:latin typeface="楷体"/>
-                <a:ea typeface="楷体"/>
-                <a:cs typeface="楷体"/>
-              </a:rPr>
-              <a:t>写150字赏析《从六个动词看〈芣苢〉的劳动节拍》：按序解释六动词，分析递进逻辑，点明重章叠句效果。</a:t>
-            </a:r>
-          </a:p>
-        </p:txBody>
-      </p:sp>
-      <p:sp>
-        <p:nvSpPr>
-          <p:cNvPr id="14" name="Rounded Rectangle 13"/>
+          <p:cNvPr id="5" name="Rounded Rectangle 4"/>
           <p:cNvSpPr/>
           <p:nvPr/>
         </p:nvSpPr>
         <p:spPr>
           <a:xfrm>
-            <a:off x="8158276" y="2194560"/>
-            <a:ext cx="3393338" cy="3840480"/>
+            <a:off x="640080" y="1417320"/>
+            <a:ext cx="10911535" cy="1417320"/>
           </a:xfrm>
           <a:prstGeom prst="roundRect">
             <a:avLst/>
@@ -9209,9 +7767,9 @@
           <a:solidFill>
             <a:srgbClr val="FFFFFF"/>
           </a:solidFill>
-          <a:ln w="20320">
+          <a:ln w="22860">
             <a:solidFill>
-              <a:srgbClr val="C8A86B"/>
+              <a:srgbClr val="2E7D6B"/>
             </a:solidFill>
           </a:ln>
           <a:effectLst/>
@@ -9240,23 +7798,107 @@
       </p:sp>
       <p:sp>
         <p:nvSpPr>
-          <p:cNvPr id="15" name="Rectangle 14"/>
+          <p:cNvPr id="6" name="TextBox 5"/>
+          <p:cNvSpPr txBox="1"/>
+          <p:nvPr/>
+        </p:nvSpPr>
+        <p:spPr>
+          <a:xfrm>
+            <a:off x="1371600" y="1527048"/>
+            <a:ext cx="9997135" cy="457200"/>
+          </a:xfrm>
+          <a:prstGeom prst="rect">
+            <a:avLst/>
+          </a:prstGeom>
+          <a:noFill/>
+        </p:spPr>
+        <p:txBody>
+          <a:bodyPr wrap="square" anchor="t" lIns="0" rIns="0" tIns="0" bIns="0">
+            <a:spAutoFit/>
+          </a:bodyPr>
+          <a:lstStyle/>
+          <a:p>
+            <a:pPr algn="l">
+              <a:lnSpc>
+                <a:spcPct val="110000"/>
+              </a:lnSpc>
+            </a:pPr>
+            <a:r>
+              <a:rPr sz="1600" b="1">
+                <a:solidFill>
+                  <a:srgbClr val="1C2A33"/>
+                </a:solidFill>
+                <a:latin typeface="微软雅黑"/>
+                <a:ea typeface="微软雅黑"/>
+                <a:cs typeface="微软雅黑"/>
+              </a:rPr>
+              <a:t/>
+            </a:r>
+          </a:p>
+        </p:txBody>
+      </p:sp>
+      <p:sp>
+        <p:nvSpPr>
+          <p:cNvPr id="7" name="TextBox 6"/>
+          <p:cNvSpPr txBox="1"/>
+          <p:nvPr/>
+        </p:nvSpPr>
+        <p:spPr>
+          <a:xfrm>
+            <a:off x="1371600" y="1965960"/>
+            <a:ext cx="9997135" cy="777240"/>
+          </a:xfrm>
+          <a:prstGeom prst="rect">
+            <a:avLst/>
+          </a:prstGeom>
+          <a:noFill/>
+        </p:spPr>
+        <p:txBody>
+          <a:bodyPr wrap="square" anchor="t" lIns="0" rIns="0" tIns="0" bIns="0">
+            <a:spAutoFit/>
+          </a:bodyPr>
+          <a:lstStyle/>
+          <a:p>
+            <a:pPr algn="l">
+              <a:lnSpc>
+                <a:spcPct val="128000"/>
+              </a:lnSpc>
+            </a:pPr>
+            <a:r>
+              <a:rPr sz="1100" b="0">
+                <a:solidFill>
+                  <a:srgbClr val="1C2A33"/>
+                </a:solidFill>
+                <a:latin typeface="楷体"/>
+                <a:ea typeface="楷体"/>
+                <a:cs typeface="楷体"/>
+              </a:rPr>
+              <a:t>【基础作业】1. 背诵《芣苢》全诗，准确默写六动词（采·有·掇·捋·袺·襭）。2. 解释六动词的含义，各用一句话描述其动作。</a:t>
+            </a:r>
+          </a:p>
+        </p:txBody>
+      </p:sp>
+      <p:sp>
+        <p:nvSpPr>
+          <p:cNvPr id="8" name="Rounded Rectangle 7"/>
           <p:cNvSpPr/>
           <p:nvPr/>
         </p:nvSpPr>
         <p:spPr>
           <a:xfrm>
-            <a:off x="8158276" y="2194560"/>
-            <a:ext cx="3393338" cy="548640"/>
-          </a:xfrm>
-          <a:prstGeom prst="rect">
+            <a:off x="640080" y="2971800"/>
+            <a:ext cx="10911535" cy="1417320"/>
+          </a:xfrm>
+          <a:prstGeom prst="roundRect">
             <a:avLst/>
           </a:prstGeom>
           <a:solidFill>
-            <a:srgbClr val="C8A86B"/>
+            <a:srgbClr val="FFFFFF"/>
           </a:solidFill>
-          <a:ln>
-            <a:noFill/>
+          <a:ln w="22860">
+            <a:solidFill>
+              <a:srgbClr val="2E7D6B"/>
+            </a:solidFill>
           </a:ln>
           <a:effectLst/>
         </p:spPr>
@@ -9284,14 +7926,14 @@
       </p:sp>
       <p:sp>
         <p:nvSpPr>
-          <p:cNvPr id="16" name="TextBox 15"/>
+          <p:cNvPr id="9" name="TextBox 8"/>
           <p:cNvSpPr txBox="1"/>
           <p:nvPr/>
         </p:nvSpPr>
         <p:spPr>
           <a:xfrm>
-            <a:off x="8158276" y="2304288"/>
-            <a:ext cx="3393338" cy="365760"/>
+            <a:off x="1371600" y="3081528"/>
+            <a:ext cx="9997135" cy="457200"/>
           </a:xfrm>
           <a:prstGeom prst="rect">
             <a:avLst/>
@@ -9304,31 +7946,35 @@
           </a:bodyPr>
           <a:lstStyle/>
           <a:p>
-            <a:pPr algn="ctr"/>
+            <a:pPr algn="l">
+              <a:lnSpc>
+                <a:spcPct val="110000"/>
+              </a:lnSpc>
+            </a:pPr>
             <a:r>
               <a:rPr sz="1600" b="1">
                 <a:solidFill>
-                  <a:srgbClr val="FFFFFF"/>
+                  <a:srgbClr val="1C2A33"/>
                 </a:solidFill>
                 <a:latin typeface="微软雅黑"/>
                 <a:ea typeface="微软雅黑"/>
                 <a:cs typeface="微软雅黑"/>
               </a:rPr>
-              <a:t>拓展 · 实践</a:t>
-            </a:r>
-          </a:p>
-        </p:txBody>
-      </p:sp>
-      <p:sp>
-        <p:nvSpPr>
-          <p:cNvPr id="17" name="TextBox 16"/>
+              <a:t/>
+            </a:r>
+          </a:p>
+        </p:txBody>
+      </p:sp>
+      <p:sp>
+        <p:nvSpPr>
+          <p:cNvPr id="10" name="TextBox 9"/>
           <p:cNvSpPr txBox="1"/>
           <p:nvPr/>
         </p:nvSpPr>
         <p:spPr>
           <a:xfrm>
-            <a:off x="8432596" y="2971800"/>
-            <a:ext cx="2844698" cy="2926080"/>
+            <a:off x="1371600" y="3520440"/>
+            <a:ext cx="9997135" cy="777240"/>
           </a:xfrm>
           <a:prstGeom prst="rect">
             <a:avLst/>
@@ -9343,11 +7989,11 @@
           <a:p>
             <a:pPr algn="l">
               <a:lnSpc>
-                <a:spcPct val="160000"/>
+                <a:spcPct val="128000"/>
               </a:lnSpc>
             </a:pPr>
             <a:r>
-              <a:rPr sz="1450" b="0">
+              <a:rPr sz="1100" b="0">
                 <a:solidFill>
                   <a:srgbClr val="1C2A33"/>
                 </a:solidFill>
@@ -9355,14 +8001,14 @@
                 <a:ea typeface="楷体"/>
                 <a:cs typeface="楷体"/>
               </a:rPr>
-              <a:t>比较古今写劳动：《芣苢》vs 袁隆平通讯 vs 张秉贵通讯——形式不同但精神相通，各举一例。</a:t>
-            </a:r>
-          </a:p>
-        </p:txBody>
-      </p:sp>
-      <p:sp>
-        <p:nvSpPr>
-          <p:cNvPr id="18" name="TextBox 17"/>
+              <a:t>【提高作业】写一段150字赏析，主题为「从六个动词看《芣苢》的劳动节拍」。要求：①按顺序解释六动词；②分析动词变换的递进逻辑；③点明重章叠句的表达效果。</a:t>
+            </a:r>
+          </a:p>
+        </p:txBody>
+      </p:sp>
+      <p:sp>
+        <p:nvSpPr>
+          <p:cNvPr id="11" name="TextBox 10"/>
           <p:cNvSpPr txBox="1"/>
           <p:nvPr/>
         </p:nvSpPr>
@@ -9489,13 +8135,13 @@
             <a:r>
               <a:rPr sz="1300" b="1">
                 <a:solidFill>
-                  <a:srgbClr val="B23A2A"/>
+                  <a:srgbClr val="C8A86B"/>
                 </a:solidFill>
                 <a:latin typeface="微软雅黑"/>
                 <a:ea typeface="微软雅黑"/>
                 <a:cs typeface="微软雅黑"/>
               </a:rPr>
-              <a:t>总结 · 读古诗的四步</a:t>
+              <a:t>本课小结</a:t>
             </a:r>
           </a:p>
         </p:txBody>
@@ -9510,500 +8156,6 @@
           <a:xfrm>
             <a:off x="640080" y="1097280"/>
             <a:ext cx="822960" cy="30480"/>
-          </a:xfrm>
-          <a:prstGeom prst="rect">
-            <a:avLst/>
-          </a:prstGeom>
-          <a:solidFill>
-            <a:srgbClr val="B23A2A"/>
-          </a:solidFill>
-          <a:ln>
-            <a:noFill/>
-          </a:ln>
-          <a:effectLst/>
-        </p:spPr>
-        <p:style>
-          <a:lnRef idx="1">
-            <a:schemeClr val="accent1"/>
-          </a:lnRef>
-          <a:fillRef idx="3">
-            <a:schemeClr val="accent1"/>
-          </a:fillRef>
-          <a:effectRef idx="2">
-            <a:schemeClr val="accent1"/>
-          </a:effectRef>
-          <a:fontRef idx="minor">
-            <a:schemeClr val="lt1"/>
-          </a:fontRef>
-        </p:style>
-        <p:txBody>
-          <a:bodyPr rtlCol="0" anchor="ctr"/>
-          <a:lstStyle/>
-          <a:p>
-            <a:pPr algn="ctr"/>
-          </a:p>
-        </p:txBody>
-      </p:sp>
-      <p:sp>
-        <p:nvSpPr>
-          <p:cNvPr id="5" name="TextBox 4"/>
-          <p:cNvSpPr txBox="1"/>
-          <p:nvPr/>
-        </p:nvSpPr>
-        <p:spPr>
-          <a:xfrm>
-            <a:off x="640080" y="1325880"/>
-            <a:ext cx="10515600" cy="640080"/>
-          </a:xfrm>
-          <a:prstGeom prst="rect">
-            <a:avLst/>
-          </a:prstGeom>
-          <a:noFill/>
-        </p:spPr>
-        <p:txBody>
-          <a:bodyPr wrap="square" anchor="t" lIns="0" rIns="0" tIns="0" bIns="0">
-            <a:spAutoFit/>
-          </a:bodyPr>
-          <a:lstStyle/>
-          <a:p>
-            <a:pPr algn="l"/>
-            <a:r>
-              <a:rPr sz="3000" b="1">
-                <a:solidFill>
-                  <a:srgbClr val="1C2A33"/>
-                </a:solidFill>
-                <a:latin typeface="楷体"/>
-                <a:ea typeface="楷体"/>
-                <a:cs typeface="楷体"/>
-              </a:rPr>
-              <a:t>辨字义 → 理结构 → 品节奏 → 悟情感</a:t>
-            </a:r>
-          </a:p>
-        </p:txBody>
-      </p:sp>
-      <p:sp>
-        <p:nvSpPr>
-          <p:cNvPr id="6" name="Rounded Rectangle 5"/>
-          <p:cNvSpPr/>
-          <p:nvPr/>
-        </p:nvSpPr>
-        <p:spPr>
-          <a:xfrm>
-            <a:off x="640080" y="2286000"/>
-            <a:ext cx="3393338" cy="2103120"/>
-          </a:xfrm>
-          <a:prstGeom prst="roundRect">
-            <a:avLst/>
-          </a:prstGeom>
-          <a:solidFill>
-            <a:srgbClr val="FFFFFF"/>
-          </a:solidFill>
-          <a:ln w="22860">
-            <a:solidFill>
-              <a:srgbClr val="B23A2A"/>
-            </a:solidFill>
-          </a:ln>
-          <a:effectLst/>
-        </p:spPr>
-        <p:style>
-          <a:lnRef idx="1">
-            <a:schemeClr val="accent1"/>
-          </a:lnRef>
-          <a:fillRef idx="3">
-            <a:schemeClr val="accent1"/>
-          </a:fillRef>
-          <a:effectRef idx="2">
-            <a:schemeClr val="accent1"/>
-          </a:effectRef>
-          <a:fontRef idx="minor">
-            <a:schemeClr val="lt1"/>
-          </a:fontRef>
-        </p:style>
-        <p:txBody>
-          <a:bodyPr rtlCol="0" anchor="ctr"/>
-          <a:lstStyle/>
-          <a:p>
-            <a:pPr algn="ctr"/>
-          </a:p>
-        </p:txBody>
-      </p:sp>
-      <p:sp>
-        <p:nvSpPr>
-          <p:cNvPr id="7" name="TextBox 6"/>
-          <p:cNvSpPr txBox="1"/>
-          <p:nvPr/>
-        </p:nvSpPr>
-        <p:spPr>
-          <a:xfrm>
-            <a:off x="868680" y="2514600"/>
-            <a:ext cx="2936138" cy="548640"/>
-          </a:xfrm>
-          <a:prstGeom prst="rect">
-            <a:avLst/>
-          </a:prstGeom>
-          <a:noFill/>
-        </p:spPr>
-        <p:txBody>
-          <a:bodyPr wrap="square" anchor="t" lIns="0" rIns="0" tIns="0" bIns="0">
-            <a:spAutoFit/>
-          </a:bodyPr>
-          <a:lstStyle/>
-          <a:p>
-            <a:pPr algn="ctr"/>
-            <a:r>
-              <a:rPr sz="2100" b="1">
-                <a:solidFill>
-                  <a:srgbClr val="B23A2A"/>
-                </a:solidFill>
-                <a:latin typeface="楷体"/>
-                <a:ea typeface="楷体"/>
-                <a:cs typeface="楷体"/>
-              </a:rPr>
-              <a:t>辨字义</a:t>
-            </a:r>
-          </a:p>
-        </p:txBody>
-      </p:sp>
-      <p:sp>
-        <p:nvSpPr>
-          <p:cNvPr id="8" name="TextBox 7"/>
-          <p:cNvSpPr txBox="1"/>
-          <p:nvPr/>
-        </p:nvSpPr>
-        <p:spPr>
-          <a:xfrm>
-            <a:off x="914400" y="3154680"/>
-            <a:ext cx="2844698" cy="1097280"/>
-          </a:xfrm>
-          <a:prstGeom prst="rect">
-            <a:avLst/>
-          </a:prstGeom>
-          <a:noFill/>
-        </p:spPr>
-        <p:txBody>
-          <a:bodyPr wrap="square" anchor="t" lIns="0" rIns="0" tIns="0" bIns="0">
-            <a:spAutoFit/>
-          </a:bodyPr>
-          <a:lstStyle/>
-          <a:p>
-            <a:pPr algn="ctr">
-              <a:lnSpc>
-                <a:spcPct val="150000"/>
-              </a:lnSpc>
-            </a:pPr>
-            <a:r>
-              <a:rPr sz="1350" b="0">
-                <a:solidFill>
-                  <a:srgbClr val="1C2A33"/>
-                </a:solidFill>
-                <a:latin typeface="楷体"/>
-                <a:ea typeface="楷体"/>
-                <a:cs typeface="楷体"/>
-              </a:rPr>
-              <a:t>六动词各有其动作——掇≠捋，袺≠襭，动作演示帮记忆。</a:t>
-            </a:r>
-          </a:p>
-        </p:txBody>
-      </p:sp>
-      <p:sp>
-        <p:nvSpPr>
-          <p:cNvPr id="9" name="Rounded Rectangle 8"/>
-          <p:cNvSpPr/>
-          <p:nvPr/>
-        </p:nvSpPr>
-        <p:spPr>
-          <a:xfrm>
-            <a:off x="4399178" y="2286000"/>
-            <a:ext cx="3393338" cy="2103120"/>
-          </a:xfrm>
-          <a:prstGeom prst="roundRect">
-            <a:avLst/>
-          </a:prstGeom>
-          <a:solidFill>
-            <a:srgbClr val="FFFFFF"/>
-          </a:solidFill>
-          <a:ln w="22860">
-            <a:solidFill>
-              <a:srgbClr val="2E7D6B"/>
-            </a:solidFill>
-          </a:ln>
-          <a:effectLst/>
-        </p:spPr>
-        <p:style>
-          <a:lnRef idx="1">
-            <a:schemeClr val="accent1"/>
-          </a:lnRef>
-          <a:fillRef idx="3">
-            <a:schemeClr val="accent1"/>
-          </a:fillRef>
-          <a:effectRef idx="2">
-            <a:schemeClr val="accent1"/>
-          </a:effectRef>
-          <a:fontRef idx="minor">
-            <a:schemeClr val="lt1"/>
-          </a:fontRef>
-        </p:style>
-        <p:txBody>
-          <a:bodyPr rtlCol="0" anchor="ctr"/>
-          <a:lstStyle/>
-          <a:p>
-            <a:pPr algn="ctr"/>
-          </a:p>
-        </p:txBody>
-      </p:sp>
-      <p:sp>
-        <p:nvSpPr>
-          <p:cNvPr id="10" name="TextBox 9"/>
-          <p:cNvSpPr txBox="1"/>
-          <p:nvPr/>
-        </p:nvSpPr>
-        <p:spPr>
-          <a:xfrm>
-            <a:off x="4627778" y="2514600"/>
-            <a:ext cx="2936138" cy="548640"/>
-          </a:xfrm>
-          <a:prstGeom prst="rect">
-            <a:avLst/>
-          </a:prstGeom>
-          <a:noFill/>
-        </p:spPr>
-        <p:txBody>
-          <a:bodyPr wrap="square" anchor="t" lIns="0" rIns="0" tIns="0" bIns="0">
-            <a:spAutoFit/>
-          </a:bodyPr>
-          <a:lstStyle/>
-          <a:p>
-            <a:pPr algn="ctr"/>
-            <a:r>
-              <a:rPr sz="2100" b="1">
-                <a:solidFill>
-                  <a:srgbClr val="2E7D6B"/>
-                </a:solidFill>
-                <a:latin typeface="楷体"/>
-                <a:ea typeface="楷体"/>
-                <a:cs typeface="楷体"/>
-              </a:rPr>
-              <a:t>理结构</a:t>
-            </a:r>
-          </a:p>
-        </p:txBody>
-      </p:sp>
-      <p:sp>
-        <p:nvSpPr>
-          <p:cNvPr id="11" name="TextBox 10"/>
-          <p:cNvSpPr txBox="1"/>
-          <p:nvPr/>
-        </p:nvSpPr>
-        <p:spPr>
-          <a:xfrm>
-            <a:off x="4673498" y="3154680"/>
-            <a:ext cx="2844698" cy="1097280"/>
-          </a:xfrm>
-          <a:prstGeom prst="rect">
-            <a:avLst/>
-          </a:prstGeom>
-          <a:noFill/>
-        </p:spPr>
-        <p:txBody>
-          <a:bodyPr wrap="square" anchor="t" lIns="0" rIns="0" tIns="0" bIns="0">
-            <a:spAutoFit/>
-          </a:bodyPr>
-          <a:lstStyle/>
-          <a:p>
-            <a:pPr algn="ctr">
-              <a:lnSpc>
-                <a:spcPct val="150000"/>
-              </a:lnSpc>
-            </a:pPr>
-            <a:r>
-              <a:rPr sz="1350" b="0">
-                <a:solidFill>
-                  <a:srgbClr val="1C2A33"/>
-                </a:solidFill>
-                <a:latin typeface="楷体"/>
-                <a:ea typeface="楷体"/>
-                <a:cs typeface="楷体"/>
-              </a:rPr>
-              <a:t>重章叠句：不变是节拍，变是推进——《诗经》的艺术智慧。</a:t>
-            </a:r>
-          </a:p>
-        </p:txBody>
-      </p:sp>
-      <p:sp>
-        <p:nvSpPr>
-          <p:cNvPr id="12" name="Rounded Rectangle 11"/>
-          <p:cNvSpPr/>
-          <p:nvPr/>
-        </p:nvSpPr>
-        <p:spPr>
-          <a:xfrm>
-            <a:off x="8158276" y="2286000"/>
-            <a:ext cx="3393338" cy="2103120"/>
-          </a:xfrm>
-          <a:prstGeom prst="roundRect">
-            <a:avLst/>
-          </a:prstGeom>
-          <a:solidFill>
-            <a:srgbClr val="FFFFFF"/>
-          </a:solidFill>
-          <a:ln w="22860">
-            <a:solidFill>
-              <a:srgbClr val="C8A86B"/>
-            </a:solidFill>
-          </a:ln>
-          <a:effectLst/>
-        </p:spPr>
-        <p:style>
-          <a:lnRef idx="1">
-            <a:schemeClr val="accent1"/>
-          </a:lnRef>
-          <a:fillRef idx="3">
-            <a:schemeClr val="accent1"/>
-          </a:fillRef>
-          <a:effectRef idx="2">
-            <a:schemeClr val="accent1"/>
-          </a:effectRef>
-          <a:fontRef idx="minor">
-            <a:schemeClr val="lt1"/>
-          </a:fontRef>
-        </p:style>
-        <p:txBody>
-          <a:bodyPr rtlCol="0" anchor="ctr"/>
-          <a:lstStyle/>
-          <a:p>
-            <a:pPr algn="ctr"/>
-          </a:p>
-        </p:txBody>
-      </p:sp>
-      <p:sp>
-        <p:nvSpPr>
-          <p:cNvPr id="13" name="TextBox 12"/>
-          <p:cNvSpPr txBox="1"/>
-          <p:nvPr/>
-        </p:nvSpPr>
-        <p:spPr>
-          <a:xfrm>
-            <a:off x="8386876" y="2514600"/>
-            <a:ext cx="2936138" cy="548640"/>
-          </a:xfrm>
-          <a:prstGeom prst="rect">
-            <a:avLst/>
-          </a:prstGeom>
-          <a:noFill/>
-        </p:spPr>
-        <p:txBody>
-          <a:bodyPr wrap="square" anchor="t" lIns="0" rIns="0" tIns="0" bIns="0">
-            <a:spAutoFit/>
-          </a:bodyPr>
-          <a:lstStyle/>
-          <a:p>
-            <a:pPr algn="ctr"/>
-            <a:r>
-              <a:rPr sz="2100" b="1">
-                <a:solidFill>
-                  <a:srgbClr val="C8A86B"/>
-                </a:solidFill>
-                <a:latin typeface="楷体"/>
-                <a:ea typeface="楷体"/>
-                <a:cs typeface="楷体"/>
-              </a:rPr>
-              <a:t>品节奏</a:t>
-            </a:r>
-          </a:p>
-        </p:txBody>
-      </p:sp>
-      <p:sp>
-        <p:nvSpPr>
-          <p:cNvPr id="14" name="TextBox 13"/>
-          <p:cNvSpPr txBox="1"/>
-          <p:nvPr/>
-        </p:nvSpPr>
-        <p:spPr>
-          <a:xfrm>
-            <a:off x="8432596" y="3154680"/>
-            <a:ext cx="2844698" cy="1097280"/>
-          </a:xfrm>
-          <a:prstGeom prst="rect">
-            <a:avLst/>
-          </a:prstGeom>
-          <a:noFill/>
-        </p:spPr>
-        <p:txBody>
-          <a:bodyPr wrap="square" anchor="t" lIns="0" rIns="0" tIns="0" bIns="0">
-            <a:spAutoFit/>
-          </a:bodyPr>
-          <a:lstStyle/>
-          <a:p>
-            <a:pPr algn="ctr">
-              <a:lnSpc>
-                <a:spcPct val="150000"/>
-              </a:lnSpc>
-            </a:pPr>
-            <a:r>
-              <a:rPr sz="1350" b="0">
-                <a:solidFill>
-                  <a:srgbClr val="1C2A33"/>
-                </a:solidFill>
-                <a:latin typeface="楷体"/>
-                <a:ea typeface="楷体"/>
-                <a:cs typeface="楷体"/>
-              </a:rPr>
-              <a:t>四言"二二"停顿：采采/芣苢，薄言/采之——像劳动号子。</a:t>
-            </a:r>
-          </a:p>
-        </p:txBody>
-      </p:sp>
-      <p:sp>
-        <p:nvSpPr>
-          <p:cNvPr id="15" name="Rounded Rectangle 14"/>
-          <p:cNvSpPr/>
-          <p:nvPr/>
-        </p:nvSpPr>
-        <p:spPr>
-          <a:xfrm>
-            <a:off x="640080" y="4572000"/>
-            <a:ext cx="10911535" cy="1920240"/>
-          </a:xfrm>
-          <a:prstGeom prst="roundRect">
-            <a:avLst/>
-          </a:prstGeom>
-          <a:solidFill>
-            <a:srgbClr val="1C2A33"/>
-          </a:solidFill>
-          <a:effectLst/>
-        </p:spPr>
-        <p:style>
-          <a:lnRef idx="1">
-            <a:schemeClr val="accent1"/>
-          </a:lnRef>
-          <a:fillRef idx="3">
-            <a:schemeClr val="accent1"/>
-          </a:fillRef>
-          <a:effectRef idx="2">
-            <a:schemeClr val="accent1"/>
-          </a:effectRef>
-          <a:fontRef idx="minor">
-            <a:schemeClr val="lt1"/>
-          </a:fontRef>
-        </p:style>
-        <p:txBody>
-          <a:bodyPr rtlCol="0" anchor="ctr"/>
-          <a:lstStyle/>
-          <a:p>
-            <a:pPr algn="ctr"/>
-          </a:p>
-        </p:txBody>
-      </p:sp>
-      <p:sp>
-        <p:nvSpPr>
-          <p:cNvPr id="16" name="Rectangle 15"/>
-          <p:cNvSpPr/>
-          <p:nvPr/>
-        </p:nvSpPr>
-        <p:spPr>
-          <a:xfrm>
-            <a:off x="914400" y="4800600"/>
-            <a:ext cx="54864" cy="381000"/>
           </a:xfrm>
           <a:prstGeom prst="rect">
             <a:avLst/>
@@ -10040,14 +8192,58 @@
       </p:sp>
       <p:sp>
         <p:nvSpPr>
-          <p:cNvPr id="17" name="TextBox 16"/>
+          <p:cNvPr id="5" name="Rectangle 4"/>
+          <p:cNvSpPr/>
+          <p:nvPr/>
+        </p:nvSpPr>
+        <p:spPr>
+          <a:xfrm>
+            <a:off x="640080" y="1737360"/>
+            <a:ext cx="54864" cy="431800"/>
+          </a:xfrm>
+          <a:prstGeom prst="rect">
+            <a:avLst/>
+          </a:prstGeom>
+          <a:solidFill>
+            <a:srgbClr val="C8A86B"/>
+          </a:solidFill>
+          <a:ln>
+            <a:noFill/>
+          </a:ln>
+          <a:effectLst/>
+        </p:spPr>
+        <p:style>
+          <a:lnRef idx="1">
+            <a:schemeClr val="accent1"/>
+          </a:lnRef>
+          <a:fillRef idx="3">
+            <a:schemeClr val="accent1"/>
+          </a:fillRef>
+          <a:effectRef idx="2">
+            <a:schemeClr val="accent1"/>
+          </a:effectRef>
+          <a:fontRef idx="minor">
+            <a:schemeClr val="lt1"/>
+          </a:fontRef>
+        </p:style>
+        <p:txBody>
+          <a:bodyPr rtlCol="0" anchor="ctr"/>
+          <a:lstStyle/>
+          <a:p>
+            <a:pPr algn="ctr"/>
+          </a:p>
+        </p:txBody>
+      </p:sp>
+      <p:sp>
+        <p:nvSpPr>
+          <p:cNvPr id="6" name="TextBox 5"/>
           <p:cNvSpPr txBox="1"/>
           <p:nvPr/>
         </p:nvSpPr>
         <p:spPr>
           <a:xfrm>
-            <a:off x="1143000" y="4709160"/>
-            <a:ext cx="10180015" cy="1737360"/>
+            <a:off x="868680" y="1645920"/>
+            <a:ext cx="10682935" cy="2194560"/>
           </a:xfrm>
           <a:prstGeom prst="rect">
             <a:avLst/>
@@ -10062,50 +8258,43 @@
           <a:p>
             <a:pPr algn="l">
               <a:lnSpc>
-                <a:spcPct val="140000"/>
+                <a:spcPct val="150000"/>
               </a:lnSpc>
               <a:spcAft>
-                <a:spcPts val="800"/>
+                <a:spcPts val="1000"/>
               </a:spcAft>
             </a:pPr>
             <a:r>
-              <a:rPr sz="1900" b="1">
-                <a:solidFill>
-                  <a:srgbClr val="C8A86B"/>
+              <a:rPr sz="2200" b="0">
+                <a:solidFill>
+                  <a:srgbClr val="1C2A33"/>
                 </a:solidFill>
                 <a:latin typeface="楷体"/>
                 <a:ea typeface="楷体"/>
                 <a:cs typeface="楷体"/>
               </a:rPr>
-              <a:t>劳动光荣，穿越千年</a:t>
-            </a:r>
-          </a:p>
-          <a:p>
-            <a:pPr algn="l">
-              <a:lnSpc>
-                <a:spcPct val="145000"/>
-              </a:lnSpc>
-            </a:pPr>
-            <a:r>
-              <a:rPr sz="1400" b="0">
-                <a:solidFill>
-                  <a:srgbClr val="FFFFFF"/>
-                </a:solidFill>
-                <a:latin typeface="楷体"/>
-                <a:ea typeface="楷体"/>
-                <a:cs typeface="楷体"/>
+              <a:t>本单元主题：劳动光荣。把今天学到的方法带进下一篇——自己读、自己想、自己写。</a:t>
+            </a:r>
+          </a:p>
+          <a:p>
+            <a:pPr algn="l"/>
+            <a:r>
+              <a:rPr sz="1600" b="1">
+                <a:solidFill>
+                  <a:srgbClr val="B23A2A"/>
+                </a:solidFill>
+                <a:latin typeface="微软雅黑"/>
+                <a:ea typeface="微软雅黑"/>
+                <a:cs typeface="微软雅黑"/>
               </a:rPr>
-              <a:t>《芣苢》：两千年前妇女的采摘欢歌。
-苏辙：千年前文人笔下的收麦温情。
-袁隆平/张秉贵/钟扬：今天的劳动精神。
-形式不同，精神相通——劳动光荣是中华民族的文化基因。</a:t>
-            </a:r>
-          </a:p>
-        </p:txBody>
-      </p:sp>
-      <p:sp>
-        <p:nvSpPr>
-          <p:cNvPr id="18" name="TextBox 17"/>
+              <a:t>方法迁移：圈关键信息 → 理事件脉络 → 析人物精神</a:t>
+            </a:r>
+          </a:p>
+        </p:txBody>
+      </p:sp>
+      <p:sp>
+        <p:nvSpPr>
+          <p:cNvPr id="7" name="TextBox 6"/>
           <p:cNvSpPr txBox="1"/>
           <p:nvPr/>
         </p:nvSpPr>
